--- a/docs/progress_update.pptx
+++ b/docs/progress_update.pptx
@@ -15,6 +15,10 @@
     <p:sldId id="263" r:id="rId14"/>
     <p:sldId id="264" r:id="rId15"/>
     <p:sldId id="265" r:id="rId16"/>
+    <p:sldId id="266" r:id="rId17"/>
+    <p:sldId id="267" r:id="rId18"/>
+    <p:sldId id="268" r:id="rId19"/>
+    <p:sldId id="269" r:id="rId20"/>
   </p:sldIdLst>
   <p:sldSz cx="12191695" cy="6858000" type="screen4x3"/>
   <p:notesSz cx="6858000" cy="9144000"/>
@@ -3193,8 +3197,8 @@
         </p:nvSpPr>
         <p:spPr>
           <a:xfrm>
-            <a:off x="640080" y="2148840"/>
-            <a:ext cx="8229600" cy="365760"/>
+            <a:off x="640080" y="1965960"/>
+            <a:ext cx="9144000" cy="365760"/>
           </a:xfrm>
           <a:prstGeom prst="rect">
             <a:avLst/>
@@ -3215,7 +3219,7 @@
                 </a:solidFill>
                 <a:latin typeface="Calibri"/>
               </a:rPr>
-              <a:t>AIML COURSE PROJECT · 23AID205 · PROGRESS UPDATE</a:t>
+              <a:t>AIML COURSE PROJECT · 23AID205 · FINAL RESULTS</a:t>
             </a:r>
           </a:p>
         </p:txBody>
@@ -3228,8 +3232,8 @@
         </p:nvSpPr>
         <p:spPr>
           <a:xfrm>
-            <a:off x="640080" y="2468880"/>
-            <a:ext cx="10332720" cy="1920240"/>
+            <a:off x="640080" y="2331720"/>
+            <a:ext cx="10424160" cy="1737360"/>
           </a:xfrm>
           <a:prstGeom prst="rect">
             <a:avLst/>
@@ -3250,7 +3254,7 @@
                 </a:solidFill>
                 <a:latin typeface="Calibri"/>
               </a:rPr>
-              <a:t>Deepfake Detection:</a:t>
+              <a:t>Inverted Transfer:</a:t>
             </a:r>
           </a:p>
           <a:p>
@@ -3262,7 +3266,7 @@
                 </a:solidFill>
                 <a:latin typeface="Calibri"/>
               </a:rPr>
-              <a:t>Why Detectors Invert on Unseen Manipulations</a:t>
+              <a:t>Why Deepfake Detectors Score Unseen Fakes Below Chance</a:t>
             </a:r>
           </a:p>
         </p:txBody>
@@ -3275,8 +3279,8 @@
         </p:nvSpPr>
         <p:spPr>
           <a:xfrm>
-            <a:off x="640080" y="4343400"/>
-            <a:ext cx="9601200" cy="900000"/>
+            <a:off x="640080" y="4160520"/>
+            <a:ext cx="10058400" cy="914400"/>
           </a:xfrm>
           <a:prstGeom prst="rect">
             <a:avLst/>
@@ -3297,52 +3301,43 @@
                 </a:solidFill>
                 <a:latin typeface="Calibri"/>
               </a:rPr>
-              <a:t>All three planned experiments are now complete. Cross-manipulation testing surfaced detectors scoring below random chance on FaceSwap cells -- not a pipeline bug (audited), and consistent across both architectures. This is now the project's central finding.</a:t>
-            </a:r>
-          </a:p>
-        </p:txBody>
-      </p:sp>
-      <p:sp>
-        <p:nvSpPr>
-          <p:cNvPr id="7" name="Rectangle 6"/>
-          <p:cNvSpPr/>
-          <p:nvPr/>
-        </p:nvSpPr>
-        <p:spPr>
-          <a:xfrm>
-            <a:off x="640080" y="5424920"/>
-            <a:ext cx="457200" cy="27432"/>
-          </a:xfrm>
-          <a:prstGeom prst="rect">
-            <a:avLst/>
-          </a:prstGeom>
-          <a:solidFill>
-            <a:srgbClr val="22B8CF"/>
-          </a:solidFill>
-          <a:ln>
-            <a:noFill/>
-          </a:ln>
-          <a:effectLst/>
-        </p:spPr>
-        <p:style>
-          <a:lnRef idx="1">
-            <a:schemeClr val="accent1"/>
-          </a:lnRef>
-          <a:fillRef idx="3">
-            <a:schemeClr val="accent1"/>
-          </a:fillRef>
-          <a:effectRef idx="2">
-            <a:schemeClr val="accent1"/>
-          </a:effectRef>
-          <a:fontRef idx="minor">
-            <a:schemeClr val="lt1"/>
-          </a:fontRef>
-        </p:style>
-        <p:txBody>
-          <a:bodyPr rtlCol="0" anchor="ctr"/>
-          <a:lstStyle/>
-          <a:p>
-            <a:pPr algn="ctr"/>
+              <a:t>A detector trained on Deepfakes ranks FaceSwap fakes as more real than real faces (AUC 0.26). The inversion survives every preprocessing change and three architectures, follows a measurable sharpness cue, and is partly fixed by randomizing that cue.</a:t>
+            </a:r>
+          </a:p>
+        </p:txBody>
+      </p:sp>
+      <p:sp>
+        <p:nvSpPr>
+          <p:cNvPr id="7" name="TextBox 6"/>
+          <p:cNvSpPr txBox="1"/>
+          <p:nvPr/>
+        </p:nvSpPr>
+        <p:spPr>
+          <a:xfrm>
+            <a:off x="640080" y="5989320"/>
+            <a:ext cx="10789920" cy="320040"/>
+          </a:xfrm>
+          <a:prstGeom prst="rect">
+            <a:avLst/>
+          </a:prstGeom>
+          <a:noFill/>
+        </p:spPr>
+        <p:txBody>
+          <a:bodyPr wrap="square">
+            <a:spAutoFit/>
+          </a:bodyPr>
+          <a:lstStyle/>
+          <a:p>
+            <a:pPr algn="l"/>
+            <a:r>
+              <a:rPr sz="1300" b="1">
+                <a:solidFill>
+                  <a:srgbClr val="E5E9F0"/>
+                </a:solidFill>
+                <a:latin typeface="Calibri"/>
+              </a:rPr>
+              <a:t>Venugopalan Gangadharan · Vipin Sudhakar · Rithvik Arulprakash · Harshith Kv</a:t>
+            </a:r>
           </a:p>
         </p:txBody>
       </p:sp>
@@ -3354,42 +3349,7 @@
         </p:nvSpPr>
         <p:spPr>
           <a:xfrm>
-            <a:off x="640080" y="6039320"/>
-            <a:ext cx="10852800" cy="320040"/>
-          </a:xfrm>
-          <a:prstGeom prst="rect">
-            <a:avLst/>
-          </a:prstGeom>
-          <a:noFill/>
-        </p:spPr>
-        <p:txBody>
-          <a:bodyPr wrap="square">
-            <a:spAutoFit/>
-          </a:bodyPr>
-          <a:lstStyle/>
-          <a:p>
-            <a:pPr algn="l"/>
-            <a:r>
-              <a:rPr sz="1300" b="1">
-                <a:solidFill>
-                  <a:srgbClr val="E5E9F0"/>
-                </a:solidFill>
-                <a:latin typeface="Calibri"/>
-              </a:rPr>
-              <a:t>Venugopalan Gangadharan · Vipin Sudhakar · Rithvik Arulprakash · Harshith Kv</a:t>
-            </a:r>
-          </a:p>
-        </p:txBody>
-      </p:sp>
-      <p:sp>
-        <p:nvSpPr>
-          <p:cNvPr id="9" name="TextBox 8"/>
-          <p:cNvSpPr txBox="1"/>
-          <p:nvPr/>
-        </p:nvSpPr>
-        <p:spPr>
-          <a:xfrm>
-            <a:off x="640080" y="6313640"/>
+            <a:off x="640080" y="6291072"/>
             <a:ext cx="7315200" cy="274320"/>
           </a:xfrm>
           <a:prstGeom prst="rect">
@@ -3508,7 +3468,7 @@
                 </a:solidFill>
                 <a:latin typeface="Calibri"/>
               </a:rPr>
-              <a:t>CLOSING</a:t>
+              <a:t>PHASE 5</a:t>
             </a:r>
           </a:p>
         </p:txBody>
@@ -3543,7 +3503,7 @@
                 </a:solidFill>
                 <a:latin typeface="Calibri"/>
               </a:rPr>
-              <a:t>Where to Follow Along</a:t>
+              <a:t>Three Architectures Fail the Same Way</a:t>
             </a:r>
           </a:p>
         </p:txBody>
@@ -3600,8 +3560,3196 @@
         </p:nvSpPr>
         <p:spPr>
           <a:xfrm>
+            <a:off x="640080" y="1691640"/>
+            <a:ext cx="10515600" cy="400000"/>
+          </a:xfrm>
+          <a:prstGeom prst="rect">
+            <a:avLst/>
+          </a:prstGeom>
+          <a:noFill/>
+        </p:spPr>
+        <p:txBody>
+          <a:bodyPr wrap="square">
+            <a:spAutoFit/>
+          </a:bodyPr>
+          <a:lstStyle/>
+          <a:p>
+            <a:pPr algn="l"/>
+            <a:r>
+              <a:rPr sz="1350" b="0">
+                <a:solidFill>
+                  <a:srgbClr val="475569"/>
+                </a:solidFill>
+                <a:latin typeface="Calibri"/>
+              </a:rPr>
+              <a:t>ImageNet-pretrained backbones at the same 299 px input, reference pipeline.</a:t>
+            </a:r>
+          </a:p>
+        </p:txBody>
+      </p:sp>
+      <p:graphicFrame>
+        <p:nvGraphicFramePr>
+          <p:cNvPr id="7" name="Table 6"/>
+          <p:cNvGraphicFramePr>
+            <a:graphicFrameLocks noGrp="1"/>
+          </p:cNvGraphicFramePr>
+          <p:nvPr/>
+        </p:nvGraphicFramePr>
+        <p:xfrm>
+          <a:off x="640080" y="2141640"/>
+          <a:ext cx="10607040" cy="1680000"/>
+        </p:xfrm>
+        <a:graphic>
+          <a:graphicData uri="http://schemas.openxmlformats.org/drawingml/2006/table">
+            <a:tbl>
+              <a:tblPr firstRow="1" bandRow="1">
+                <a:tableStyleId>{5C22544A-7EE6-4342-B048-85BDC9FD1C3A}</a:tableStyleId>
+              </a:tblPr>
+              <a:tblGrid>
+                <a:gridCol w="3017520"/>
+                <a:gridCol w="1737360"/>
+                <a:gridCol w="1737360"/>
+                <a:gridCol w="1737360"/>
+                <a:gridCol w="2377440"/>
+              </a:tblGrid>
+              <a:tr h="420000">
+                <a:tc>
+                  <a:txBody>
+                    <a:bodyPr/>
+                    <a:lstStyle/>
+                    <a:p>
+                      <a:r>
+                        <a:rPr sz="1300" b="1">
+                          <a:solidFill>
+                            <a:srgbClr val="FFFFFF"/>
+                          </a:solidFill>
+                          <a:latin typeface="Calibri"/>
+                        </a:rPr>
+                        <a:t>Backbone</a:t>
+                      </a:r>
+                    </a:p>
+                  </a:txBody>
+                  <a:tcPr anchor="ctr">
+                    <a:solidFill>
+                      <a:srgbClr val="0F172A"/>
+                    </a:solidFill>
+                  </a:tcPr>
+                </a:tc>
+                <a:tc>
+                  <a:txBody>
+                    <a:bodyPr/>
+                    <a:lstStyle/>
+                    <a:p>
+                      <a:r>
+                        <a:rPr sz="1300" b="1">
+                          <a:solidFill>
+                            <a:srgbClr val="FFFFFF"/>
+                          </a:solidFill>
+                          <a:latin typeface="Calibri"/>
+                        </a:rPr>
+                        <a:t>DF → FS</a:t>
+                      </a:r>
+                    </a:p>
+                  </a:txBody>
+                  <a:tcPr anchor="ctr">
+                    <a:solidFill>
+                      <a:srgbClr val="0F172A"/>
+                    </a:solidFill>
+                  </a:tcPr>
+                </a:tc>
+                <a:tc>
+                  <a:txBody>
+                    <a:bodyPr/>
+                    <a:lstStyle/>
+                    <a:p>
+                      <a:r>
+                        <a:rPr sz="1300" b="1">
+                          <a:solidFill>
+                            <a:srgbClr val="FFFFFF"/>
+                          </a:solidFill>
+                          <a:latin typeface="Calibri"/>
+                        </a:rPr>
+                        <a:t>FS → NT</a:t>
+                      </a:r>
+                    </a:p>
+                  </a:txBody>
+                  <a:tcPr anchor="ctr">
+                    <a:solidFill>
+                      <a:srgbClr val="0F172A"/>
+                    </a:solidFill>
+                  </a:tcPr>
+                </a:tc>
+                <a:tc>
+                  <a:txBody>
+                    <a:bodyPr/>
+                    <a:lstStyle/>
+                    <a:p>
+                      <a:r>
+                        <a:rPr sz="1300" b="1">
+                          <a:solidFill>
+                            <a:srgbClr val="FFFFFF"/>
+                          </a:solidFill>
+                          <a:latin typeface="Calibri"/>
+                        </a:rPr>
+                        <a:t>FS → DF</a:t>
+                      </a:r>
+                    </a:p>
+                  </a:txBody>
+                  <a:tcPr anchor="ctr">
+                    <a:solidFill>
+                      <a:srgbClr val="0F172A"/>
+                    </a:solidFill>
+                  </a:tcPr>
+                </a:tc>
+                <a:tc>
+                  <a:txBody>
+                    <a:bodyPr/>
+                    <a:lstStyle/>
+                    <a:p>
+                      <a:r>
+                        <a:rPr sz="1300" b="1">
+                          <a:solidFill>
+                            <a:srgbClr val="FFFFFF"/>
+                          </a:solidFill>
+                          <a:latin typeface="Calibri"/>
+                        </a:rPr>
+                        <a:t>Same call as Xception</a:t>
+                      </a:r>
+                    </a:p>
+                  </a:txBody>
+                  <a:tcPr anchor="ctr">
+                    <a:solidFill>
+                      <a:srgbClr val="0F172A"/>
+                    </a:solidFill>
+                  </a:tcPr>
+                </a:tc>
+              </a:tr>
+              <a:tr h="420000">
+                <a:tc>
+                  <a:txBody>
+                    <a:bodyPr/>
+                    <a:lstStyle/>
+                    <a:p>
+                      <a:r>
+                        <a:rPr sz="1250" b="1">
+                          <a:solidFill>
+                            <a:srgbClr val="1A202C"/>
+                          </a:solidFill>
+                          <a:latin typeface="Calibri"/>
+                        </a:rPr>
+                        <a:t>Xception (3 seeds)</a:t>
+                      </a:r>
+                    </a:p>
+                  </a:txBody>
+                  <a:tcPr anchor="ctr">
+                    <a:solidFill>
+                      <a:srgbClr val="FFFFFF"/>
+                    </a:solidFill>
+                  </a:tcPr>
+                </a:tc>
+                <a:tc>
+                  <a:txBody>
+                    <a:bodyPr/>
+                    <a:lstStyle/>
+                    <a:p>
+                      <a:r>
+                        <a:rPr sz="1250" b="0">
+                          <a:solidFill>
+                            <a:srgbClr val="1A202C"/>
+                          </a:solidFill>
+                          <a:latin typeface="Calibri"/>
+                        </a:rPr>
+                        <a:t>0.258</a:t>
+                      </a:r>
+                    </a:p>
+                  </a:txBody>
+                  <a:tcPr anchor="ctr">
+                    <a:solidFill>
+                      <a:srgbClr val="FFFFFF"/>
+                    </a:solidFill>
+                  </a:tcPr>
+                </a:tc>
+                <a:tc>
+                  <a:txBody>
+                    <a:bodyPr/>
+                    <a:lstStyle/>
+                    <a:p>
+                      <a:r>
+                        <a:rPr sz="1250" b="0">
+                          <a:solidFill>
+                            <a:srgbClr val="1A202C"/>
+                          </a:solidFill>
+                          <a:latin typeface="Calibri"/>
+                        </a:rPr>
+                        <a:t>0.428</a:t>
+                      </a:r>
+                    </a:p>
+                  </a:txBody>
+                  <a:tcPr anchor="ctr">
+                    <a:solidFill>
+                      <a:srgbClr val="FFFFFF"/>
+                    </a:solidFill>
+                  </a:tcPr>
+                </a:tc>
+                <a:tc>
+                  <a:txBody>
+                    <a:bodyPr/>
+                    <a:lstStyle/>
+                    <a:p>
+                      <a:r>
+                        <a:rPr sz="1250" b="0">
+                          <a:solidFill>
+                            <a:srgbClr val="1A202C"/>
+                          </a:solidFill>
+                          <a:latin typeface="Calibri"/>
+                        </a:rPr>
+                        <a:t>0.469</a:t>
+                      </a:r>
+                    </a:p>
+                  </a:txBody>
+                  <a:tcPr anchor="ctr">
+                    <a:solidFill>
+                      <a:srgbClr val="FFFFFF"/>
+                    </a:solidFill>
+                  </a:tcPr>
+                </a:tc>
+                <a:tc>
+                  <a:txBody>
+                    <a:bodyPr/>
+                    <a:lstStyle/>
+                    <a:p>
+                      <a:r>
+                        <a:rPr sz="1250" b="0">
+                          <a:solidFill>
+                            <a:srgbClr val="1A202C"/>
+                          </a:solidFill>
+                          <a:latin typeface="Calibri"/>
+                        </a:rPr>
+                        <a:t>—</a:t>
+                      </a:r>
+                    </a:p>
+                  </a:txBody>
+                  <a:tcPr anchor="ctr">
+                    <a:solidFill>
+                      <a:srgbClr val="FFFFFF"/>
+                    </a:solidFill>
+                  </a:tcPr>
+                </a:tc>
+              </a:tr>
+              <a:tr h="420000">
+                <a:tc>
+                  <a:txBody>
+                    <a:bodyPr/>
+                    <a:lstStyle/>
+                    <a:p>
+                      <a:r>
+                        <a:rPr sz="1250" b="1">
+                          <a:solidFill>
+                            <a:srgbClr val="1A202C"/>
+                          </a:solidFill>
+                          <a:latin typeface="Calibri"/>
+                        </a:rPr>
+                        <a:t>ResNet-50 (2 seeds)</a:t>
+                      </a:r>
+                    </a:p>
+                  </a:txBody>
+                  <a:tcPr anchor="ctr">
+                    <a:solidFill>
+                      <a:srgbClr val="F1F5F9"/>
+                    </a:solidFill>
+                  </a:tcPr>
+                </a:tc>
+                <a:tc>
+                  <a:txBody>
+                    <a:bodyPr/>
+                    <a:lstStyle/>
+                    <a:p>
+                      <a:r>
+                        <a:rPr sz="1250" b="0">
+                          <a:solidFill>
+                            <a:srgbClr val="1A202C"/>
+                          </a:solidFill>
+                          <a:latin typeface="Calibri"/>
+                        </a:rPr>
+                        <a:t>0.291</a:t>
+                      </a:r>
+                    </a:p>
+                  </a:txBody>
+                  <a:tcPr anchor="ctr">
+                    <a:solidFill>
+                      <a:srgbClr val="F1F5F9"/>
+                    </a:solidFill>
+                  </a:tcPr>
+                </a:tc>
+                <a:tc>
+                  <a:txBody>
+                    <a:bodyPr/>
+                    <a:lstStyle/>
+                    <a:p>
+                      <a:r>
+                        <a:rPr sz="1250" b="0">
+                          <a:solidFill>
+                            <a:srgbClr val="1A202C"/>
+                          </a:solidFill>
+                          <a:latin typeface="Calibri"/>
+                        </a:rPr>
+                        <a:t>0.416</a:t>
+                      </a:r>
+                    </a:p>
+                  </a:txBody>
+                  <a:tcPr anchor="ctr">
+                    <a:solidFill>
+                      <a:srgbClr val="F1F5F9"/>
+                    </a:solidFill>
+                  </a:tcPr>
+                </a:tc>
+                <a:tc>
+                  <a:txBody>
+                    <a:bodyPr/>
+                    <a:lstStyle/>
+                    <a:p>
+                      <a:r>
+                        <a:rPr sz="1250" b="0">
+                          <a:solidFill>
+                            <a:srgbClr val="1A202C"/>
+                          </a:solidFill>
+                          <a:latin typeface="Calibri"/>
+                        </a:rPr>
+                        <a:t>0.450</a:t>
+                      </a:r>
+                    </a:p>
+                  </a:txBody>
+                  <a:tcPr anchor="ctr">
+                    <a:solidFill>
+                      <a:srgbClr val="F1F5F9"/>
+                    </a:solidFill>
+                  </a:tcPr>
+                </a:tc>
+                <a:tc>
+                  <a:txBody>
+                    <a:bodyPr/>
+                    <a:lstStyle/>
+                    <a:p>
+                      <a:r>
+                        <a:rPr sz="1250" b="0">
+                          <a:solidFill>
+                            <a:srgbClr val="1A202C"/>
+                          </a:solidFill>
+                          <a:latin typeface="Calibri"/>
+                        </a:rPr>
+                        <a:t>8 / 8</a:t>
+                      </a:r>
+                    </a:p>
+                  </a:txBody>
+                  <a:tcPr anchor="ctr">
+                    <a:solidFill>
+                      <a:srgbClr val="F1F5F9"/>
+                    </a:solidFill>
+                  </a:tcPr>
+                </a:tc>
+              </a:tr>
+              <a:tr h="420000">
+                <a:tc>
+                  <a:txBody>
+                    <a:bodyPr/>
+                    <a:lstStyle/>
+                    <a:p>
+                      <a:r>
+                        <a:rPr sz="1250" b="1">
+                          <a:solidFill>
+                            <a:srgbClr val="1A202C"/>
+                          </a:solidFill>
+                          <a:latin typeface="Calibri"/>
+                        </a:rPr>
+                        <a:t>EfficientNet-B4 (2 seeds)</a:t>
+                      </a:r>
+                    </a:p>
+                  </a:txBody>
+                  <a:tcPr anchor="ctr">
+                    <a:solidFill>
+                      <a:srgbClr val="FFFFFF"/>
+                    </a:solidFill>
+                  </a:tcPr>
+                </a:tc>
+                <a:tc>
+                  <a:txBody>
+                    <a:bodyPr/>
+                    <a:lstStyle/>
+                    <a:p>
+                      <a:r>
+                        <a:rPr sz="1250" b="0">
+                          <a:solidFill>
+                            <a:srgbClr val="1A202C"/>
+                          </a:solidFill>
+                          <a:latin typeface="Calibri"/>
+                        </a:rPr>
+                        <a:t>0.264</a:t>
+                      </a:r>
+                    </a:p>
+                  </a:txBody>
+                  <a:tcPr anchor="ctr">
+                    <a:solidFill>
+                      <a:srgbClr val="FFFFFF"/>
+                    </a:solidFill>
+                  </a:tcPr>
+                </a:tc>
+                <a:tc>
+                  <a:txBody>
+                    <a:bodyPr/>
+                    <a:lstStyle/>
+                    <a:p>
+                      <a:r>
+                        <a:rPr sz="1250" b="0">
+                          <a:solidFill>
+                            <a:srgbClr val="1A202C"/>
+                          </a:solidFill>
+                          <a:latin typeface="Calibri"/>
+                        </a:rPr>
+                        <a:t>0.361</a:t>
+                      </a:r>
+                    </a:p>
+                  </a:txBody>
+                  <a:tcPr anchor="ctr">
+                    <a:solidFill>
+                      <a:srgbClr val="FFFFFF"/>
+                    </a:solidFill>
+                  </a:tcPr>
+                </a:tc>
+                <a:tc>
+                  <a:txBody>
+                    <a:bodyPr/>
+                    <a:lstStyle/>
+                    <a:p>
+                      <a:r>
+                        <a:rPr sz="1250" b="0">
+                          <a:solidFill>
+                            <a:srgbClr val="1A202C"/>
+                          </a:solidFill>
+                          <a:latin typeface="Calibri"/>
+                        </a:rPr>
+                        <a:t>0.477</a:t>
+                      </a:r>
+                    </a:p>
+                  </a:txBody>
+                  <a:tcPr anchor="ctr">
+                    <a:solidFill>
+                      <a:srgbClr val="FFFFFF"/>
+                    </a:solidFill>
+                  </a:tcPr>
+                </a:tc>
+                <a:tc>
+                  <a:txBody>
+                    <a:bodyPr/>
+                    <a:lstStyle/>
+                    <a:p>
+                      <a:r>
+                        <a:rPr sz="1250" b="0">
+                          <a:solidFill>
+                            <a:srgbClr val="1A202C"/>
+                          </a:solidFill>
+                          <a:latin typeface="Calibri"/>
+                        </a:rPr>
+                        <a:t>8 / 8</a:t>
+                      </a:r>
+                    </a:p>
+                  </a:txBody>
+                  <a:tcPr anchor="ctr">
+                    <a:solidFill>
+                      <a:srgbClr val="FFFFFF"/>
+                    </a:solidFill>
+                  </a:tcPr>
+                </a:tc>
+              </a:tr>
+            </a:tbl>
+          </a:graphicData>
+        </a:graphic>
+      </p:graphicFrame>
+      <p:sp>
+        <p:nvSpPr>
+          <p:cNvPr id="8" name="TextBox 7"/>
+          <p:cNvSpPr txBox="1"/>
+          <p:nvPr/>
+        </p:nvSpPr>
+        <p:spPr>
+          <a:xfrm>
+            <a:off x="640080" y="4001640"/>
+            <a:ext cx="10852800" cy="600000"/>
+          </a:xfrm>
+          <a:prstGeom prst="rect">
+            <a:avLst/>
+          </a:prstGeom>
+          <a:noFill/>
+        </p:spPr>
+        <p:txBody>
+          <a:bodyPr wrap="square">
+            <a:spAutoFit/>
+          </a:bodyPr>
+          <a:lstStyle/>
+          <a:p>
+            <a:pPr algn="l"/>
+            <a:r>
+              <a:rPr sz="1200" b="0">
+                <a:solidFill>
+                  <a:srgbClr val="475569"/>
+                </a:solidFill>
+                <a:latin typeface="Calibri"/>
+              </a:rPr>
+              <a:t>Every backbone gives the same below / at / above-chance result in every cell; the original CNN-ViT hybrid agreed with Xception at r = 0.94. The inversion comes from the training data, not the network.</a:t>
+            </a:r>
+          </a:p>
+        </p:txBody>
+      </p:sp>
+      <p:sp>
+        <p:nvSpPr>
+          <p:cNvPr id="9" name="TextBox 8"/>
+          <p:cNvSpPr txBox="1"/>
+          <p:nvPr/>
+        </p:nvSpPr>
+        <p:spPr>
+          <a:xfrm>
+            <a:off x="640080" y="6510528"/>
+            <a:ext cx="7315200" cy="274320"/>
+          </a:xfrm>
+          <a:prstGeom prst="rect">
+            <a:avLst/>
+          </a:prstGeom>
+          <a:noFill/>
+        </p:spPr>
+        <p:txBody>
+          <a:bodyPr wrap="square">
+            <a:spAutoFit/>
+          </a:bodyPr>
+          <a:lstStyle/>
+          <a:p>
+            <a:pPr algn="l"/>
+            <a:r>
+              <a:rPr sz="1000" b="0">
+                <a:solidFill>
+                  <a:srgbClr val="94A3B8"/>
+                </a:solidFill>
+                <a:latin typeface="Calibri"/>
+              </a:rPr>
+              <a:t>Deepfake Detection — Inverted Transfer (23AID205)</a:t>
+            </a:r>
+          </a:p>
+        </p:txBody>
+      </p:sp>
+      <p:sp>
+        <p:nvSpPr>
+          <p:cNvPr id="10" name="TextBox 9"/>
+          <p:cNvSpPr txBox="1"/>
+          <p:nvPr/>
+        </p:nvSpPr>
+        <p:spPr>
+          <a:xfrm>
+            <a:off x="10972800" y="6510528"/>
+            <a:ext cx="822960" cy="274320"/>
+          </a:xfrm>
+          <a:prstGeom prst="rect">
+            <a:avLst/>
+          </a:prstGeom>
+          <a:noFill/>
+        </p:spPr>
+        <p:txBody>
+          <a:bodyPr wrap="square">
+            <a:spAutoFit/>
+          </a:bodyPr>
+          <a:lstStyle/>
+          <a:p>
+            <a:pPr algn="r"/>
+            <a:r>
+              <a:rPr sz="1000" b="0">
+                <a:solidFill>
+                  <a:srgbClr val="94A3B8"/>
+                </a:solidFill>
+                <a:latin typeface="Calibri"/>
+              </a:rPr>
+              <a:t>10/14</a:t>
+            </a:r>
+          </a:p>
+        </p:txBody>
+      </p:sp>
+    </p:spTree>
+  </p:cSld>
+  <p:clrMapOvr>
+    <a:masterClrMapping/>
+  </p:clrMapOvr>
+</p:sld>
+</file>
+
+<file path=ppt/slides/slide11.xml><?xml version="1.0" encoding="utf-8"?>
+<p:sld xmlns:a="http://schemas.openxmlformats.org/drawingml/2006/main" xmlns:p="http://schemas.openxmlformats.org/presentationml/2006/main" xmlns:r="http://schemas.openxmlformats.org/officeDocument/2006/relationships">
+  <p:cSld>
+    <p:spTree>
+      <p:nvGrpSpPr>
+        <p:cNvPr id="1" name=""/>
+        <p:cNvGrpSpPr/>
+        <p:nvPr/>
+      </p:nvGrpSpPr>
+      <p:grpSpPr/>
+      <p:sp>
+        <p:nvSpPr>
+          <p:cNvPr id="2" name="Rectangle 1"/>
+          <p:cNvSpPr/>
+          <p:nvPr/>
+        </p:nvSpPr>
+        <p:spPr>
+          <a:xfrm>
+            <a:off x="0" y="0"/>
+            <a:ext cx="12191695" cy="6858000"/>
+          </a:xfrm>
+          <a:prstGeom prst="rect">
+            <a:avLst/>
+          </a:prstGeom>
+          <a:solidFill>
+            <a:srgbClr val="FFFFFF"/>
+          </a:solidFill>
+          <a:ln>
+            <a:noFill/>
+          </a:ln>
+          <a:effectLst/>
+        </p:spPr>
+        <p:style>
+          <a:lnRef idx="1">
+            <a:schemeClr val="accent1"/>
+          </a:lnRef>
+          <a:fillRef idx="3">
+            <a:schemeClr val="accent1"/>
+          </a:fillRef>
+          <a:effectRef idx="2">
+            <a:schemeClr val="accent1"/>
+          </a:effectRef>
+          <a:fontRef idx="minor">
+            <a:schemeClr val="lt1"/>
+          </a:fontRef>
+        </p:style>
+        <p:txBody>
+          <a:bodyPr rtlCol="0" anchor="ctr"/>
+          <a:lstStyle/>
+          <a:p>
+            <a:pPr algn="ctr"/>
+          </a:p>
+        </p:txBody>
+      </p:sp>
+      <p:sp>
+        <p:nvSpPr>
+          <p:cNvPr id="3" name="TextBox 2"/>
+          <p:cNvSpPr txBox="1"/>
+          <p:nvPr/>
+        </p:nvSpPr>
+        <p:spPr>
+          <a:xfrm>
+            <a:off x="640080" y="384048"/>
+            <a:ext cx="9144000" cy="320040"/>
+          </a:xfrm>
+          <a:prstGeom prst="rect">
+            <a:avLst/>
+          </a:prstGeom>
+          <a:noFill/>
+        </p:spPr>
+        <p:txBody>
+          <a:bodyPr wrap="square">
+            <a:spAutoFit/>
+          </a:bodyPr>
+          <a:lstStyle/>
+          <a:p>
+            <a:pPr algn="l"/>
+            <a:r>
+              <a:rPr sz="1300" b="1">
+                <a:solidFill>
+                  <a:srgbClr val="0E7490"/>
+                </a:solidFill>
+                <a:latin typeface="Calibri"/>
+              </a:rPr>
+              <a:t>PHASE 6 · EXTERNAL CHECK</a:t>
+            </a:r>
+          </a:p>
+        </p:txBody>
+      </p:sp>
+      <p:sp>
+        <p:nvSpPr>
+          <p:cNvPr id="4" name="TextBox 3"/>
+          <p:cNvSpPr txBox="1"/>
+          <p:nvPr/>
+        </p:nvSpPr>
+        <p:spPr>
+          <a:xfrm>
+            <a:off x="640080" y="658368"/>
+            <a:ext cx="10852800" cy="731520"/>
+          </a:xfrm>
+          <a:prstGeom prst="rect">
+            <a:avLst/>
+          </a:prstGeom>
+          <a:noFill/>
+        </p:spPr>
+        <p:txBody>
+          <a:bodyPr wrap="square">
+            <a:spAutoFit/>
+          </a:bodyPr>
+          <a:lstStyle/>
+          <a:p>
+            <a:pPr algn="l"/>
+            <a:r>
+              <a:rPr sz="2800" b="1">
+                <a:solidFill>
+                  <a:srgbClr val="1A202C"/>
+                </a:solidFill>
+                <a:latin typeface="Calibri"/>
+              </a:rPr>
+              <a:t>The Rule Does Not Transfer to a New Dataset</a:t>
+            </a:r>
+          </a:p>
+        </p:txBody>
+      </p:sp>
+      <p:sp>
+        <p:nvSpPr>
+          <p:cNvPr id="5" name="Rectangle 4"/>
+          <p:cNvSpPr/>
+          <p:nvPr/>
+        </p:nvSpPr>
+        <p:spPr>
+          <a:xfrm>
+            <a:off x="640080" y="1353312"/>
+            <a:ext cx="502920" cy="41148"/>
+          </a:xfrm>
+          <a:prstGeom prst="rect">
+            <a:avLst/>
+          </a:prstGeom>
+          <a:solidFill>
+            <a:srgbClr val="22B8CF"/>
+          </a:solidFill>
+          <a:ln>
+            <a:noFill/>
+          </a:ln>
+          <a:effectLst/>
+        </p:spPr>
+        <p:style>
+          <a:lnRef idx="1">
+            <a:schemeClr val="accent1"/>
+          </a:lnRef>
+          <a:fillRef idx="3">
+            <a:schemeClr val="accent1"/>
+          </a:fillRef>
+          <a:effectRef idx="2">
+            <a:schemeClr val="accent1"/>
+          </a:effectRef>
+          <a:fontRef idx="minor">
+            <a:schemeClr val="lt1"/>
+          </a:fontRef>
+        </p:style>
+        <p:txBody>
+          <a:bodyPr rtlCol="0" anchor="ctr"/>
+          <a:lstStyle/>
+          <a:p>
+            <a:pPr algn="ctr"/>
+          </a:p>
+        </p:txBody>
+      </p:sp>
+      <p:sp>
+        <p:nvSpPr>
+          <p:cNvPr id="6" name="TextBox 5"/>
+          <p:cNvSpPr txBox="1"/>
+          <p:nvPr/>
+        </p:nvSpPr>
+        <p:spPr>
+          <a:xfrm>
+            <a:off x="640080" y="1691640"/>
+            <a:ext cx="10515600" cy="400000"/>
+          </a:xfrm>
+          <a:prstGeom prst="rect">
+            <a:avLst/>
+          </a:prstGeom>
+          <a:noFill/>
+        </p:spPr>
+        <p:txBody>
+          <a:bodyPr wrap="square">
+            <a:spAutoFit/>
+          </a:bodyPr>
+          <a:lstStyle/>
+          <a:p>
+            <a:pPr algn="l"/>
+            <a:r>
+              <a:rPr sz="1350" b="0">
+                <a:solidFill>
+                  <a:srgbClr val="475569"/>
+                </a:solidFill>
+                <a:latin typeface="Calibri"/>
+              </a:rPr>
+              <a:t>DeepFakeFace, no retraining. Its fakes are all blurrier than its real faces, so DF-trained should transfer and FS-trained invert.</a:t>
+            </a:r>
+          </a:p>
+        </p:txBody>
+      </p:sp>
+      <p:graphicFrame>
+        <p:nvGraphicFramePr>
+          <p:cNvPr id="7" name="Table 6"/>
+          <p:cNvGraphicFramePr>
+            <a:graphicFrameLocks noGrp="1"/>
+          </p:cNvGraphicFramePr>
+          <p:nvPr/>
+        </p:nvGraphicFramePr>
+        <p:xfrm>
+          <a:off x="640080" y="2141640"/>
+          <a:ext cx="10789920" cy="1680000"/>
+        </p:xfrm>
+        <a:graphic>
+          <a:graphicData uri="http://schemas.openxmlformats.org/drawingml/2006/table">
+            <a:tbl>
+              <a:tblPr firstRow="1" bandRow="1">
+                <a:tableStyleId>{5C22544A-7EE6-4342-B048-85BDC9FD1C3A}</a:tableStyleId>
+              </a:tblPr>
+              <a:tblGrid>
+                <a:gridCol w="2743200"/>
+                <a:gridCol w="1828800"/>
+                <a:gridCol w="3108960"/>
+                <a:gridCol w="3108960"/>
+              </a:tblGrid>
+              <a:tr h="420000">
+                <a:tc>
+                  <a:txBody>
+                    <a:bodyPr/>
+                    <a:lstStyle/>
+                    <a:p>
+                      <a:r>
+                        <a:rPr sz="1300" b="1">
+                          <a:solidFill>
+                            <a:srgbClr val="FFFFFF"/>
+                          </a:solidFill>
+                          <a:latin typeface="Calibri"/>
+                        </a:rPr>
+                        <a:t>Generator</a:t>
+                      </a:r>
+                    </a:p>
+                  </a:txBody>
+                  <a:tcPr anchor="ctr">
+                    <a:solidFill>
+                      <a:srgbClr val="0F172A"/>
+                    </a:solidFill>
+                  </a:tcPr>
+                </a:tc>
+                <a:tc>
+                  <a:txBody>
+                    <a:bodyPr/>
+                    <a:lstStyle/>
+                    <a:p>
+                      <a:r>
+                        <a:rPr sz="1300" b="1">
+                          <a:solidFill>
+                            <a:srgbClr val="FFFFFF"/>
+                          </a:solidFill>
+                          <a:latin typeface="Calibri"/>
+                        </a:rPr>
+                        <a:t>Sharpness d</a:t>
+                      </a:r>
+                    </a:p>
+                  </a:txBody>
+                  <a:tcPr anchor="ctr">
+                    <a:solidFill>
+                      <a:srgbClr val="0F172A"/>
+                    </a:solidFill>
+                  </a:tcPr>
+                </a:tc>
+                <a:tc>
+                  <a:txBody>
+                    <a:bodyPr/>
+                    <a:lstStyle/>
+                    <a:p>
+                      <a:r>
+                        <a:rPr sz="1300" b="1">
+                          <a:solidFill>
+                            <a:srgbClr val="FFFFFF"/>
+                          </a:solidFill>
+                          <a:latin typeface="Calibri"/>
+                        </a:rPr>
+                        <a:t>DF-trained AUC</a:t>
+                      </a:r>
+                    </a:p>
+                  </a:txBody>
+                  <a:tcPr anchor="ctr">
+                    <a:solidFill>
+                      <a:srgbClr val="0F172A"/>
+                    </a:solidFill>
+                  </a:tcPr>
+                </a:tc>
+                <a:tc>
+                  <a:txBody>
+                    <a:bodyPr/>
+                    <a:lstStyle/>
+                    <a:p>
+                      <a:r>
+                        <a:rPr sz="1300" b="1">
+                          <a:solidFill>
+                            <a:srgbClr val="FFFFFF"/>
+                          </a:solidFill>
+                          <a:latin typeface="Calibri"/>
+                        </a:rPr>
+                        <a:t>FS-trained AUC</a:t>
+                      </a:r>
+                    </a:p>
+                  </a:txBody>
+                  <a:tcPr anchor="ctr">
+                    <a:solidFill>
+                      <a:srgbClr val="0F172A"/>
+                    </a:solidFill>
+                  </a:tcPr>
+                </a:tc>
+              </a:tr>
+              <a:tr h="420000">
+                <a:tc>
+                  <a:txBody>
+                    <a:bodyPr/>
+                    <a:lstStyle/>
+                    <a:p>
+                      <a:r>
+                        <a:rPr sz="1250" b="1">
+                          <a:solidFill>
+                            <a:srgbClr val="1A202C"/>
+                          </a:solidFill>
+                          <a:latin typeface="Calibri"/>
+                        </a:rPr>
+                        <a:t>SD inpainting</a:t>
+                      </a:r>
+                    </a:p>
+                  </a:txBody>
+                  <a:tcPr anchor="ctr">
+                    <a:solidFill>
+                      <a:srgbClr val="FFFFFF"/>
+                    </a:solidFill>
+                  </a:tcPr>
+                </a:tc>
+                <a:tc>
+                  <a:txBody>
+                    <a:bodyPr/>
+                    <a:lstStyle/>
+                    <a:p>
+                      <a:r>
+                        <a:rPr sz="1250" b="0">
+                          <a:solidFill>
+                            <a:srgbClr val="1A202C"/>
+                          </a:solidFill>
+                          <a:latin typeface="Calibri"/>
+                        </a:rPr>
+                        <a:t>-0.26</a:t>
+                      </a:r>
+                    </a:p>
+                  </a:txBody>
+                  <a:tcPr anchor="ctr">
+                    <a:solidFill>
+                      <a:srgbClr val="FFFFFF"/>
+                    </a:solidFill>
+                  </a:tcPr>
+                </a:tc>
+                <a:tc>
+                  <a:txBody>
+                    <a:bodyPr/>
+                    <a:lstStyle/>
+                    <a:p>
+                      <a:r>
+                        <a:rPr sz="1250" b="0">
+                          <a:solidFill>
+                            <a:srgbClr val="1A202C"/>
+                          </a:solidFill>
+                          <a:latin typeface="Calibri"/>
+                        </a:rPr>
+                        <a:t>0.463 [0.44, 0.49]</a:t>
+                      </a:r>
+                    </a:p>
+                  </a:txBody>
+                  <a:tcPr anchor="ctr">
+                    <a:solidFill>
+                      <a:srgbClr val="FFFFFF"/>
+                    </a:solidFill>
+                  </a:tcPr>
+                </a:tc>
+                <a:tc>
+                  <a:txBody>
+                    <a:bodyPr/>
+                    <a:lstStyle/>
+                    <a:p>
+                      <a:r>
+                        <a:rPr sz="1250" b="0">
+                          <a:solidFill>
+                            <a:srgbClr val="1A202C"/>
+                          </a:solidFill>
+                          <a:latin typeface="Calibri"/>
+                        </a:rPr>
+                        <a:t>0.514 [0.49, 0.54]</a:t>
+                      </a:r>
+                    </a:p>
+                  </a:txBody>
+                  <a:tcPr anchor="ctr">
+                    <a:solidFill>
+                      <a:srgbClr val="FFFFFF"/>
+                    </a:solidFill>
+                  </a:tcPr>
+                </a:tc>
+              </a:tr>
+              <a:tr h="420000">
+                <a:tc>
+                  <a:txBody>
+                    <a:bodyPr/>
+                    <a:lstStyle/>
+                    <a:p>
+                      <a:r>
+                        <a:rPr sz="1250" b="1">
+                          <a:solidFill>
+                            <a:srgbClr val="1A202C"/>
+                          </a:solidFill>
+                          <a:latin typeface="Calibri"/>
+                        </a:rPr>
+                        <a:t>InsightFace swap</a:t>
+                      </a:r>
+                    </a:p>
+                  </a:txBody>
+                  <a:tcPr anchor="ctr">
+                    <a:solidFill>
+                      <a:srgbClr val="F1F5F9"/>
+                    </a:solidFill>
+                  </a:tcPr>
+                </a:tc>
+                <a:tc>
+                  <a:txBody>
+                    <a:bodyPr/>
+                    <a:lstStyle/>
+                    <a:p>
+                      <a:r>
+                        <a:rPr sz="1250" b="0">
+                          <a:solidFill>
+                            <a:srgbClr val="1A202C"/>
+                          </a:solidFill>
+                          <a:latin typeface="Calibri"/>
+                        </a:rPr>
+                        <a:t>-0.52</a:t>
+                      </a:r>
+                    </a:p>
+                  </a:txBody>
+                  <a:tcPr anchor="ctr">
+                    <a:solidFill>
+                      <a:srgbClr val="F1F5F9"/>
+                    </a:solidFill>
+                  </a:tcPr>
+                </a:tc>
+                <a:tc>
+                  <a:txBody>
+                    <a:bodyPr/>
+                    <a:lstStyle/>
+                    <a:p>
+                      <a:r>
+                        <a:rPr sz="1250" b="0">
+                          <a:solidFill>
+                            <a:srgbClr val="1A202C"/>
+                          </a:solidFill>
+                          <a:latin typeface="Calibri"/>
+                        </a:rPr>
+                        <a:t>0.654 [0.63, 0.68]</a:t>
+                      </a:r>
+                    </a:p>
+                  </a:txBody>
+                  <a:tcPr anchor="ctr">
+                    <a:solidFill>
+                      <a:srgbClr val="F1F5F9"/>
+                    </a:solidFill>
+                  </a:tcPr>
+                </a:tc>
+                <a:tc>
+                  <a:txBody>
+                    <a:bodyPr/>
+                    <a:lstStyle/>
+                    <a:p>
+                      <a:r>
+                        <a:rPr sz="1250" b="0">
+                          <a:solidFill>
+                            <a:srgbClr val="1A202C"/>
+                          </a:solidFill>
+                          <a:latin typeface="Calibri"/>
+                        </a:rPr>
+                        <a:t>0.491 [0.46, 0.52]</a:t>
+                      </a:r>
+                    </a:p>
+                  </a:txBody>
+                  <a:tcPr anchor="ctr">
+                    <a:solidFill>
+                      <a:srgbClr val="F1F5F9"/>
+                    </a:solidFill>
+                  </a:tcPr>
+                </a:tc>
+              </a:tr>
+              <a:tr h="420000">
+                <a:tc>
+                  <a:txBody>
+                    <a:bodyPr/>
+                    <a:lstStyle/>
+                    <a:p>
+                      <a:r>
+                        <a:rPr sz="1250" b="1">
+                          <a:solidFill>
+                            <a:srgbClr val="1A202C"/>
+                          </a:solidFill>
+                          <a:latin typeface="Calibri"/>
+                        </a:rPr>
+                        <a:t>SD text-to-image</a:t>
+                      </a:r>
+                    </a:p>
+                  </a:txBody>
+                  <a:tcPr anchor="ctr">
+                    <a:solidFill>
+                      <a:srgbClr val="FFFFFF"/>
+                    </a:solidFill>
+                  </a:tcPr>
+                </a:tc>
+                <a:tc>
+                  <a:txBody>
+                    <a:bodyPr/>
+                    <a:lstStyle/>
+                    <a:p>
+                      <a:r>
+                        <a:rPr sz="1250" b="0">
+                          <a:solidFill>
+                            <a:srgbClr val="1A202C"/>
+                          </a:solidFill>
+                          <a:latin typeface="Calibri"/>
+                        </a:rPr>
+                        <a:t>-0.40</a:t>
+                      </a:r>
+                    </a:p>
+                  </a:txBody>
+                  <a:tcPr anchor="ctr">
+                    <a:solidFill>
+                      <a:srgbClr val="FFFFFF"/>
+                    </a:solidFill>
+                  </a:tcPr>
+                </a:tc>
+                <a:tc>
+                  <a:txBody>
+                    <a:bodyPr/>
+                    <a:lstStyle/>
+                    <a:p>
+                      <a:r>
+                        <a:rPr sz="1250" b="0">
+                          <a:solidFill>
+                            <a:srgbClr val="1A202C"/>
+                          </a:solidFill>
+                          <a:latin typeface="Calibri"/>
+                        </a:rPr>
+                        <a:t>0.323 [0.30, 0.34]</a:t>
+                      </a:r>
+                    </a:p>
+                  </a:txBody>
+                  <a:tcPr anchor="ctr">
+                    <a:solidFill>
+                      <a:srgbClr val="FFFFFF"/>
+                    </a:solidFill>
+                  </a:tcPr>
+                </a:tc>
+                <a:tc>
+                  <a:txBody>
+                    <a:bodyPr/>
+                    <a:lstStyle/>
+                    <a:p>
+                      <a:r>
+                        <a:rPr sz="1250" b="0">
+                          <a:solidFill>
+                            <a:srgbClr val="1A202C"/>
+                          </a:solidFill>
+                          <a:latin typeface="Calibri"/>
+                        </a:rPr>
+                        <a:t>0.399 [0.38, 0.42]</a:t>
+                      </a:r>
+                    </a:p>
+                  </a:txBody>
+                  <a:tcPr anchor="ctr">
+                    <a:solidFill>
+                      <a:srgbClr val="FFFFFF"/>
+                    </a:solidFill>
+                  </a:tcPr>
+                </a:tc>
+              </a:tr>
+            </a:tbl>
+          </a:graphicData>
+        </a:graphic>
+      </p:graphicFrame>
+      <p:sp>
+        <p:nvSpPr>
+          <p:cNvPr id="8" name="TextBox 7"/>
+          <p:cNvSpPr txBox="1"/>
+          <p:nvPr/>
+        </p:nvSpPr>
+        <p:spPr>
+          <a:xfrm>
+            <a:off x="640080" y="4001640"/>
+            <a:ext cx="10852800" cy="600000"/>
+          </a:xfrm>
+          <a:prstGeom prst="rect">
+            <a:avLst/>
+          </a:prstGeom>
+          <a:noFill/>
+        </p:spPr>
+        <p:txBody>
+          <a:bodyPr wrap="square">
+            <a:spAutoFit/>
+          </a:bodyPr>
+          <a:lstStyle/>
+          <a:p>
+            <a:pPr algn="l"/>
+            <a:r>
+              <a:rPr sz="1200" b="0">
+                <a:solidFill>
+                  <a:srgbClr val="475569"/>
+                </a:solidFill>
+                <a:latin typeface="Calibri"/>
+              </a:rPr>
+              <a:t>Prediction correct in 2 of 4 decided cells, no better than chance. The sharpness account explains FaceForensics++, not other datasets.</a:t>
+            </a:r>
+          </a:p>
+        </p:txBody>
+      </p:sp>
+      <p:sp>
+        <p:nvSpPr>
+          <p:cNvPr id="9" name="TextBox 8"/>
+          <p:cNvSpPr txBox="1"/>
+          <p:nvPr/>
+        </p:nvSpPr>
+        <p:spPr>
+          <a:xfrm>
+            <a:off x="640080" y="6510528"/>
+            <a:ext cx="7315200" cy="274320"/>
+          </a:xfrm>
+          <a:prstGeom prst="rect">
+            <a:avLst/>
+          </a:prstGeom>
+          <a:noFill/>
+        </p:spPr>
+        <p:txBody>
+          <a:bodyPr wrap="square">
+            <a:spAutoFit/>
+          </a:bodyPr>
+          <a:lstStyle/>
+          <a:p>
+            <a:pPr algn="l"/>
+            <a:r>
+              <a:rPr sz="1000" b="0">
+                <a:solidFill>
+                  <a:srgbClr val="94A3B8"/>
+                </a:solidFill>
+                <a:latin typeface="Calibri"/>
+              </a:rPr>
+              <a:t>Deepfake Detection — Inverted Transfer (23AID205)</a:t>
+            </a:r>
+          </a:p>
+        </p:txBody>
+      </p:sp>
+      <p:sp>
+        <p:nvSpPr>
+          <p:cNvPr id="10" name="TextBox 9"/>
+          <p:cNvSpPr txBox="1"/>
+          <p:nvPr/>
+        </p:nvSpPr>
+        <p:spPr>
+          <a:xfrm>
+            <a:off x="10972800" y="6510528"/>
+            <a:ext cx="822960" cy="274320"/>
+          </a:xfrm>
+          <a:prstGeom prst="rect">
+            <a:avLst/>
+          </a:prstGeom>
+          <a:noFill/>
+        </p:spPr>
+        <p:txBody>
+          <a:bodyPr wrap="square">
+            <a:spAutoFit/>
+          </a:bodyPr>
+          <a:lstStyle/>
+          <a:p>
+            <a:pPr algn="r"/>
+            <a:r>
+              <a:rPr sz="1000" b="0">
+                <a:solidFill>
+                  <a:srgbClr val="94A3B8"/>
+                </a:solidFill>
+                <a:latin typeface="Calibri"/>
+              </a:rPr>
+              <a:t>11/14</a:t>
+            </a:r>
+          </a:p>
+        </p:txBody>
+      </p:sp>
+    </p:spTree>
+  </p:cSld>
+  <p:clrMapOvr>
+    <a:masterClrMapping/>
+  </p:clrMapOvr>
+</p:sld>
+</file>
+
+<file path=ppt/slides/slide12.xml><?xml version="1.0" encoding="utf-8"?>
+<p:sld xmlns:a="http://schemas.openxmlformats.org/drawingml/2006/main" xmlns:p="http://schemas.openxmlformats.org/presentationml/2006/main" xmlns:r="http://schemas.openxmlformats.org/officeDocument/2006/relationships">
+  <p:cSld>
+    <p:spTree>
+      <p:nvGrpSpPr>
+        <p:cNvPr id="1" name=""/>
+        <p:cNvGrpSpPr/>
+        <p:nvPr/>
+      </p:nvGrpSpPr>
+      <p:grpSpPr/>
+      <p:sp>
+        <p:nvSpPr>
+          <p:cNvPr id="2" name="Rectangle 1"/>
+          <p:cNvSpPr/>
+          <p:nvPr/>
+        </p:nvSpPr>
+        <p:spPr>
+          <a:xfrm>
+            <a:off x="0" y="0"/>
+            <a:ext cx="12191695" cy="6858000"/>
+          </a:xfrm>
+          <a:prstGeom prst="rect">
+            <a:avLst/>
+          </a:prstGeom>
+          <a:solidFill>
+            <a:srgbClr val="FFFFFF"/>
+          </a:solidFill>
+          <a:ln>
+            <a:noFill/>
+          </a:ln>
+          <a:effectLst/>
+        </p:spPr>
+        <p:style>
+          <a:lnRef idx="1">
+            <a:schemeClr val="accent1"/>
+          </a:lnRef>
+          <a:fillRef idx="3">
+            <a:schemeClr val="accent1"/>
+          </a:fillRef>
+          <a:effectRef idx="2">
+            <a:schemeClr val="accent1"/>
+          </a:effectRef>
+          <a:fontRef idx="minor">
+            <a:schemeClr val="lt1"/>
+          </a:fontRef>
+        </p:style>
+        <p:txBody>
+          <a:bodyPr rtlCol="0" anchor="ctr"/>
+          <a:lstStyle/>
+          <a:p>
+            <a:pPr algn="ctr"/>
+          </a:p>
+        </p:txBody>
+      </p:sp>
+      <p:sp>
+        <p:nvSpPr>
+          <p:cNvPr id="3" name="TextBox 2"/>
+          <p:cNvSpPr txBox="1"/>
+          <p:nvPr/>
+        </p:nvSpPr>
+        <p:spPr>
+          <a:xfrm>
+            <a:off x="640080" y="384048"/>
+            <a:ext cx="9144000" cy="320040"/>
+          </a:xfrm>
+          <a:prstGeom prst="rect">
+            <a:avLst/>
+          </a:prstGeom>
+          <a:noFill/>
+        </p:spPr>
+        <p:txBody>
+          <a:bodyPr wrap="square">
+            <a:spAutoFit/>
+          </a:bodyPr>
+          <a:lstStyle/>
+          <a:p>
+            <a:pPr algn="l"/>
+            <a:r>
+              <a:rPr sz="1300" b="1">
+                <a:solidFill>
+                  <a:srgbClr val="0E7490"/>
+                </a:solidFill>
+                <a:latin typeface="Calibri"/>
+              </a:rPr>
+              <a:t>CONCLUSIONS</a:t>
+            </a:r>
+          </a:p>
+        </p:txBody>
+      </p:sp>
+      <p:sp>
+        <p:nvSpPr>
+          <p:cNvPr id="4" name="TextBox 3"/>
+          <p:cNvSpPr txBox="1"/>
+          <p:nvPr/>
+        </p:nvSpPr>
+        <p:spPr>
+          <a:xfrm>
+            <a:off x="640080" y="658368"/>
+            <a:ext cx="10852800" cy="731520"/>
+          </a:xfrm>
+          <a:prstGeom prst="rect">
+            <a:avLst/>
+          </a:prstGeom>
+          <a:noFill/>
+        </p:spPr>
+        <p:txBody>
+          <a:bodyPr wrap="square">
+            <a:spAutoFit/>
+          </a:bodyPr>
+          <a:lstStyle/>
+          <a:p>
+            <a:pPr algn="l"/>
+            <a:r>
+              <a:rPr sz="2800" b="1">
+                <a:solidFill>
+                  <a:srgbClr val="1A202C"/>
+                </a:solidFill>
+                <a:latin typeface="Calibri"/>
+              </a:rPr>
+              <a:t>Verdict on the Four Claims</a:t>
+            </a:r>
+          </a:p>
+        </p:txBody>
+      </p:sp>
+      <p:sp>
+        <p:nvSpPr>
+          <p:cNvPr id="5" name="Rectangle 4"/>
+          <p:cNvSpPr/>
+          <p:nvPr/>
+        </p:nvSpPr>
+        <p:spPr>
+          <a:xfrm>
+            <a:off x="640080" y="1353312"/>
+            <a:ext cx="502920" cy="41148"/>
+          </a:xfrm>
+          <a:prstGeom prst="rect">
+            <a:avLst/>
+          </a:prstGeom>
+          <a:solidFill>
+            <a:srgbClr val="22B8CF"/>
+          </a:solidFill>
+          <a:ln>
+            <a:noFill/>
+          </a:ln>
+          <a:effectLst/>
+        </p:spPr>
+        <p:style>
+          <a:lnRef idx="1">
+            <a:schemeClr val="accent1"/>
+          </a:lnRef>
+          <a:fillRef idx="3">
+            <a:schemeClr val="accent1"/>
+          </a:fillRef>
+          <a:effectRef idx="2">
+            <a:schemeClr val="accent1"/>
+          </a:effectRef>
+          <a:fontRef idx="minor">
+            <a:schemeClr val="lt1"/>
+          </a:fontRef>
+        </p:style>
+        <p:txBody>
+          <a:bodyPr rtlCol="0" anchor="ctr"/>
+          <a:lstStyle/>
+          <a:p>
+            <a:pPr algn="ctr"/>
+          </a:p>
+        </p:txBody>
+      </p:sp>
+      <p:sp>
+        <p:nvSpPr>
+          <p:cNvPr id="6" name="Rectangle 5"/>
+          <p:cNvSpPr/>
+          <p:nvPr/>
+        </p:nvSpPr>
+        <p:spPr>
+          <a:xfrm>
             <a:off x="640080" y="1783080"/>
-            <a:ext cx="10852800" cy="1200000"/>
+            <a:ext cx="5303520" cy="2057400"/>
+          </a:xfrm>
+          <a:prstGeom prst="rect">
+            <a:avLst/>
+          </a:prstGeom>
+          <a:solidFill>
+            <a:srgbClr val="F1F5F9"/>
+          </a:solidFill>
+          <a:ln>
+            <a:noFill/>
+          </a:ln>
+          <a:effectLst/>
+        </p:spPr>
+        <p:style>
+          <a:lnRef idx="1">
+            <a:schemeClr val="accent1"/>
+          </a:lnRef>
+          <a:fillRef idx="3">
+            <a:schemeClr val="accent1"/>
+          </a:fillRef>
+          <a:effectRef idx="2">
+            <a:schemeClr val="accent1"/>
+          </a:effectRef>
+          <a:fontRef idx="minor">
+            <a:schemeClr val="lt1"/>
+          </a:fontRef>
+        </p:style>
+        <p:txBody>
+          <a:bodyPr rtlCol="0" anchor="ctr"/>
+          <a:lstStyle/>
+          <a:p>
+            <a:pPr algn="ctr"/>
+          </a:p>
+        </p:txBody>
+      </p:sp>
+      <p:sp>
+        <p:nvSpPr>
+          <p:cNvPr id="7" name="Rectangle 6"/>
+          <p:cNvSpPr/>
+          <p:nvPr/>
+        </p:nvSpPr>
+        <p:spPr>
+          <a:xfrm>
+            <a:off x="640080" y="1783080"/>
+            <a:ext cx="5303520" cy="502920"/>
+          </a:xfrm>
+          <a:prstGeom prst="rect">
+            <a:avLst/>
+          </a:prstGeom>
+          <a:solidFill>
+            <a:srgbClr val="DC2626"/>
+          </a:solidFill>
+          <a:ln>
+            <a:noFill/>
+          </a:ln>
+          <a:effectLst/>
+        </p:spPr>
+        <p:style>
+          <a:lnRef idx="1">
+            <a:schemeClr val="accent1"/>
+          </a:lnRef>
+          <a:fillRef idx="3">
+            <a:schemeClr val="accent1"/>
+          </a:fillRef>
+          <a:effectRef idx="2">
+            <a:schemeClr val="accent1"/>
+          </a:effectRef>
+          <a:fontRef idx="minor">
+            <a:schemeClr val="lt1"/>
+          </a:fontRef>
+        </p:style>
+        <p:txBody>
+          <a:bodyPr rtlCol="0" anchor="ctr"/>
+          <a:lstStyle/>
+          <a:p>
+            <a:pPr algn="ctr"/>
+          </a:p>
+        </p:txBody>
+      </p:sp>
+      <p:sp>
+        <p:nvSpPr>
+          <p:cNvPr id="8" name="TextBox 7"/>
+          <p:cNvSpPr txBox="1"/>
+          <p:nvPr/>
+        </p:nvSpPr>
+        <p:spPr>
+          <a:xfrm>
+            <a:off x="914400" y="1901952"/>
+            <a:ext cx="4754880" cy="320040"/>
+          </a:xfrm>
+          <a:prstGeom prst="rect">
+            <a:avLst/>
+          </a:prstGeom>
+          <a:noFill/>
+        </p:spPr>
+        <p:txBody>
+          <a:bodyPr wrap="square">
+            <a:spAutoFit/>
+          </a:bodyPr>
+          <a:lstStyle/>
+          <a:p>
+            <a:pPr algn="l"/>
+            <a:r>
+              <a:rPr sz="1400" b="1">
+                <a:solidFill>
+                  <a:srgbClr val="FFFFFF"/>
+                </a:solidFill>
+                <a:latin typeface="Calibri"/>
+              </a:rPr>
+              <a:t>C1 · PREPROCESSING — NOT SUPPORTED</a:t>
+            </a:r>
+          </a:p>
+        </p:txBody>
+      </p:sp>
+      <p:sp>
+        <p:nvSpPr>
+          <p:cNvPr id="9" name="TextBox 8"/>
+          <p:cNvSpPr txBox="1"/>
+          <p:nvPr/>
+        </p:nvSpPr>
+        <p:spPr>
+          <a:xfrm>
+            <a:off x="914400" y="2514600"/>
+            <a:ext cx="4754880" cy="1257400"/>
+          </a:xfrm>
+          <a:prstGeom prst="rect">
+            <a:avLst/>
+          </a:prstGeom>
+          <a:noFill/>
+        </p:spPr>
+        <p:txBody>
+          <a:bodyPr wrap="square">
+            <a:spAutoFit/>
+          </a:bodyPr>
+          <a:lstStyle/>
+          <a:p>
+            <a:pPr>
+              <a:lnSpc>
+                <a:spcPct val="112000"/>
+              </a:lnSpc>
+              <a:spcAft>
+                <a:spcPts val="800"/>
+              </a:spcAft>
+            </a:pPr>
+            <a:r>
+              <a:rPr sz="1250" b="1">
+                <a:solidFill>
+                  <a:srgbClr val="1A202C"/>
+                </a:solidFill>
+                <a:latin typeface="Calibri"/>
+              </a:rPr>
+              <a:t>▸  The inversion survives every preprocessing change tested</a:t>
+            </a:r>
+          </a:p>
+          <a:p>
+            <a:pPr>
+              <a:lnSpc>
+                <a:spcPct val="112000"/>
+              </a:lnSpc>
+              <a:spcAft>
+                <a:spcPts val="800"/>
+              </a:spcAft>
+            </a:pPr>
+            <a:r>
+              <a:rPr sz="1250" b="1">
+                <a:solidFill>
+                  <a:srgbClr val="1A202C"/>
+                </a:solidFill>
+                <a:latin typeface="Calibri"/>
+              </a:rPr>
+              <a:t>▸  Detector, alignment, format, size, frames, JPEG, crop</a:t>
+            </a:r>
+          </a:p>
+        </p:txBody>
+      </p:sp>
+      <p:sp>
+        <p:nvSpPr>
+          <p:cNvPr id="10" name="Rectangle 9"/>
+          <p:cNvSpPr/>
+          <p:nvPr/>
+        </p:nvSpPr>
+        <p:spPr>
+          <a:xfrm>
+            <a:off x="6245352" y="1783080"/>
+            <a:ext cx="5303520" cy="2057400"/>
+          </a:xfrm>
+          <a:prstGeom prst="rect">
+            <a:avLst/>
+          </a:prstGeom>
+          <a:solidFill>
+            <a:srgbClr val="F1F5F9"/>
+          </a:solidFill>
+          <a:ln>
+            <a:noFill/>
+          </a:ln>
+          <a:effectLst/>
+        </p:spPr>
+        <p:style>
+          <a:lnRef idx="1">
+            <a:schemeClr val="accent1"/>
+          </a:lnRef>
+          <a:fillRef idx="3">
+            <a:schemeClr val="accent1"/>
+          </a:fillRef>
+          <a:effectRef idx="2">
+            <a:schemeClr val="accent1"/>
+          </a:effectRef>
+          <a:fontRef idx="minor">
+            <a:schemeClr val="lt1"/>
+          </a:fontRef>
+        </p:style>
+        <p:txBody>
+          <a:bodyPr rtlCol="0" anchor="ctr"/>
+          <a:lstStyle/>
+          <a:p>
+            <a:pPr algn="ctr"/>
+          </a:p>
+        </p:txBody>
+      </p:sp>
+      <p:sp>
+        <p:nvSpPr>
+          <p:cNvPr id="11" name="Rectangle 10"/>
+          <p:cNvSpPr/>
+          <p:nvPr/>
+        </p:nvSpPr>
+        <p:spPr>
+          <a:xfrm>
+            <a:off x="6245352" y="1783080"/>
+            <a:ext cx="5303520" cy="502920"/>
+          </a:xfrm>
+          <a:prstGeom prst="rect">
+            <a:avLst/>
+          </a:prstGeom>
+          <a:solidFill>
+            <a:srgbClr val="16A34A"/>
+          </a:solidFill>
+          <a:ln>
+            <a:noFill/>
+          </a:ln>
+          <a:effectLst/>
+        </p:spPr>
+        <p:style>
+          <a:lnRef idx="1">
+            <a:schemeClr val="accent1"/>
+          </a:lnRef>
+          <a:fillRef idx="3">
+            <a:schemeClr val="accent1"/>
+          </a:fillRef>
+          <a:effectRef idx="2">
+            <a:schemeClr val="accent1"/>
+          </a:effectRef>
+          <a:fontRef idx="minor">
+            <a:schemeClr val="lt1"/>
+          </a:fontRef>
+        </p:style>
+        <p:txBody>
+          <a:bodyPr rtlCol="0" anchor="ctr"/>
+          <a:lstStyle/>
+          <a:p>
+            <a:pPr algn="ctr"/>
+          </a:p>
+        </p:txBody>
+      </p:sp>
+      <p:sp>
+        <p:nvSpPr>
+          <p:cNvPr id="12" name="TextBox 11"/>
+          <p:cNvSpPr txBox="1"/>
+          <p:nvPr/>
+        </p:nvSpPr>
+        <p:spPr>
+          <a:xfrm>
+            <a:off x="6519672" y="1901952"/>
+            <a:ext cx="4754880" cy="320040"/>
+          </a:xfrm>
+          <a:prstGeom prst="rect">
+            <a:avLst/>
+          </a:prstGeom>
+          <a:noFill/>
+        </p:spPr>
+        <p:txBody>
+          <a:bodyPr wrap="square">
+            <a:spAutoFit/>
+          </a:bodyPr>
+          <a:lstStyle/>
+          <a:p>
+            <a:pPr algn="l"/>
+            <a:r>
+              <a:rPr sz="1400" b="1">
+                <a:solidFill>
+                  <a:srgbClr val="FFFFFF"/>
+                </a:solidFill>
+                <a:latin typeface="Calibri"/>
+              </a:rPr>
+              <a:t>C2 · MECHANISM — SUPPORTED IN FF++</a:t>
+            </a:r>
+          </a:p>
+        </p:txBody>
+      </p:sp>
+      <p:sp>
+        <p:nvSpPr>
+          <p:cNvPr id="13" name="TextBox 12"/>
+          <p:cNvSpPr txBox="1"/>
+          <p:nvPr/>
+        </p:nvSpPr>
+        <p:spPr>
+          <a:xfrm>
+            <a:off x="6519672" y="2514600"/>
+            <a:ext cx="4754880" cy="1257400"/>
+          </a:xfrm>
+          <a:prstGeom prst="rect">
+            <a:avLst/>
+          </a:prstGeom>
+          <a:noFill/>
+        </p:spPr>
+        <p:txBody>
+          <a:bodyPr wrap="square">
+            <a:spAutoFit/>
+          </a:bodyPr>
+          <a:lstStyle/>
+          <a:p>
+            <a:pPr>
+              <a:lnSpc>
+                <a:spcPct val="112000"/>
+              </a:lnSpc>
+              <a:spcAft>
+                <a:spcPts val="800"/>
+              </a:spcAft>
+            </a:pPr>
+            <a:r>
+              <a:rPr sz="1250" b="1">
+                <a:solidFill>
+                  <a:srgbClr val="1A202C"/>
+                </a:solidFill>
+                <a:latin typeface="Calibri"/>
+              </a:rPr>
+              <a:t>▸  Sharpness sign predicts our and published matrices</a:t>
+            </a:r>
+          </a:p>
+          <a:p>
+            <a:pPr>
+              <a:lnSpc>
+                <a:spcPct val="112000"/>
+              </a:lnSpc>
+              <a:spcAft>
+                <a:spcPts val="800"/>
+              </a:spcAft>
+            </a:pPr>
+            <a:r>
+              <a:rPr sz="1250" b="1">
+                <a:solidFill>
+                  <a:srgbClr val="1A202C"/>
+                </a:solidFill>
+                <a:latin typeface="Calibri"/>
+              </a:rPr>
+              <a:t>▸  Fails on DeepFakeFace: within-benchmark only</a:t>
+            </a:r>
+          </a:p>
+        </p:txBody>
+      </p:sp>
+      <p:sp>
+        <p:nvSpPr>
+          <p:cNvPr id="14" name="Rectangle 13"/>
+          <p:cNvSpPr/>
+          <p:nvPr/>
+        </p:nvSpPr>
+        <p:spPr>
+          <a:xfrm>
+            <a:off x="640080" y="4114800"/>
+            <a:ext cx="5303520" cy="2057400"/>
+          </a:xfrm>
+          <a:prstGeom prst="rect">
+            <a:avLst/>
+          </a:prstGeom>
+          <a:solidFill>
+            <a:srgbClr val="F1F5F9"/>
+          </a:solidFill>
+          <a:ln>
+            <a:noFill/>
+          </a:ln>
+          <a:effectLst/>
+        </p:spPr>
+        <p:style>
+          <a:lnRef idx="1">
+            <a:schemeClr val="accent1"/>
+          </a:lnRef>
+          <a:fillRef idx="3">
+            <a:schemeClr val="accent1"/>
+          </a:fillRef>
+          <a:effectRef idx="2">
+            <a:schemeClr val="accent1"/>
+          </a:effectRef>
+          <a:fontRef idx="minor">
+            <a:schemeClr val="lt1"/>
+          </a:fontRef>
+        </p:style>
+        <p:txBody>
+          <a:bodyPr rtlCol="0" anchor="ctr"/>
+          <a:lstStyle/>
+          <a:p>
+            <a:pPr algn="ctr"/>
+          </a:p>
+        </p:txBody>
+      </p:sp>
+      <p:sp>
+        <p:nvSpPr>
+          <p:cNvPr id="15" name="Rectangle 14"/>
+          <p:cNvSpPr/>
+          <p:nvPr/>
+        </p:nvSpPr>
+        <p:spPr>
+          <a:xfrm>
+            <a:off x="640080" y="4114800"/>
+            <a:ext cx="5303520" cy="502920"/>
+          </a:xfrm>
+          <a:prstGeom prst="rect">
+            <a:avLst/>
+          </a:prstGeom>
+          <a:solidFill>
+            <a:srgbClr val="F59E0B"/>
+          </a:solidFill>
+          <a:ln>
+            <a:noFill/>
+          </a:ln>
+          <a:effectLst/>
+        </p:spPr>
+        <p:style>
+          <a:lnRef idx="1">
+            <a:schemeClr val="accent1"/>
+          </a:lnRef>
+          <a:fillRef idx="3">
+            <a:schemeClr val="accent1"/>
+          </a:fillRef>
+          <a:effectRef idx="2">
+            <a:schemeClr val="accent1"/>
+          </a:effectRef>
+          <a:fontRef idx="minor">
+            <a:schemeClr val="lt1"/>
+          </a:fontRef>
+        </p:style>
+        <p:txBody>
+          <a:bodyPr rtlCol="0" anchor="ctr"/>
+          <a:lstStyle/>
+          <a:p>
+            <a:pPr algn="ctr"/>
+          </a:p>
+        </p:txBody>
+      </p:sp>
+      <p:sp>
+        <p:nvSpPr>
+          <p:cNvPr id="16" name="TextBox 15"/>
+          <p:cNvSpPr txBox="1"/>
+          <p:nvPr/>
+        </p:nvSpPr>
+        <p:spPr>
+          <a:xfrm>
+            <a:off x="914400" y="4233672"/>
+            <a:ext cx="4754880" cy="320040"/>
+          </a:xfrm>
+          <a:prstGeom prst="rect">
+            <a:avLst/>
+          </a:prstGeom>
+          <a:noFill/>
+        </p:spPr>
+        <p:txBody>
+          <a:bodyPr wrap="square">
+            <a:spAutoFit/>
+          </a:bodyPr>
+          <a:lstStyle/>
+          <a:p>
+            <a:pPr algn="l"/>
+            <a:r>
+              <a:rPr sz="1400" b="1">
+                <a:solidFill>
+                  <a:srgbClr val="FFFFFF"/>
+                </a:solidFill>
+                <a:latin typeface="Calibri"/>
+              </a:rPr>
+              <a:t>C3 · INTERVENTION — PARTIAL</a:t>
+            </a:r>
+          </a:p>
+        </p:txBody>
+      </p:sp>
+      <p:sp>
+        <p:nvSpPr>
+          <p:cNvPr id="17" name="TextBox 16"/>
+          <p:cNvSpPr txBox="1"/>
+          <p:nvPr/>
+        </p:nvSpPr>
+        <p:spPr>
+          <a:xfrm>
+            <a:off x="914400" y="4846320"/>
+            <a:ext cx="4754880" cy="1257400"/>
+          </a:xfrm>
+          <a:prstGeom prst="rect">
+            <a:avLst/>
+          </a:prstGeom>
+          <a:noFill/>
+        </p:spPr>
+        <p:txBody>
+          <a:bodyPr wrap="square">
+            <a:spAutoFit/>
+          </a:bodyPr>
+          <a:lstStyle/>
+          <a:p>
+            <a:pPr>
+              <a:lnSpc>
+                <a:spcPct val="112000"/>
+              </a:lnSpc>
+              <a:spcAft>
+                <a:spcPts val="800"/>
+              </a:spcAft>
+            </a:pPr>
+            <a:r>
+              <a:rPr sz="1250" b="1">
+                <a:solidFill>
+                  <a:srgbClr val="1A202C"/>
+                </a:solidFill>
+                <a:latin typeface="Calibri"/>
+              </a:rPr>
+              <a:t>▸  Randomizing sharpness: +0.1 AUC on inverted cells</a:t>
+            </a:r>
+          </a:p>
+          <a:p>
+            <a:pPr>
+              <a:lnSpc>
+                <a:spcPct val="112000"/>
+              </a:lnSpc>
+              <a:spcAft>
+                <a:spcPts val="800"/>
+              </a:spcAft>
+            </a:pPr>
+            <a:r>
+              <a:rPr sz="1250" b="1">
+                <a:solidFill>
+                  <a:srgbClr val="1A202C"/>
+                </a:solidFill>
+                <a:latin typeface="Calibri"/>
+              </a:rPr>
+              <a:t>▸  DF → FS still below chance</a:t>
+            </a:r>
+          </a:p>
+        </p:txBody>
+      </p:sp>
+      <p:sp>
+        <p:nvSpPr>
+          <p:cNvPr id="18" name="Rectangle 17"/>
+          <p:cNvSpPr/>
+          <p:nvPr/>
+        </p:nvSpPr>
+        <p:spPr>
+          <a:xfrm>
+            <a:off x="6245352" y="4114800"/>
+            <a:ext cx="5303520" cy="2057400"/>
+          </a:xfrm>
+          <a:prstGeom prst="rect">
+            <a:avLst/>
+          </a:prstGeom>
+          <a:solidFill>
+            <a:srgbClr val="F1F5F9"/>
+          </a:solidFill>
+          <a:ln>
+            <a:noFill/>
+          </a:ln>
+          <a:effectLst/>
+        </p:spPr>
+        <p:style>
+          <a:lnRef idx="1">
+            <a:schemeClr val="accent1"/>
+          </a:lnRef>
+          <a:fillRef idx="3">
+            <a:schemeClr val="accent1"/>
+          </a:fillRef>
+          <a:effectRef idx="2">
+            <a:schemeClr val="accent1"/>
+          </a:effectRef>
+          <a:fontRef idx="minor">
+            <a:schemeClr val="lt1"/>
+          </a:fontRef>
+        </p:style>
+        <p:txBody>
+          <a:bodyPr rtlCol="0" anchor="ctr"/>
+          <a:lstStyle/>
+          <a:p>
+            <a:pPr algn="ctr"/>
+          </a:p>
+        </p:txBody>
+      </p:sp>
+      <p:sp>
+        <p:nvSpPr>
+          <p:cNvPr id="19" name="Rectangle 18"/>
+          <p:cNvSpPr/>
+          <p:nvPr/>
+        </p:nvSpPr>
+        <p:spPr>
+          <a:xfrm>
+            <a:off x="6245352" y="4114800"/>
+            <a:ext cx="5303520" cy="502920"/>
+          </a:xfrm>
+          <a:prstGeom prst="rect">
+            <a:avLst/>
+          </a:prstGeom>
+          <a:solidFill>
+            <a:srgbClr val="16A34A"/>
+          </a:solidFill>
+          <a:ln>
+            <a:noFill/>
+          </a:ln>
+          <a:effectLst/>
+        </p:spPr>
+        <p:style>
+          <a:lnRef idx="1">
+            <a:schemeClr val="accent1"/>
+          </a:lnRef>
+          <a:fillRef idx="3">
+            <a:schemeClr val="accent1"/>
+          </a:fillRef>
+          <a:effectRef idx="2">
+            <a:schemeClr val="accent1"/>
+          </a:effectRef>
+          <a:fontRef idx="minor">
+            <a:schemeClr val="lt1"/>
+          </a:fontRef>
+        </p:style>
+        <p:txBody>
+          <a:bodyPr rtlCol="0" anchor="ctr"/>
+          <a:lstStyle/>
+          <a:p>
+            <a:pPr algn="ctr"/>
+          </a:p>
+        </p:txBody>
+      </p:sp>
+      <p:sp>
+        <p:nvSpPr>
+          <p:cNvPr id="20" name="TextBox 19"/>
+          <p:cNvSpPr txBox="1"/>
+          <p:nvPr/>
+        </p:nvSpPr>
+        <p:spPr>
+          <a:xfrm>
+            <a:off x="6519672" y="4233672"/>
+            <a:ext cx="4754880" cy="320040"/>
+          </a:xfrm>
+          <a:prstGeom prst="rect">
+            <a:avLst/>
+          </a:prstGeom>
+          <a:noFill/>
+        </p:spPr>
+        <p:txBody>
+          <a:bodyPr wrap="square">
+            <a:spAutoFit/>
+          </a:bodyPr>
+          <a:lstStyle/>
+          <a:p>
+            <a:pPr algn="l"/>
+            <a:r>
+              <a:rPr sz="1400" b="1">
+                <a:solidFill>
+                  <a:srgbClr val="FFFFFF"/>
+                </a:solidFill>
+                <a:latin typeface="Calibri"/>
+              </a:rPr>
+              <a:t>C4 · ARCHITECTURE — SUPPORTED</a:t>
+            </a:r>
+          </a:p>
+        </p:txBody>
+      </p:sp>
+      <p:sp>
+        <p:nvSpPr>
+          <p:cNvPr id="21" name="TextBox 20"/>
+          <p:cNvSpPr txBox="1"/>
+          <p:nvPr/>
+        </p:nvSpPr>
+        <p:spPr>
+          <a:xfrm>
+            <a:off x="6519672" y="4846320"/>
+            <a:ext cx="4754880" cy="1257400"/>
+          </a:xfrm>
+          <a:prstGeom prst="rect">
+            <a:avLst/>
+          </a:prstGeom>
+          <a:noFill/>
+        </p:spPr>
+        <p:txBody>
+          <a:bodyPr wrap="square">
+            <a:spAutoFit/>
+          </a:bodyPr>
+          <a:lstStyle/>
+          <a:p>
+            <a:pPr>
+              <a:lnSpc>
+                <a:spcPct val="112000"/>
+              </a:lnSpc>
+              <a:spcAft>
+                <a:spcPts val="800"/>
+              </a:spcAft>
+            </a:pPr>
+            <a:r>
+              <a:rPr sz="1250" b="1">
+                <a:solidFill>
+                  <a:srgbClr val="1A202C"/>
+                </a:solidFill>
+                <a:latin typeface="Calibri"/>
+              </a:rPr>
+              <a:t>▸  Xception, ResNet-50, EfficientNet-B4 agree 8 / 8</a:t>
+            </a:r>
+          </a:p>
+          <a:p>
+            <a:pPr>
+              <a:lnSpc>
+                <a:spcPct val="112000"/>
+              </a:lnSpc>
+              <a:spcAft>
+                <a:spcPts val="800"/>
+              </a:spcAft>
+            </a:pPr>
+            <a:r>
+              <a:rPr sz="1250" b="1">
+                <a:solidFill>
+                  <a:srgbClr val="1A202C"/>
+                </a:solidFill>
+                <a:latin typeface="Calibri"/>
+              </a:rPr>
+              <a:t>▸  Set by the training data, not the model</a:t>
+            </a:r>
+          </a:p>
+        </p:txBody>
+      </p:sp>
+      <p:sp>
+        <p:nvSpPr>
+          <p:cNvPr id="22" name="TextBox 21"/>
+          <p:cNvSpPr txBox="1"/>
+          <p:nvPr/>
+        </p:nvSpPr>
+        <p:spPr>
+          <a:xfrm>
+            <a:off x="640080" y="6510528"/>
+            <a:ext cx="7315200" cy="274320"/>
+          </a:xfrm>
+          <a:prstGeom prst="rect">
+            <a:avLst/>
+          </a:prstGeom>
+          <a:noFill/>
+        </p:spPr>
+        <p:txBody>
+          <a:bodyPr wrap="square">
+            <a:spAutoFit/>
+          </a:bodyPr>
+          <a:lstStyle/>
+          <a:p>
+            <a:pPr algn="l"/>
+            <a:r>
+              <a:rPr sz="1000" b="0">
+                <a:solidFill>
+                  <a:srgbClr val="94A3B8"/>
+                </a:solidFill>
+                <a:latin typeface="Calibri"/>
+              </a:rPr>
+              <a:t>Deepfake Detection — Inverted Transfer (23AID205)</a:t>
+            </a:r>
+          </a:p>
+        </p:txBody>
+      </p:sp>
+      <p:sp>
+        <p:nvSpPr>
+          <p:cNvPr id="23" name="TextBox 22"/>
+          <p:cNvSpPr txBox="1"/>
+          <p:nvPr/>
+        </p:nvSpPr>
+        <p:spPr>
+          <a:xfrm>
+            <a:off x="10972800" y="6510528"/>
+            <a:ext cx="822960" cy="274320"/>
+          </a:xfrm>
+          <a:prstGeom prst="rect">
+            <a:avLst/>
+          </a:prstGeom>
+          <a:noFill/>
+        </p:spPr>
+        <p:txBody>
+          <a:bodyPr wrap="square">
+            <a:spAutoFit/>
+          </a:bodyPr>
+          <a:lstStyle/>
+          <a:p>
+            <a:pPr algn="r"/>
+            <a:r>
+              <a:rPr sz="1000" b="0">
+                <a:solidFill>
+                  <a:srgbClr val="94A3B8"/>
+                </a:solidFill>
+                <a:latin typeface="Calibri"/>
+              </a:rPr>
+              <a:t>12/14</a:t>
+            </a:r>
+          </a:p>
+        </p:txBody>
+      </p:sp>
+    </p:spTree>
+  </p:cSld>
+  <p:clrMapOvr>
+    <a:masterClrMapping/>
+  </p:clrMapOvr>
+</p:sld>
+</file>
+
+<file path=ppt/slides/slide13.xml><?xml version="1.0" encoding="utf-8"?>
+<p:sld xmlns:a="http://schemas.openxmlformats.org/drawingml/2006/main" xmlns:p="http://schemas.openxmlformats.org/presentationml/2006/main" xmlns:r="http://schemas.openxmlformats.org/officeDocument/2006/relationships">
+  <p:cSld>
+    <p:spTree>
+      <p:nvGrpSpPr>
+        <p:cNvPr id="1" name=""/>
+        <p:cNvGrpSpPr/>
+        <p:nvPr/>
+      </p:nvGrpSpPr>
+      <p:grpSpPr/>
+      <p:sp>
+        <p:nvSpPr>
+          <p:cNvPr id="2" name="Rectangle 1"/>
+          <p:cNvSpPr/>
+          <p:nvPr/>
+        </p:nvSpPr>
+        <p:spPr>
+          <a:xfrm>
+            <a:off x="0" y="0"/>
+            <a:ext cx="12191695" cy="6858000"/>
+          </a:xfrm>
+          <a:prstGeom prst="rect">
+            <a:avLst/>
+          </a:prstGeom>
+          <a:solidFill>
+            <a:srgbClr val="FFFFFF"/>
+          </a:solidFill>
+          <a:ln>
+            <a:noFill/>
+          </a:ln>
+          <a:effectLst/>
+        </p:spPr>
+        <p:style>
+          <a:lnRef idx="1">
+            <a:schemeClr val="accent1"/>
+          </a:lnRef>
+          <a:fillRef idx="3">
+            <a:schemeClr val="accent1"/>
+          </a:fillRef>
+          <a:effectRef idx="2">
+            <a:schemeClr val="accent1"/>
+          </a:effectRef>
+          <a:fontRef idx="minor">
+            <a:schemeClr val="lt1"/>
+          </a:fontRef>
+        </p:style>
+        <p:txBody>
+          <a:bodyPr rtlCol="0" anchor="ctr"/>
+          <a:lstStyle/>
+          <a:p>
+            <a:pPr algn="ctr"/>
+          </a:p>
+        </p:txBody>
+      </p:sp>
+      <p:sp>
+        <p:nvSpPr>
+          <p:cNvPr id="3" name="TextBox 2"/>
+          <p:cNvSpPr txBox="1"/>
+          <p:nvPr/>
+        </p:nvSpPr>
+        <p:spPr>
+          <a:xfrm>
+            <a:off x="640080" y="384048"/>
+            <a:ext cx="9144000" cy="320040"/>
+          </a:xfrm>
+          <a:prstGeom prst="rect">
+            <a:avLst/>
+          </a:prstGeom>
+          <a:noFill/>
+        </p:spPr>
+        <p:txBody>
+          <a:bodyPr wrap="square">
+            <a:spAutoFit/>
+          </a:bodyPr>
+          <a:lstStyle/>
+          <a:p>
+            <a:pPr algn="l"/>
+            <a:r>
+              <a:rPr sz="1300" b="1">
+                <a:solidFill>
+                  <a:srgbClr val="0E7490"/>
+                </a:solidFill>
+                <a:latin typeface="Calibri"/>
+              </a:rPr>
+              <a:t>STATUS</a:t>
+            </a:r>
+          </a:p>
+        </p:txBody>
+      </p:sp>
+      <p:sp>
+        <p:nvSpPr>
+          <p:cNvPr id="4" name="TextBox 3"/>
+          <p:cNvSpPr txBox="1"/>
+          <p:nvPr/>
+        </p:nvSpPr>
+        <p:spPr>
+          <a:xfrm>
+            <a:off x="640080" y="658368"/>
+            <a:ext cx="10852800" cy="731520"/>
+          </a:xfrm>
+          <a:prstGeom prst="rect">
+            <a:avLst/>
+          </a:prstGeom>
+          <a:noFill/>
+        </p:spPr>
+        <p:txBody>
+          <a:bodyPr wrap="square">
+            <a:spAutoFit/>
+          </a:bodyPr>
+          <a:lstStyle/>
+          <a:p>
+            <a:pPr algn="l"/>
+            <a:r>
+              <a:rPr sz="2800" b="1">
+                <a:solidFill>
+                  <a:srgbClr val="1A202C"/>
+                </a:solidFill>
+                <a:latin typeface="Calibri"/>
+              </a:rPr>
+              <a:t>Delivered, and What Would Come Next</a:t>
+            </a:r>
+          </a:p>
+        </p:txBody>
+      </p:sp>
+      <p:sp>
+        <p:nvSpPr>
+          <p:cNvPr id="5" name="Rectangle 4"/>
+          <p:cNvSpPr/>
+          <p:nvPr/>
+        </p:nvSpPr>
+        <p:spPr>
+          <a:xfrm>
+            <a:off x="640080" y="1353312"/>
+            <a:ext cx="502920" cy="41148"/>
+          </a:xfrm>
+          <a:prstGeom prst="rect">
+            <a:avLst/>
+          </a:prstGeom>
+          <a:solidFill>
+            <a:srgbClr val="22B8CF"/>
+          </a:solidFill>
+          <a:ln>
+            <a:noFill/>
+          </a:ln>
+          <a:effectLst/>
+        </p:spPr>
+        <p:style>
+          <a:lnRef idx="1">
+            <a:schemeClr val="accent1"/>
+          </a:lnRef>
+          <a:fillRef idx="3">
+            <a:schemeClr val="accent1"/>
+          </a:fillRef>
+          <a:effectRef idx="2">
+            <a:schemeClr val="accent1"/>
+          </a:effectRef>
+          <a:fontRef idx="minor">
+            <a:schemeClr val="lt1"/>
+          </a:fontRef>
+        </p:style>
+        <p:txBody>
+          <a:bodyPr rtlCol="0" anchor="ctr"/>
+          <a:lstStyle/>
+          <a:p>
+            <a:pPr algn="ctr"/>
+          </a:p>
+        </p:txBody>
+      </p:sp>
+      <p:sp>
+        <p:nvSpPr>
+          <p:cNvPr id="6" name="Rectangle 5"/>
+          <p:cNvSpPr/>
+          <p:nvPr/>
+        </p:nvSpPr>
+        <p:spPr>
+          <a:xfrm>
+            <a:off x="640080" y="1783080"/>
+            <a:ext cx="5303520" cy="4114800"/>
+          </a:xfrm>
+          <a:prstGeom prst="rect">
+            <a:avLst/>
+          </a:prstGeom>
+          <a:solidFill>
+            <a:srgbClr val="F1F5F9"/>
+          </a:solidFill>
+          <a:ln>
+            <a:noFill/>
+          </a:ln>
+          <a:effectLst/>
+        </p:spPr>
+        <p:style>
+          <a:lnRef idx="1">
+            <a:schemeClr val="accent1"/>
+          </a:lnRef>
+          <a:fillRef idx="3">
+            <a:schemeClr val="accent1"/>
+          </a:fillRef>
+          <a:effectRef idx="2">
+            <a:schemeClr val="accent1"/>
+          </a:effectRef>
+          <a:fontRef idx="minor">
+            <a:schemeClr val="lt1"/>
+          </a:fontRef>
+        </p:style>
+        <p:txBody>
+          <a:bodyPr rtlCol="0" anchor="ctr"/>
+          <a:lstStyle/>
+          <a:p>
+            <a:pPr algn="ctr"/>
+          </a:p>
+        </p:txBody>
+      </p:sp>
+      <p:sp>
+        <p:nvSpPr>
+          <p:cNvPr id="7" name="Rectangle 6"/>
+          <p:cNvSpPr/>
+          <p:nvPr/>
+        </p:nvSpPr>
+        <p:spPr>
+          <a:xfrm>
+            <a:off x="640080" y="1783080"/>
+            <a:ext cx="5303520" cy="502920"/>
+          </a:xfrm>
+          <a:prstGeom prst="rect">
+            <a:avLst/>
+          </a:prstGeom>
+          <a:solidFill>
+            <a:srgbClr val="16A34A"/>
+          </a:solidFill>
+          <a:ln>
+            <a:noFill/>
+          </a:ln>
+          <a:effectLst/>
+        </p:spPr>
+        <p:style>
+          <a:lnRef idx="1">
+            <a:schemeClr val="accent1"/>
+          </a:lnRef>
+          <a:fillRef idx="3">
+            <a:schemeClr val="accent1"/>
+          </a:fillRef>
+          <a:effectRef idx="2">
+            <a:schemeClr val="accent1"/>
+          </a:effectRef>
+          <a:fontRef idx="minor">
+            <a:schemeClr val="lt1"/>
+          </a:fontRef>
+        </p:style>
+        <p:txBody>
+          <a:bodyPr rtlCol="0" anchor="ctr"/>
+          <a:lstStyle/>
+          <a:p>
+            <a:pPr algn="ctr"/>
+          </a:p>
+        </p:txBody>
+      </p:sp>
+      <p:sp>
+        <p:nvSpPr>
+          <p:cNvPr id="8" name="TextBox 7"/>
+          <p:cNvSpPr txBox="1"/>
+          <p:nvPr/>
+        </p:nvSpPr>
+        <p:spPr>
+          <a:xfrm>
+            <a:off x="914400" y="1901952"/>
+            <a:ext cx="4754880" cy="320040"/>
+          </a:xfrm>
+          <a:prstGeom prst="rect">
+            <a:avLst/>
+          </a:prstGeom>
+          <a:noFill/>
+        </p:spPr>
+        <p:txBody>
+          <a:bodyPr wrap="square">
+            <a:spAutoFit/>
+          </a:bodyPr>
+          <a:lstStyle/>
+          <a:p>
+            <a:pPr algn="l"/>
+            <a:r>
+              <a:rPr sz="1400" b="1">
+                <a:solidFill>
+                  <a:srgbClr val="FFFFFF"/>
+                </a:solidFill>
+                <a:latin typeface="Calibri"/>
+              </a:rPr>
+              <a:t>DELIVERED</a:t>
+            </a:r>
+          </a:p>
+        </p:txBody>
+      </p:sp>
+      <p:sp>
+        <p:nvSpPr>
+          <p:cNvPr id="9" name="TextBox 8"/>
+          <p:cNvSpPr txBox="1"/>
+          <p:nvPr/>
+        </p:nvSpPr>
+        <p:spPr>
+          <a:xfrm>
+            <a:off x="914400" y="2514600"/>
+            <a:ext cx="4754880" cy="3314800"/>
+          </a:xfrm>
+          <a:prstGeom prst="rect">
+            <a:avLst/>
+          </a:prstGeom>
+          <a:noFill/>
+        </p:spPr>
+        <p:txBody>
+          <a:bodyPr wrap="square">
+            <a:spAutoFit/>
+          </a:bodyPr>
+          <a:lstStyle/>
+          <a:p>
+            <a:pPr>
+              <a:lnSpc>
+                <a:spcPct val="112000"/>
+              </a:lnSpc>
+              <a:spcAft>
+                <a:spcPts val="800"/>
+              </a:spcAft>
+            </a:pPr>
+            <a:r>
+              <a:rPr sz="1250" b="1">
+                <a:solidFill>
+                  <a:srgbClr val="16A34A"/>
+                </a:solidFill>
+                <a:latin typeface="Calibri"/>
+              </a:rPr>
+              <a:t>▸  All research phases run and logged (docs/PROGRESS.md)</a:t>
+            </a:r>
+          </a:p>
+          <a:p>
+            <a:pPr>
+              <a:lnSpc>
+                <a:spcPct val="112000"/>
+              </a:lnSpc>
+              <a:spcAft>
+                <a:spcPts val="800"/>
+              </a:spcAft>
+            </a:pPr>
+            <a:r>
+              <a:rPr sz="1250" b="1">
+                <a:solidFill>
+                  <a:srgbClr val="16A34A"/>
+                </a:solidFill>
+                <a:latin typeface="Calibri"/>
+              </a:rPr>
+              <a:t>▸  5-page paper draft, IEEE format (paper/main.pdf)</a:t>
+            </a:r>
+          </a:p>
+          <a:p>
+            <a:pPr>
+              <a:lnSpc>
+                <a:spcPct val="112000"/>
+              </a:lnSpc>
+              <a:spcAft>
+                <a:spcPts val="800"/>
+              </a:spcAft>
+            </a:pPr>
+            <a:r>
+              <a:rPr sz="1250" b="1">
+                <a:solidFill>
+                  <a:srgbClr val="16A34A"/>
+                </a:solidFill>
+                <a:latin typeface="Calibri"/>
+              </a:rPr>
+              <a:t>▸  Full project report (docs/project_report.docx)</a:t>
+            </a:r>
+          </a:p>
+          <a:p>
+            <a:pPr>
+              <a:lnSpc>
+                <a:spcPct val="112000"/>
+              </a:lnSpc>
+              <a:spcAft>
+                <a:spcPts val="800"/>
+              </a:spcAft>
+            </a:pPr>
+            <a:r>
+              <a:rPr sz="1250" b="1">
+                <a:solidFill>
+                  <a:srgbClr val="16A34A"/>
+                </a:solidFill>
+                <a:latin typeface="Calibri"/>
+              </a:rPr>
+              <a:t>▸  Every number generated by a script; code on GitHub</a:t>
+            </a:r>
+          </a:p>
+          <a:p>
+            <a:pPr>
+              <a:lnSpc>
+                <a:spcPct val="112000"/>
+              </a:lnSpc>
+              <a:spcAft>
+                <a:spcPts val="800"/>
+              </a:spcAft>
+            </a:pPr>
+            <a:r>
+              <a:rPr sz="1250" b="1">
+                <a:solidFill>
+                  <a:srgbClr val="16A34A"/>
+                </a:solidFill>
+                <a:latin typeface="Calibri"/>
+              </a:rPr>
+              <a:t>▸  Predictions recorded before results, misses reported</a:t>
+            </a:r>
+          </a:p>
+        </p:txBody>
+      </p:sp>
+      <p:sp>
+        <p:nvSpPr>
+          <p:cNvPr id="10" name="Rectangle 9"/>
+          <p:cNvSpPr/>
+          <p:nvPr/>
+        </p:nvSpPr>
+        <p:spPr>
+          <a:xfrm>
+            <a:off x="6245352" y="1783080"/>
+            <a:ext cx="5303520" cy="4114800"/>
+          </a:xfrm>
+          <a:prstGeom prst="rect">
+            <a:avLst/>
+          </a:prstGeom>
+          <a:solidFill>
+            <a:srgbClr val="F1F5F9"/>
+          </a:solidFill>
+          <a:ln>
+            <a:noFill/>
+          </a:ln>
+          <a:effectLst/>
+        </p:spPr>
+        <p:style>
+          <a:lnRef idx="1">
+            <a:schemeClr val="accent1"/>
+          </a:lnRef>
+          <a:fillRef idx="3">
+            <a:schemeClr val="accent1"/>
+          </a:fillRef>
+          <a:effectRef idx="2">
+            <a:schemeClr val="accent1"/>
+          </a:effectRef>
+          <a:fontRef idx="minor">
+            <a:schemeClr val="lt1"/>
+          </a:fontRef>
+        </p:style>
+        <p:txBody>
+          <a:bodyPr rtlCol="0" anchor="ctr"/>
+          <a:lstStyle/>
+          <a:p>
+            <a:pPr algn="ctr"/>
+          </a:p>
+        </p:txBody>
+      </p:sp>
+      <p:sp>
+        <p:nvSpPr>
+          <p:cNvPr id="11" name="Rectangle 10"/>
+          <p:cNvSpPr/>
+          <p:nvPr/>
+        </p:nvSpPr>
+        <p:spPr>
+          <a:xfrm>
+            <a:off x="6245352" y="1783080"/>
+            <a:ext cx="5303520" cy="502920"/>
+          </a:xfrm>
+          <a:prstGeom prst="rect">
+            <a:avLst/>
+          </a:prstGeom>
+          <a:solidFill>
+            <a:srgbClr val="F59E0B"/>
+          </a:solidFill>
+          <a:ln>
+            <a:noFill/>
+          </a:ln>
+          <a:effectLst/>
+        </p:spPr>
+        <p:style>
+          <a:lnRef idx="1">
+            <a:schemeClr val="accent1"/>
+          </a:lnRef>
+          <a:fillRef idx="3">
+            <a:schemeClr val="accent1"/>
+          </a:fillRef>
+          <a:effectRef idx="2">
+            <a:schemeClr val="accent1"/>
+          </a:effectRef>
+          <a:fontRef idx="minor">
+            <a:schemeClr val="lt1"/>
+          </a:fontRef>
+        </p:style>
+        <p:txBody>
+          <a:bodyPr rtlCol="0" anchor="ctr"/>
+          <a:lstStyle/>
+          <a:p>
+            <a:pPr algn="ctr"/>
+          </a:p>
+        </p:txBody>
+      </p:sp>
+      <p:sp>
+        <p:nvSpPr>
+          <p:cNvPr id="12" name="TextBox 11"/>
+          <p:cNvSpPr txBox="1"/>
+          <p:nvPr/>
+        </p:nvSpPr>
+        <p:spPr>
+          <a:xfrm>
+            <a:off x="6519672" y="1901952"/>
+            <a:ext cx="4754880" cy="320040"/>
+          </a:xfrm>
+          <a:prstGeom prst="rect">
+            <a:avLst/>
+          </a:prstGeom>
+          <a:noFill/>
+        </p:spPr>
+        <p:txBody>
+          <a:bodyPr wrap="square">
+            <a:spAutoFit/>
+          </a:bodyPr>
+          <a:lstStyle/>
+          <a:p>
+            <a:pPr algn="l"/>
+            <a:r>
+              <a:rPr sz="1400" b="1">
+                <a:solidFill>
+                  <a:srgbClr val="FFFFFF"/>
+                </a:solidFill>
+                <a:latin typeface="Calibri"/>
+              </a:rPr>
+              <a:t>NEXT STEPS</a:t>
+            </a:r>
+          </a:p>
+        </p:txBody>
+      </p:sp>
+      <p:sp>
+        <p:nvSpPr>
+          <p:cNvPr id="13" name="TextBox 12"/>
+          <p:cNvSpPr txBox="1"/>
+          <p:nvPr/>
+        </p:nvSpPr>
+        <p:spPr>
+          <a:xfrm>
+            <a:off x="6519672" y="2514600"/>
+            <a:ext cx="4754880" cy="3314800"/>
+          </a:xfrm>
+          <a:prstGeom prst="rect">
+            <a:avLst/>
+          </a:prstGeom>
+          <a:noFill/>
+        </p:spPr>
+        <p:txBody>
+          <a:bodyPr wrap="square">
+            <a:spAutoFit/>
+          </a:bodyPr>
+          <a:lstStyle/>
+          <a:p>
+            <a:pPr>
+              <a:lnSpc>
+                <a:spcPct val="112000"/>
+              </a:lnSpc>
+              <a:spcAft>
+                <a:spcPts val="800"/>
+              </a:spcAft>
+            </a:pPr>
+            <a:r>
+              <a:rPr sz="1250" b="1">
+                <a:solidFill>
+                  <a:srgbClr val="F59E0B"/>
+                </a:solidFill>
+                <a:latin typeface="Calibri"/>
+              </a:rPr>
+              <a:t>▸  Re-run on official FaceForensics++ (access pending)</a:t>
+            </a:r>
+          </a:p>
+          <a:p>
+            <a:pPr>
+              <a:lnSpc>
+                <a:spcPct val="112000"/>
+              </a:lnSpc>
+              <a:spcAft>
+                <a:spcPts val="800"/>
+              </a:spcAft>
+            </a:pPr>
+            <a:r>
+              <a:rPr sz="1250" b="1">
+                <a:solidFill>
+                  <a:srgbClr val="F59E0B"/>
+                </a:solidFill>
+                <a:latin typeface="Calibri"/>
+              </a:rPr>
+              <a:t>▸  Find the cue behind the remaining DF → FS inversion</a:t>
+            </a:r>
+          </a:p>
+          <a:p>
+            <a:pPr>
+              <a:lnSpc>
+                <a:spcPct val="112000"/>
+              </a:lnSpc>
+              <a:spcAft>
+                <a:spcPts val="800"/>
+              </a:spcAft>
+            </a:pPr>
+            <a:r>
+              <a:rPr sz="1250" b="1">
+                <a:solidFill>
+                  <a:srgbClr val="F59E0B"/>
+                </a:solidFill>
+                <a:latin typeface="Calibri"/>
+              </a:rPr>
+              <a:t>▸  Explain why DeepFakeFace does not follow the rule</a:t>
+            </a:r>
+          </a:p>
+          <a:p>
+            <a:pPr>
+              <a:lnSpc>
+                <a:spcPct val="112000"/>
+              </a:lnSpc>
+              <a:spcAft>
+                <a:spcPts val="800"/>
+              </a:spcAft>
+            </a:pPr>
+            <a:r>
+              <a:rPr sz="1250" b="1">
+                <a:solidFill>
+                  <a:srgbClr val="F59E0B"/>
+                </a:solidFill>
+                <a:latin typeface="Calibri"/>
+              </a:rPr>
+              <a:t>▸  Submit to a workshop (e.g. IEEE WIFS / ICASSP track)</a:t>
+            </a:r>
+          </a:p>
+        </p:txBody>
+      </p:sp>
+      <p:sp>
+        <p:nvSpPr>
+          <p:cNvPr id="14" name="TextBox 13"/>
+          <p:cNvSpPr txBox="1"/>
+          <p:nvPr/>
+        </p:nvSpPr>
+        <p:spPr>
+          <a:xfrm>
+            <a:off x="640080" y="6510528"/>
+            <a:ext cx="7315200" cy="274320"/>
+          </a:xfrm>
+          <a:prstGeom prst="rect">
+            <a:avLst/>
+          </a:prstGeom>
+          <a:noFill/>
+        </p:spPr>
+        <p:txBody>
+          <a:bodyPr wrap="square">
+            <a:spAutoFit/>
+          </a:bodyPr>
+          <a:lstStyle/>
+          <a:p>
+            <a:pPr algn="l"/>
+            <a:r>
+              <a:rPr sz="1000" b="0">
+                <a:solidFill>
+                  <a:srgbClr val="94A3B8"/>
+                </a:solidFill>
+                <a:latin typeface="Calibri"/>
+              </a:rPr>
+              <a:t>Deepfake Detection — Inverted Transfer (23AID205)</a:t>
+            </a:r>
+          </a:p>
+        </p:txBody>
+      </p:sp>
+      <p:sp>
+        <p:nvSpPr>
+          <p:cNvPr id="15" name="TextBox 14"/>
+          <p:cNvSpPr txBox="1"/>
+          <p:nvPr/>
+        </p:nvSpPr>
+        <p:spPr>
+          <a:xfrm>
+            <a:off x="10972800" y="6510528"/>
+            <a:ext cx="822960" cy="274320"/>
+          </a:xfrm>
+          <a:prstGeom prst="rect">
+            <a:avLst/>
+          </a:prstGeom>
+          <a:noFill/>
+        </p:spPr>
+        <p:txBody>
+          <a:bodyPr wrap="square">
+            <a:spAutoFit/>
+          </a:bodyPr>
+          <a:lstStyle/>
+          <a:p>
+            <a:pPr algn="r"/>
+            <a:r>
+              <a:rPr sz="1000" b="0">
+                <a:solidFill>
+                  <a:srgbClr val="94A3B8"/>
+                </a:solidFill>
+                <a:latin typeface="Calibri"/>
+              </a:rPr>
+              <a:t>13/14</a:t>
+            </a:r>
+          </a:p>
+        </p:txBody>
+      </p:sp>
+    </p:spTree>
+  </p:cSld>
+  <p:clrMapOvr>
+    <a:masterClrMapping/>
+  </p:clrMapOvr>
+</p:sld>
+</file>
+
+<file path=ppt/slides/slide14.xml><?xml version="1.0" encoding="utf-8"?>
+<p:sld xmlns:a="http://schemas.openxmlformats.org/drawingml/2006/main" xmlns:p="http://schemas.openxmlformats.org/presentationml/2006/main" xmlns:r="http://schemas.openxmlformats.org/officeDocument/2006/relationships">
+  <p:cSld>
+    <p:spTree>
+      <p:nvGrpSpPr>
+        <p:cNvPr id="1" name=""/>
+        <p:cNvGrpSpPr/>
+        <p:nvPr/>
+      </p:nvGrpSpPr>
+      <p:grpSpPr/>
+      <p:sp>
+        <p:nvSpPr>
+          <p:cNvPr id="2" name="Rectangle 1"/>
+          <p:cNvSpPr/>
+          <p:nvPr/>
+        </p:nvSpPr>
+        <p:spPr>
+          <a:xfrm>
+            <a:off x="0" y="0"/>
+            <a:ext cx="12191695" cy="6858000"/>
+          </a:xfrm>
+          <a:prstGeom prst="rect">
+            <a:avLst/>
+          </a:prstGeom>
+          <a:solidFill>
+            <a:srgbClr val="FFFFFF"/>
+          </a:solidFill>
+          <a:ln>
+            <a:noFill/>
+          </a:ln>
+          <a:effectLst/>
+        </p:spPr>
+        <p:style>
+          <a:lnRef idx="1">
+            <a:schemeClr val="accent1"/>
+          </a:lnRef>
+          <a:fillRef idx="3">
+            <a:schemeClr val="accent1"/>
+          </a:fillRef>
+          <a:effectRef idx="2">
+            <a:schemeClr val="accent1"/>
+          </a:effectRef>
+          <a:fontRef idx="minor">
+            <a:schemeClr val="lt1"/>
+          </a:fontRef>
+        </p:style>
+        <p:txBody>
+          <a:bodyPr rtlCol="0" anchor="ctr"/>
+          <a:lstStyle/>
+          <a:p>
+            <a:pPr algn="ctr"/>
+          </a:p>
+        </p:txBody>
+      </p:sp>
+      <p:sp>
+        <p:nvSpPr>
+          <p:cNvPr id="3" name="TextBox 2"/>
+          <p:cNvSpPr txBox="1"/>
+          <p:nvPr/>
+        </p:nvSpPr>
+        <p:spPr>
+          <a:xfrm>
+            <a:off x="640080" y="384048"/>
+            <a:ext cx="9144000" cy="320040"/>
+          </a:xfrm>
+          <a:prstGeom prst="rect">
+            <a:avLst/>
+          </a:prstGeom>
+          <a:noFill/>
+        </p:spPr>
+        <p:txBody>
+          <a:bodyPr wrap="square">
+            <a:spAutoFit/>
+          </a:bodyPr>
+          <a:lstStyle/>
+          <a:p>
+            <a:pPr algn="l"/>
+            <a:r>
+              <a:rPr sz="1300" b="1">
+                <a:solidFill>
+                  <a:srgbClr val="0E7490"/>
+                </a:solidFill>
+                <a:latin typeface="Calibri"/>
+              </a:rPr>
+              <a:t>CLOSING</a:t>
+            </a:r>
+          </a:p>
+        </p:txBody>
+      </p:sp>
+      <p:sp>
+        <p:nvSpPr>
+          <p:cNvPr id="4" name="TextBox 3"/>
+          <p:cNvSpPr txBox="1"/>
+          <p:nvPr/>
+        </p:nvSpPr>
+        <p:spPr>
+          <a:xfrm>
+            <a:off x="640080" y="658368"/>
+            <a:ext cx="10852800" cy="731520"/>
+          </a:xfrm>
+          <a:prstGeom prst="rect">
+            <a:avLst/>
+          </a:prstGeom>
+          <a:noFill/>
+        </p:spPr>
+        <p:txBody>
+          <a:bodyPr wrap="square">
+            <a:spAutoFit/>
+          </a:bodyPr>
+          <a:lstStyle/>
+          <a:p>
+            <a:pPr algn="l"/>
+            <a:r>
+              <a:rPr sz="2800" b="1">
+                <a:solidFill>
+                  <a:srgbClr val="1A202C"/>
+                </a:solidFill>
+                <a:latin typeface="Calibri"/>
+              </a:rPr>
+              <a:t>Thank You</a:t>
+            </a:r>
+          </a:p>
+        </p:txBody>
+      </p:sp>
+      <p:sp>
+        <p:nvSpPr>
+          <p:cNvPr id="5" name="Rectangle 4"/>
+          <p:cNvSpPr/>
+          <p:nvPr/>
+        </p:nvSpPr>
+        <p:spPr>
+          <a:xfrm>
+            <a:off x="640080" y="1353312"/>
+            <a:ext cx="502920" cy="41148"/>
+          </a:xfrm>
+          <a:prstGeom prst="rect">
+            <a:avLst/>
+          </a:prstGeom>
+          <a:solidFill>
+            <a:srgbClr val="22B8CF"/>
+          </a:solidFill>
+          <a:ln>
+            <a:noFill/>
+          </a:ln>
+          <a:effectLst/>
+        </p:spPr>
+        <p:style>
+          <a:lnRef idx="1">
+            <a:schemeClr val="accent1"/>
+          </a:lnRef>
+          <a:fillRef idx="3">
+            <a:schemeClr val="accent1"/>
+          </a:fillRef>
+          <a:effectRef idx="2">
+            <a:schemeClr val="accent1"/>
+          </a:effectRef>
+          <a:fontRef idx="minor">
+            <a:schemeClr val="lt1"/>
+          </a:fontRef>
+        </p:style>
+        <p:txBody>
+          <a:bodyPr rtlCol="0" anchor="ctr"/>
+          <a:lstStyle/>
+          <a:p>
+            <a:pPr algn="ctr"/>
+          </a:p>
+        </p:txBody>
+      </p:sp>
+      <p:sp>
+        <p:nvSpPr>
+          <p:cNvPr id="6" name="TextBox 5"/>
+          <p:cNvSpPr txBox="1"/>
+          <p:nvPr/>
+        </p:nvSpPr>
+        <p:spPr>
+          <a:xfrm>
+            <a:off x="640080" y="1783080"/>
+            <a:ext cx="10789920" cy="1371600"/>
           </a:xfrm>
           <a:prstGeom prst="rect">
             <a:avLst/>
@@ -3623,13 +6771,13 @@
               </a:spcAft>
             </a:pPr>
             <a:r>
-              <a:rPr sz="1350" b="0">
+              <a:rPr sz="1400" b="0">
                 <a:solidFill>
                   <a:srgbClr val="1A202C"/>
                 </a:solidFill>
                 <a:latin typeface="Calibri"/>
               </a:rPr>
-              <a:t>▸  Full research plan, phase-by-phase, with gates: RESEARCH_BRIEF.md in the repo.</a:t>
+              <a:t>▸  Data: FaceForensics++ via a Kaggle mirror (preliminary; never redistributed) and DeepFakeFace (OpenRAIL). Hardware: one 6 GB laptop GPU.</a:t>
             </a:r>
           </a:p>
           <a:p>
@@ -3642,77 +6790,49 @@
               </a:spcAft>
             </a:pPr>
             <a:r>
-              <a:rPr sz="1350" b="0">
+              <a:rPr sz="1400" b="0">
                 <a:solidFill>
                   <a:srgbClr val="1A202C"/>
                 </a:solidFill>
                 <a:latin typeface="Calibri"/>
               </a:rPr>
-              <a:t>▸  Progress log updated after every phase: docs/PROGRESS.md.</a:t>
-            </a:r>
-          </a:p>
-          <a:p>
-            <a:pPr>
-              <a:lnSpc>
-                <a:spcPct val="112000"/>
-              </a:lnSpc>
-              <a:spcAft>
-                <a:spcPts val="1000"/>
-              </a:spcAft>
-            </a:pPr>
-            <a:r>
-              <a:rPr sz="1350" b="0">
-                <a:solidFill>
-                  <a:srgbClr val="1A202C"/>
-                </a:solidFill>
-                <a:latin typeface="Calibri"/>
-              </a:rPr>
-              <a:t>▸  Every number in this deck comes from a script-written file under analysis/ or results/ -- reproducible, not hand-typed.</a:t>
-            </a:r>
-          </a:p>
-        </p:txBody>
-      </p:sp>
-      <p:sp>
-        <p:nvSpPr>
-          <p:cNvPr id="7" name="Rectangle 6"/>
-          <p:cNvSpPr/>
-          <p:nvPr/>
-        </p:nvSpPr>
-        <p:spPr>
-          <a:xfrm>
-            <a:off x="640080" y="3400000"/>
-            <a:ext cx="10852800" cy="18288"/>
-          </a:xfrm>
-          <a:prstGeom prst="rect">
-            <a:avLst/>
-          </a:prstGeom>
-          <a:solidFill>
-            <a:srgbClr val="E2E8F0"/>
-          </a:solidFill>
-          <a:ln>
-            <a:noFill/>
-          </a:ln>
-          <a:effectLst/>
-        </p:spPr>
-        <p:style>
-          <a:lnRef idx="1">
-            <a:schemeClr val="accent1"/>
-          </a:lnRef>
-          <a:fillRef idx="3">
-            <a:schemeClr val="accent1"/>
-          </a:fillRef>
-          <a:effectRef idx="2">
-            <a:schemeClr val="accent1"/>
-          </a:effectRef>
-          <a:fontRef idx="minor">
-            <a:schemeClr val="lt1"/>
-          </a:fontRef>
-        </p:style>
-        <p:txBody>
-          <a:bodyPr rtlCol="0" anchor="ctr"/>
-          <a:lstStyle/>
-          <a:p>
-            <a:pPr algn="ctr"/>
+              <a:t>▸  Reproducible: every table and figure is regenerated from the repository's scripts.</a:t>
+            </a:r>
+          </a:p>
+        </p:txBody>
+      </p:sp>
+      <p:sp>
+        <p:nvSpPr>
+          <p:cNvPr id="7" name="TextBox 6"/>
+          <p:cNvSpPr txBox="1"/>
+          <p:nvPr/>
+        </p:nvSpPr>
+        <p:spPr>
+          <a:xfrm>
+            <a:off x="640080" y="3383280"/>
+            <a:ext cx="10789920" cy="320040"/>
+          </a:xfrm>
+          <a:prstGeom prst="rect">
+            <a:avLst/>
+          </a:prstGeom>
+          <a:noFill/>
+        </p:spPr>
+        <p:txBody>
+          <a:bodyPr wrap="square">
+            <a:spAutoFit/>
+          </a:bodyPr>
+          <a:lstStyle/>
+          <a:p>
+            <a:pPr algn="l"/>
+            <a:r>
+              <a:rPr sz="1100" b="1">
+                <a:solidFill>
+                  <a:srgbClr val="0E7490"/>
+                </a:solidFill>
+                <a:latin typeface="Calibri"/>
+              </a:rPr>
+              <a:t>CONTRIBUTORS</a:t>
+            </a:r>
           </a:p>
         </p:txBody>
       </p:sp>
@@ -3724,43 +6844,8 @@
         </p:nvSpPr>
         <p:spPr>
           <a:xfrm>
-            <a:off x="640080" y="3600000"/>
-            <a:ext cx="10852800" cy="320040"/>
-          </a:xfrm>
-          <a:prstGeom prst="rect">
-            <a:avLst/>
-          </a:prstGeom>
-          <a:noFill/>
-        </p:spPr>
-        <p:txBody>
-          <a:bodyPr wrap="square">
-            <a:spAutoFit/>
-          </a:bodyPr>
-          <a:lstStyle/>
-          <a:p>
-            <a:pPr algn="l"/>
-            <a:r>
-              <a:rPr sz="1100" b="1">
-                <a:solidFill>
-                  <a:srgbClr val="0E7490"/>
-                </a:solidFill>
-                <a:latin typeface="Calibri"/>
-              </a:rPr>
-              <a:t>CONTRIBUTORS</a:t>
-            </a:r>
-          </a:p>
-        </p:txBody>
-      </p:sp>
-      <p:sp>
-        <p:nvSpPr>
-          <p:cNvPr id="9" name="TextBox 8"/>
-          <p:cNvSpPr txBox="1"/>
-          <p:nvPr/>
-        </p:nvSpPr>
-        <p:spPr>
-          <a:xfrm>
-            <a:off x="640080" y="3940000"/>
-            <a:ext cx="10852800" cy="1080000"/>
+            <a:off x="640080" y="3703320"/>
+            <a:ext cx="10789920" cy="1097280"/>
           </a:xfrm>
           <a:prstGeom prst="rect">
             <a:avLst/>
@@ -3852,14 +6937,49 @@
       </p:sp>
       <p:sp>
         <p:nvSpPr>
+          <p:cNvPr id="9" name="TextBox 8"/>
+          <p:cNvSpPr txBox="1"/>
+          <p:nvPr/>
+        </p:nvSpPr>
+        <p:spPr>
+          <a:xfrm>
+            <a:off x="640080" y="5120640"/>
+            <a:ext cx="10789920" cy="320040"/>
+          </a:xfrm>
+          <a:prstGeom prst="rect">
+            <a:avLst/>
+          </a:prstGeom>
+          <a:noFill/>
+        </p:spPr>
+        <p:txBody>
+          <a:bodyPr wrap="square">
+            <a:spAutoFit/>
+          </a:bodyPr>
+          <a:lstStyle/>
+          <a:p>
+            <a:pPr algn="l"/>
+            <a:r>
+              <a:rPr sz="1100" b="1">
+                <a:solidFill>
+                  <a:srgbClr val="0E7490"/>
+                </a:solidFill>
+                <a:latin typeface="Calibri"/>
+              </a:rPr>
+              <a:t>GITHUB REPOSITORY</a:t>
+            </a:r>
+          </a:p>
+        </p:txBody>
+      </p:sp>
+      <p:sp>
+        <p:nvSpPr>
           <p:cNvPr id="10" name="TextBox 9"/>
           <p:cNvSpPr txBox="1"/>
           <p:nvPr/>
         </p:nvSpPr>
         <p:spPr>
           <a:xfrm>
-            <a:off x="640080" y="5100000"/>
-            <a:ext cx="10852800" cy="320040"/>
+            <a:off x="640080" y="5394960"/>
+            <a:ext cx="10058400" cy="365760"/>
           </a:xfrm>
           <a:prstGeom prst="rect">
             <a:avLst/>
@@ -3874,13 +6994,13 @@
           <a:p>
             <a:pPr algn="l"/>
             <a:r>
-              <a:rPr sz="1100" b="0">
-                <a:solidFill>
-                  <a:srgbClr val="475569"/>
-                </a:solidFill>
-                <a:latin typeface="Calibri"/>
-              </a:rPr>
-              <a:t>AI &amp; Data Science — Amrita Vishwa Vidyapeetham, Coimbatore</a:t>
+              <a:rPr sz="1250" b="1">
+                <a:solidFill>
+                  <a:srgbClr val="22B8CF"/>
+                </a:solidFill>
+                <a:latin typeface="Calibri"/>
+              </a:rPr>
+              <a:t>github.com/DUNE-ODYSSEY/deepfake-detection</a:t>
             </a:r>
           </a:p>
         </p:txBody>
@@ -3888,76 +7008,6 @@
       <p:sp>
         <p:nvSpPr>
           <p:cNvPr id="11" name="TextBox 10"/>
-          <p:cNvSpPr txBox="1"/>
-          <p:nvPr/>
-        </p:nvSpPr>
-        <p:spPr>
-          <a:xfrm>
-            <a:off x="640080" y="5450000"/>
-            <a:ext cx="10852800" cy="320040"/>
-          </a:xfrm>
-          <a:prstGeom prst="rect">
-            <a:avLst/>
-          </a:prstGeom>
-          <a:noFill/>
-        </p:spPr>
-        <p:txBody>
-          <a:bodyPr wrap="square">
-            <a:spAutoFit/>
-          </a:bodyPr>
-          <a:lstStyle/>
-          <a:p>
-            <a:pPr algn="l"/>
-            <a:r>
-              <a:rPr sz="1100" b="1">
-                <a:solidFill>
-                  <a:srgbClr val="0E7490"/>
-                </a:solidFill>
-                <a:latin typeface="Calibri"/>
-              </a:rPr>
-              <a:t>GITHUB REPOSITORY</a:t>
-            </a:r>
-          </a:p>
-        </p:txBody>
-      </p:sp>
-      <p:sp>
-        <p:nvSpPr>
-          <p:cNvPr id="12" name="TextBox 11"/>
-          <p:cNvSpPr txBox="1"/>
-          <p:nvPr/>
-        </p:nvSpPr>
-        <p:spPr>
-          <a:xfrm>
-            <a:off x="640080" y="5700000"/>
-            <a:ext cx="10000000" cy="360000"/>
-          </a:xfrm>
-          <a:prstGeom prst="rect">
-            <a:avLst/>
-          </a:prstGeom>
-          <a:noFill/>
-        </p:spPr>
-        <p:txBody>
-          <a:bodyPr wrap="square">
-            <a:spAutoFit/>
-          </a:bodyPr>
-          <a:lstStyle/>
-          <a:p>
-            <a:pPr algn="l"/>
-            <a:r>
-              <a:rPr sz="1250" b="1">
-                <a:solidFill>
-                  <a:srgbClr val="22B8CF"/>
-                </a:solidFill>
-                <a:latin typeface="Calibri"/>
-              </a:rPr>
-              <a:t>github.com/DUNE-ODYSSEY/deepfake-detection</a:t>
-            </a:r>
-          </a:p>
-        </p:txBody>
-      </p:sp>
-      <p:sp>
-        <p:nvSpPr>
-          <p:cNvPr id="13" name="TextBox 12"/>
           <p:cNvSpPr txBox="1"/>
           <p:nvPr/>
         </p:nvSpPr>
@@ -3985,14 +7035,14 @@
                 </a:solidFill>
                 <a:latin typeface="Calibri"/>
               </a:rPr>
-              <a:t>Deepfake Detection — XceptionNet vs. CNN-ViT (23AID205)</a:t>
-            </a:r>
-          </a:p>
-        </p:txBody>
-      </p:sp>
-      <p:sp>
-        <p:nvSpPr>
-          <p:cNvPr id="14" name="TextBox 13"/>
+              <a:t>Deepfake Detection — Inverted Transfer (23AID205)</a:t>
+            </a:r>
+          </a:p>
+        </p:txBody>
+      </p:sp>
+      <p:sp>
+        <p:nvSpPr>
+          <p:cNvPr id="12" name="TextBox 11"/>
           <p:cNvSpPr txBox="1"/>
           <p:nvPr/>
         </p:nvSpPr>
@@ -4020,7 +7070,7 @@
                 </a:solidFill>
                 <a:latin typeface="Calibri"/>
               </a:rPr>
-              <a:t>10/10</a:t>
+              <a:t>14/14</a:t>
             </a:r>
           </a:p>
         </p:txBody>
@@ -4117,7 +7167,7 @@
                 </a:solidFill>
                 <a:latin typeface="Calibri"/>
               </a:rPr>
-              <a:t>STATUS</a:t>
+              <a:t>SUMMARY</a:t>
             </a:r>
           </a:p>
         </p:txBody>
@@ -4152,7 +7202,7 @@
                 </a:solidFill>
                 <a:latin typeface="Calibri"/>
               </a:rPr>
-              <a:t>Since the Mid-Review: All Three Experiments Complete</a:t>
+              <a:t>What We Found</a:t>
             </a:r>
           </a:p>
         </p:txBody>
@@ -4203,14 +7253,373 @@
       </p:sp>
       <p:sp>
         <p:nvSpPr>
-          <p:cNvPr id="6" name="TextBox 5"/>
-          <p:cNvSpPr txBox="1"/>
+          <p:cNvPr id="6" name="Rectangle 5"/>
+          <p:cNvSpPr/>
           <p:nvPr/>
         </p:nvSpPr>
         <p:spPr>
           <a:xfrm>
             <a:off x="640080" y="1783080"/>
-            <a:ext cx="10852800" cy="4374920"/>
+            <a:ext cx="3931920" cy="4206240"/>
+          </a:xfrm>
+          <a:prstGeom prst="rect">
+            <a:avLst/>
+          </a:prstGeom>
+          <a:solidFill>
+            <a:srgbClr val="F1F5F9"/>
+          </a:solidFill>
+          <a:ln>
+            <a:noFill/>
+          </a:ln>
+          <a:effectLst/>
+        </p:spPr>
+        <p:style>
+          <a:lnRef idx="1">
+            <a:schemeClr val="accent1"/>
+          </a:lnRef>
+          <a:fillRef idx="3">
+            <a:schemeClr val="accent1"/>
+          </a:fillRef>
+          <a:effectRef idx="2">
+            <a:schemeClr val="accent1"/>
+          </a:effectRef>
+          <a:fontRef idx="minor">
+            <a:schemeClr val="lt1"/>
+          </a:fontRef>
+        </p:style>
+        <p:txBody>
+          <a:bodyPr rtlCol="0" anchor="ctr"/>
+          <a:lstStyle/>
+          <a:p>
+            <a:pPr algn="ctr"/>
+          </a:p>
+        </p:txBody>
+      </p:sp>
+      <p:sp>
+        <p:nvSpPr>
+          <p:cNvPr id="7" name="TextBox 6"/>
+          <p:cNvSpPr txBox="1"/>
+          <p:nvPr/>
+        </p:nvSpPr>
+        <p:spPr>
+          <a:xfrm>
+            <a:off x="868680" y="1963080"/>
+            <a:ext cx="3474720" cy="320040"/>
+          </a:xfrm>
+          <a:prstGeom prst="rect">
+            <a:avLst/>
+          </a:prstGeom>
+          <a:noFill/>
+        </p:spPr>
+        <p:txBody>
+          <a:bodyPr wrap="square">
+            <a:spAutoFit/>
+          </a:bodyPr>
+          <a:lstStyle/>
+          <a:p>
+            <a:pPr algn="l"/>
+            <a:r>
+              <a:rPr sz="1100" b="1">
+                <a:solidFill>
+                  <a:srgbClr val="0E7490"/>
+                </a:solidFill>
+                <a:latin typeface="Calibri"/>
+              </a:rPr>
+              <a:t>KEY NUMBERS</a:t>
+            </a:r>
+          </a:p>
+        </p:txBody>
+      </p:sp>
+      <p:sp>
+        <p:nvSpPr>
+          <p:cNvPr id="8" name="TextBox 7"/>
+          <p:cNvSpPr txBox="1"/>
+          <p:nvPr/>
+        </p:nvSpPr>
+        <p:spPr>
+          <a:xfrm>
+            <a:off x="868680" y="2283080"/>
+            <a:ext cx="3474720" cy="365760"/>
+          </a:xfrm>
+          <a:prstGeom prst="rect">
+            <a:avLst/>
+          </a:prstGeom>
+          <a:noFill/>
+        </p:spPr>
+        <p:txBody>
+          <a:bodyPr wrap="square">
+            <a:spAutoFit/>
+          </a:bodyPr>
+          <a:lstStyle/>
+          <a:p>
+            <a:pPr algn="l"/>
+            <a:r>
+              <a:rPr sz="2200" b="1">
+                <a:solidFill>
+                  <a:srgbClr val="0F172A"/>
+                </a:solidFill>
+                <a:latin typeface="Calibri"/>
+              </a:rPr>
+              <a:t>0.26</a:t>
+            </a:r>
+          </a:p>
+        </p:txBody>
+      </p:sp>
+      <p:sp>
+        <p:nvSpPr>
+          <p:cNvPr id="9" name="TextBox 8"/>
+          <p:cNvSpPr txBox="1"/>
+          <p:nvPr/>
+        </p:nvSpPr>
+        <p:spPr>
+          <a:xfrm>
+            <a:off x="868680" y="2623080"/>
+            <a:ext cx="3474720" cy="320040"/>
+          </a:xfrm>
+          <a:prstGeom prst="rect">
+            <a:avLst/>
+          </a:prstGeom>
+          <a:noFill/>
+        </p:spPr>
+        <p:txBody>
+          <a:bodyPr wrap="square">
+            <a:spAutoFit/>
+          </a:bodyPr>
+          <a:lstStyle/>
+          <a:p>
+            <a:pPr algn="l"/>
+            <a:r>
+              <a:rPr sz="1050" b="0">
+                <a:solidFill>
+                  <a:srgbClr val="475569"/>
+                </a:solidFill>
+                <a:latin typeface="Calibri"/>
+              </a:rPr>
+              <a:t>Deepfakes → FaceSwap AUC (chance = 0.50)</a:t>
+            </a:r>
+          </a:p>
+        </p:txBody>
+      </p:sp>
+      <p:sp>
+        <p:nvSpPr>
+          <p:cNvPr id="10" name="TextBox 9"/>
+          <p:cNvSpPr txBox="1"/>
+          <p:nvPr/>
+        </p:nvSpPr>
+        <p:spPr>
+          <a:xfrm>
+            <a:off x="868680" y="3209640"/>
+            <a:ext cx="3474720" cy="365760"/>
+          </a:xfrm>
+          <a:prstGeom prst="rect">
+            <a:avLst/>
+          </a:prstGeom>
+          <a:noFill/>
+        </p:spPr>
+        <p:txBody>
+          <a:bodyPr wrap="square">
+            <a:spAutoFit/>
+          </a:bodyPr>
+          <a:lstStyle/>
+          <a:p>
+            <a:pPr algn="l"/>
+            <a:r>
+              <a:rPr sz="2200" b="1">
+                <a:solidFill>
+                  <a:srgbClr val="0F172A"/>
+                </a:solidFill>
+                <a:latin typeface="Calibri"/>
+              </a:rPr>
+              <a:t>8 / 8</a:t>
+            </a:r>
+          </a:p>
+        </p:txBody>
+      </p:sp>
+      <p:sp>
+        <p:nvSpPr>
+          <p:cNvPr id="11" name="TextBox 10"/>
+          <p:cNvSpPr txBox="1"/>
+          <p:nvPr/>
+        </p:nvSpPr>
+        <p:spPr>
+          <a:xfrm>
+            <a:off x="868680" y="3549640"/>
+            <a:ext cx="3474720" cy="320040"/>
+          </a:xfrm>
+          <a:prstGeom prst="rect">
+            <a:avLst/>
+          </a:prstGeom>
+          <a:noFill/>
+        </p:spPr>
+        <p:txBody>
+          <a:bodyPr wrap="square">
+            <a:spAutoFit/>
+          </a:bodyPr>
+          <a:lstStyle/>
+          <a:p>
+            <a:pPr algn="l"/>
+            <a:r>
+              <a:rPr sz="1050" b="0">
+                <a:solidFill>
+                  <a:srgbClr val="475569"/>
+                </a:solidFill>
+                <a:latin typeface="Calibri"/>
+              </a:rPr>
+              <a:t>cells where 3 architectures agree</a:t>
+            </a:r>
+          </a:p>
+        </p:txBody>
+      </p:sp>
+      <p:sp>
+        <p:nvSpPr>
+          <p:cNvPr id="12" name="TextBox 11"/>
+          <p:cNvSpPr txBox="1"/>
+          <p:nvPr/>
+        </p:nvSpPr>
+        <p:spPr>
+          <a:xfrm>
+            <a:off x="868680" y="4136200"/>
+            <a:ext cx="3474720" cy="365760"/>
+          </a:xfrm>
+          <a:prstGeom prst="rect">
+            <a:avLst/>
+          </a:prstGeom>
+          <a:noFill/>
+        </p:spPr>
+        <p:txBody>
+          <a:bodyPr wrap="square">
+            <a:spAutoFit/>
+          </a:bodyPr>
+          <a:lstStyle/>
+          <a:p>
+            <a:pPr algn="l"/>
+            <a:r>
+              <a:rPr sz="2200" b="1">
+                <a:solidFill>
+                  <a:srgbClr val="0F172A"/>
+                </a:solidFill>
+                <a:latin typeface="Calibri"/>
+              </a:rPr>
+              <a:t>ρ = 0.92</a:t>
+            </a:r>
+          </a:p>
+        </p:txBody>
+      </p:sp>
+      <p:sp>
+        <p:nvSpPr>
+          <p:cNvPr id="13" name="TextBox 12"/>
+          <p:cNvSpPr txBox="1"/>
+          <p:nvPr/>
+        </p:nvSpPr>
+        <p:spPr>
+          <a:xfrm>
+            <a:off x="868680" y="4476200"/>
+            <a:ext cx="3474720" cy="320040"/>
+          </a:xfrm>
+          <a:prstGeom prst="rect">
+            <a:avLst/>
+          </a:prstGeom>
+          <a:noFill/>
+        </p:spPr>
+        <p:txBody>
+          <a:bodyPr wrap="square">
+            <a:spAutoFit/>
+          </a:bodyPr>
+          <a:lstStyle/>
+          <a:p>
+            <a:pPr algn="l"/>
+            <a:r>
+              <a:rPr sz="1050" b="0">
+                <a:solidFill>
+                  <a:srgbClr val="475569"/>
+                </a:solidFill>
+                <a:latin typeface="Calibri"/>
+              </a:rPr>
+              <a:t>sharpness cue predicts the transfer matrix</a:t>
+            </a:r>
+          </a:p>
+        </p:txBody>
+      </p:sp>
+      <p:sp>
+        <p:nvSpPr>
+          <p:cNvPr id="14" name="TextBox 13"/>
+          <p:cNvSpPr txBox="1"/>
+          <p:nvPr/>
+        </p:nvSpPr>
+        <p:spPr>
+          <a:xfrm>
+            <a:off x="868680" y="5062760"/>
+            <a:ext cx="3474720" cy="365760"/>
+          </a:xfrm>
+          <a:prstGeom prst="rect">
+            <a:avLst/>
+          </a:prstGeom>
+          <a:noFill/>
+        </p:spPr>
+        <p:txBody>
+          <a:bodyPr wrap="square">
+            <a:spAutoFit/>
+          </a:bodyPr>
+          <a:lstStyle/>
+          <a:p>
+            <a:pPr algn="l"/>
+            <a:r>
+              <a:rPr sz="2200" b="1">
+                <a:solidFill>
+                  <a:srgbClr val="0F172A"/>
+                </a:solidFill>
+                <a:latin typeface="Calibri"/>
+              </a:rPr>
+              <a:t>+0.10</a:t>
+            </a:r>
+          </a:p>
+        </p:txBody>
+      </p:sp>
+      <p:sp>
+        <p:nvSpPr>
+          <p:cNvPr id="15" name="TextBox 14"/>
+          <p:cNvSpPr txBox="1"/>
+          <p:nvPr/>
+        </p:nvSpPr>
+        <p:spPr>
+          <a:xfrm>
+            <a:off x="868680" y="5402760"/>
+            <a:ext cx="3474720" cy="320040"/>
+          </a:xfrm>
+          <a:prstGeom prst="rect">
+            <a:avLst/>
+          </a:prstGeom>
+          <a:noFill/>
+        </p:spPr>
+        <p:txBody>
+          <a:bodyPr wrap="square">
+            <a:spAutoFit/>
+          </a:bodyPr>
+          <a:lstStyle/>
+          <a:p>
+            <a:pPr algn="l"/>
+            <a:r>
+              <a:rPr sz="1050" b="0">
+                <a:solidFill>
+                  <a:srgbClr val="475569"/>
+                </a:solidFill>
+                <a:latin typeface="Calibri"/>
+              </a:rPr>
+              <a:t>AUC gained by randomizing sharpness</a:t>
+            </a:r>
+          </a:p>
+        </p:txBody>
+      </p:sp>
+      <p:sp>
+        <p:nvSpPr>
+          <p:cNvPr id="16" name="TextBox 15"/>
+          <p:cNvSpPr txBox="1"/>
+          <p:nvPr/>
+        </p:nvSpPr>
+        <p:spPr>
+          <a:xfrm>
+            <a:off x="4846320" y="1783080"/>
+            <a:ext cx="6675120" cy="4389120"/>
           </a:xfrm>
           <a:prstGeom prst="rect">
             <a:avLst/>
@@ -4228,17 +7637,17 @@
                 <a:spcPct val="112000"/>
               </a:lnSpc>
               <a:spcAft>
-                <a:spcPts val="1400"/>
+                <a:spcPts val="1200"/>
               </a:spcAft>
             </a:pPr>
             <a:r>
-              <a:rPr sz="1550" b="0">
+              <a:rPr sz="1450" b="0">
                 <a:solidFill>
                   <a:srgbClr val="1A202C"/>
                 </a:solidFill>
                 <a:latin typeface="Calibri"/>
               </a:rPr>
-              <a:t>▸  Experiment 1 (baseline, same-distribution) was complete at the mid-review. Experiments 2 (cross-manipulation) and 3 (compression robustness) are now also complete, along with Grad-CAM interpretability and a working live demo.</a:t>
+              <a:t>▸  Some cross-manipulation cells score below chance: the detector ranks unseen fakes as more real than real faces.</a:t>
             </a:r>
           </a:p>
           <a:p>
@@ -4247,17 +7656,17 @@
                 <a:spcPct val="112000"/>
               </a:lnSpc>
               <a:spcAft>
-                <a:spcPts val="1400"/>
+                <a:spcPts val="1200"/>
               </a:spcAft>
             </a:pPr>
             <a:r>
-              <a:rPr sz="1550" b="0">
+              <a:rPr sz="1450" b="0">
                 <a:solidFill>
                   <a:srgbClr val="1A202C"/>
                 </a:solidFill>
                 <a:latin typeface="Calibri"/>
               </a:rPr>
-              <a:t>▸  The original hypothesis -- that the CNN-ViT hybrid would generalize better than the XceptionNet baseline -- did not hold. Reporting that as an honest negative result rather than reframing the comparison after the fact.</a:t>
+              <a:t>▸  Not a pipeline bug: it survives an audit, a full preprocessing rebuild and a one-factor preprocessing grid, with 3 seeds and confidence intervals.</a:t>
             </a:r>
           </a:p>
           <a:p>
@@ -4266,17 +7675,17 @@
                 <a:spcPct val="112000"/>
               </a:lnSpc>
               <a:spcAft>
-                <a:spcPts val="1400"/>
+                <a:spcPts val="1200"/>
               </a:spcAft>
             </a:pPr>
             <a:r>
-              <a:rPr sz="1550" b="0">
+              <a:rPr sz="1450" b="0">
                 <a:solidFill>
                   <a:srgbClr val="1A202C"/>
                 </a:solidFill>
                 <a:latin typeface="Calibri"/>
               </a:rPr>
-              <a:t>▸  What did turn up, unexpectedly: several cross-manipulation cells score below random chance (AUC &lt; 0.5), which is a more interesting and more publishable finding than the architecture comparison itself.</a:t>
+              <a:t>▸  Cause (partial): Deepfakes and NeuralTextures fakes are blurrier than real faces; FaceSwap fakes are sharper. A detector that learns "blurrier = fake" gets FaceSwap backwards.</a:t>
             </a:r>
           </a:p>
           <a:p>
@@ -4285,24 +7694,43 @@
                 <a:spcPct val="112000"/>
               </a:lnSpc>
               <a:spcAft>
-                <a:spcPts val="1400"/>
+                <a:spcPts val="1200"/>
               </a:spcAft>
             </a:pPr>
             <a:r>
-              <a:rPr sz="1550" b="0">
+              <a:rPr sz="1450" b="0">
                 <a:solidFill>
                   <a:srgbClr val="1A202C"/>
                 </a:solidFill>
                 <a:latin typeface="Calibri"/>
               </a:rPr>
-              <a:t>▸  This update covers: the full results, why we're confident it isn't a pipeline artifact, and the research plan now built around it (RESEARCH_BRIEF.md, in the repo).</a:t>
-            </a:r>
-          </a:p>
-        </p:txBody>
-      </p:sp>
-      <p:sp>
-        <p:nvSpPr>
-          <p:cNvPr id="7" name="TextBox 6"/>
+              <a:t>▸  Randomizing sharpness in training raises every inverted cell by ~0.1 AUC, but does not remove the inversion.</a:t>
+            </a:r>
+          </a:p>
+          <a:p>
+            <a:pPr>
+              <a:lnSpc>
+                <a:spcPct val="112000"/>
+              </a:lnSpc>
+              <a:spcAft>
+                <a:spcPts val="1200"/>
+              </a:spcAft>
+            </a:pPr>
+            <a:r>
+              <a:rPr sz="1450" b="0">
+                <a:solidFill>
+                  <a:srgbClr val="1A202C"/>
+                </a:solidFill>
+                <a:latin typeface="Calibri"/>
+              </a:rPr>
+              <a:t>▸  Limit: the sharpness rule does not predict a second dataset (DeepFakeFace).</a:t>
+            </a:r>
+          </a:p>
+        </p:txBody>
+      </p:sp>
+      <p:sp>
+        <p:nvSpPr>
+          <p:cNvPr id="17" name="TextBox 16"/>
           <p:cNvSpPr txBox="1"/>
           <p:nvPr/>
         </p:nvSpPr>
@@ -4330,14 +7758,14 @@
                 </a:solidFill>
                 <a:latin typeface="Calibri"/>
               </a:rPr>
-              <a:t>Deepfake Detection — XceptionNet vs. CNN-ViT (23AID205)</a:t>
-            </a:r>
-          </a:p>
-        </p:txBody>
-      </p:sp>
-      <p:sp>
-        <p:nvSpPr>
-          <p:cNvPr id="8" name="TextBox 7"/>
+              <a:t>Deepfake Detection — Inverted Transfer (23AID205)</a:t>
+            </a:r>
+          </a:p>
+        </p:txBody>
+      </p:sp>
+      <p:sp>
+        <p:nvSpPr>
+          <p:cNvPr id="18" name="TextBox 17"/>
           <p:cNvSpPr txBox="1"/>
           <p:nvPr/>
         </p:nvSpPr>
@@ -4365,7 +7793,7 @@
                 </a:solidFill>
                 <a:latin typeface="Calibri"/>
               </a:rPr>
-              <a:t>2/10</a:t>
+              <a:t>2/14</a:t>
             </a:r>
           </a:p>
         </p:txBody>
@@ -4462,7 +7890,7 @@
                 </a:solidFill>
                 <a:latin typeface="Calibri"/>
               </a:rPr>
-              <a:t>RESULTS · EXPERIMENT 2 — COMPLETE</a:t>
+              <a:t>BACKGROUND · EXPERIMENTS 1–3</a:t>
             </a:r>
           </a:p>
         </p:txBody>
@@ -4497,7 +7925,7 @@
                 </a:solidFill>
                 <a:latin typeface="Calibri"/>
               </a:rPr>
-              <a:t>Cross-Manipulation Generalization</a:t>
+              <a:t>Where the Project Started</a:t>
             </a:r>
           </a:p>
         </p:txBody>
@@ -4555,7 +7983,7 @@
         <p:spPr>
           <a:xfrm>
             <a:off x="640080" y="1691640"/>
-            <a:ext cx="10515600" cy="457200"/>
+            <a:ext cx="10515600" cy="400000"/>
           </a:xfrm>
           <a:prstGeom prst="rect">
             <a:avLst/>
@@ -4576,671 +8004,7 @@
                 </a:solidFill>
                 <a:latin typeface="Calibri"/>
               </a:rPr>
-              <a:t>Train on one manipulation method, test on another (and on the same method, diagonal). Color floor is clipped at 0.5 -- printed values below 0.5 are below random chance.</a:t>
-            </a:r>
-          </a:p>
-        </p:txBody>
-      </p:sp>
-      <p:pic>
-        <p:nvPicPr>
-          <p:cNvPr id="7" name="Picture 6" descr="cross_manipulation_heatmaps.png"/>
-          <p:cNvPicPr>
-            <a:picLocks noChangeAspect="1"/>
-          </p:cNvPicPr>
-          <p:nvPr/>
-        </p:nvPicPr>
-        <p:blipFill>
-          <a:blip r:embed="rId2"/>
-          <a:stretch>
-            <a:fillRect/>
-          </a:stretch>
-        </p:blipFill>
-        <p:spPr>
-          <a:xfrm>
-            <a:off x="640080" y="2286000"/>
-            <a:ext cx="7132320" cy="2879600"/>
-          </a:xfrm>
-          <a:prstGeom prst="rect">
-            <a:avLst/>
-          </a:prstGeom>
-        </p:spPr>
-      </p:pic>
-      <p:sp>
-        <p:nvSpPr>
-          <p:cNvPr id="8" name="Rectangle 7"/>
-          <p:cNvSpPr/>
-          <p:nvPr/>
-        </p:nvSpPr>
-        <p:spPr>
-          <a:xfrm>
-            <a:off x="8046720" y="2286000"/>
-            <a:ext cx="3504895" cy="4114800"/>
-          </a:xfrm>
-          <a:prstGeom prst="rect">
-            <a:avLst/>
-          </a:prstGeom>
-          <a:solidFill>
-            <a:srgbClr val="F1F5F9"/>
-          </a:solidFill>
-          <a:ln>
-            <a:noFill/>
-          </a:ln>
-          <a:effectLst/>
-        </p:spPr>
-        <p:style>
-          <a:lnRef idx="1">
-            <a:schemeClr val="accent1"/>
-          </a:lnRef>
-          <a:fillRef idx="3">
-            <a:schemeClr val="accent1"/>
-          </a:fillRef>
-          <a:effectRef idx="2">
-            <a:schemeClr val="accent1"/>
-          </a:effectRef>
-          <a:fontRef idx="minor">
-            <a:schemeClr val="lt1"/>
-          </a:fontRef>
-        </p:style>
-        <p:txBody>
-          <a:bodyPr rtlCol="0" anchor="ctr"/>
-          <a:lstStyle/>
-          <a:p>
-            <a:pPr algn="ctr"/>
-          </a:p>
-        </p:txBody>
-      </p:sp>
-      <p:sp>
-        <p:nvSpPr>
-          <p:cNvPr id="9" name="TextBox 8"/>
-          <p:cNvSpPr txBox="1"/>
-          <p:nvPr/>
-        </p:nvSpPr>
-        <p:spPr>
-          <a:xfrm>
-            <a:off x="8275320" y="2466000"/>
-            <a:ext cx="3047695" cy="320040"/>
-          </a:xfrm>
-          <a:prstGeom prst="rect">
-            <a:avLst/>
-          </a:prstGeom>
-          <a:noFill/>
-        </p:spPr>
-        <p:txBody>
-          <a:bodyPr wrap="square">
-            <a:spAutoFit/>
-          </a:bodyPr>
-          <a:lstStyle/>
-          <a:p>
-            <a:pPr algn="l"/>
-            <a:r>
-              <a:rPr sz="1100" b="1">
-                <a:solidFill>
-                  <a:srgbClr val="0E7490"/>
-                </a:solidFill>
-                <a:latin typeface="Calibri"/>
-              </a:rPr>
-              <a:t>BELOW-CHANCE CELLS</a:t>
-            </a:r>
-          </a:p>
-        </p:txBody>
-      </p:sp>
-      <p:sp>
-        <p:nvSpPr>
-          <p:cNvPr id="10" name="TextBox 9"/>
-          <p:cNvSpPr txBox="1"/>
-          <p:nvPr/>
-        </p:nvSpPr>
-        <p:spPr>
-          <a:xfrm>
-            <a:off x="8275320" y="2786000"/>
-            <a:ext cx="3047695" cy="365760"/>
-          </a:xfrm>
-          <a:prstGeom prst="rect">
-            <a:avLst/>
-          </a:prstGeom>
-          <a:noFill/>
-        </p:spPr>
-        <p:txBody>
-          <a:bodyPr wrap="square">
-            <a:spAutoFit/>
-          </a:bodyPr>
-          <a:lstStyle/>
-          <a:p>
-            <a:pPr algn="l"/>
-            <a:r>
-              <a:rPr sz="2200" b="1">
-                <a:solidFill>
-                  <a:srgbClr val="0F172A"/>
-                </a:solidFill>
-                <a:latin typeface="Calibri"/>
-              </a:rPr>
-              <a:t>0.256</a:t>
-            </a:r>
-          </a:p>
-        </p:txBody>
-      </p:sp>
-      <p:sp>
-        <p:nvSpPr>
-          <p:cNvPr id="11" name="TextBox 10"/>
-          <p:cNvSpPr txBox="1"/>
-          <p:nvPr/>
-        </p:nvSpPr>
-        <p:spPr>
-          <a:xfrm>
-            <a:off x="8275320" y="3126000"/>
-            <a:ext cx="3047695" cy="320040"/>
-          </a:xfrm>
-          <a:prstGeom prst="rect">
-            <a:avLst/>
-          </a:prstGeom>
-          <a:noFill/>
-        </p:spPr>
-        <p:txBody>
-          <a:bodyPr wrap="square">
-            <a:spAutoFit/>
-          </a:bodyPr>
-          <a:lstStyle/>
-          <a:p>
-            <a:pPr algn="l"/>
-            <a:r>
-              <a:rPr sz="1050" b="0">
-                <a:solidFill>
-                  <a:srgbClr val="475569"/>
-                </a:solidFill>
-                <a:latin typeface="Calibri"/>
-              </a:rPr>
-              <a:t>Xception worst cell: Deepfakes → FaceSwap</a:t>
-            </a:r>
-          </a:p>
-        </p:txBody>
-      </p:sp>
-      <p:sp>
-        <p:nvSpPr>
-          <p:cNvPr id="12" name="TextBox 11"/>
-          <p:cNvSpPr txBox="1"/>
-          <p:nvPr/>
-        </p:nvSpPr>
-        <p:spPr>
-          <a:xfrm>
-            <a:off x="8275320" y="3689700"/>
-            <a:ext cx="3047695" cy="365760"/>
-          </a:xfrm>
-          <a:prstGeom prst="rect">
-            <a:avLst/>
-          </a:prstGeom>
-          <a:noFill/>
-        </p:spPr>
-        <p:txBody>
-          <a:bodyPr wrap="square">
-            <a:spAutoFit/>
-          </a:bodyPr>
-          <a:lstStyle/>
-          <a:p>
-            <a:pPr algn="l"/>
-            <a:r>
-              <a:rPr sz="2200" b="1">
-                <a:solidFill>
-                  <a:srgbClr val="0F172A"/>
-                </a:solidFill>
-                <a:latin typeface="Calibri"/>
-              </a:rPr>
-              <a:t>0.198</a:t>
-            </a:r>
-          </a:p>
-        </p:txBody>
-      </p:sp>
-      <p:sp>
-        <p:nvSpPr>
-          <p:cNvPr id="13" name="TextBox 12"/>
-          <p:cNvSpPr txBox="1"/>
-          <p:nvPr/>
-        </p:nvSpPr>
-        <p:spPr>
-          <a:xfrm>
-            <a:off x="8275320" y="4029700"/>
-            <a:ext cx="3047695" cy="320040"/>
-          </a:xfrm>
-          <a:prstGeom prst="rect">
-            <a:avLst/>
-          </a:prstGeom>
-          <a:noFill/>
-        </p:spPr>
-        <p:txBody>
-          <a:bodyPr wrap="square">
-            <a:spAutoFit/>
-          </a:bodyPr>
-          <a:lstStyle/>
-          <a:p>
-            <a:pPr algn="l"/>
-            <a:r>
-              <a:rPr sz="1050" b="0">
-                <a:solidFill>
-                  <a:srgbClr val="475569"/>
-                </a:solidFill>
-                <a:latin typeface="Calibri"/>
-              </a:rPr>
-              <a:t>CNN-ViT worst cell: Deepfakes → FaceSwap</a:t>
-            </a:r>
-          </a:p>
-        </p:txBody>
-      </p:sp>
-      <p:sp>
-        <p:nvSpPr>
-          <p:cNvPr id="14" name="TextBox 13"/>
-          <p:cNvSpPr txBox="1"/>
-          <p:nvPr/>
-        </p:nvSpPr>
-        <p:spPr>
-          <a:xfrm>
-            <a:off x="8275320" y="4593400"/>
-            <a:ext cx="3047695" cy="365760"/>
-          </a:xfrm>
-          <a:prstGeom prst="rect">
-            <a:avLst/>
-          </a:prstGeom>
-          <a:noFill/>
-        </p:spPr>
-        <p:txBody>
-          <a:bodyPr wrap="square">
-            <a:spAutoFit/>
-          </a:bodyPr>
-          <a:lstStyle/>
-          <a:p>
-            <a:pPr algn="l"/>
-            <a:r>
-              <a:rPr sz="2200" b="1">
-                <a:solidFill>
-                  <a:srgbClr val="0F172A"/>
-                </a:solidFill>
-                <a:latin typeface="Calibri"/>
-              </a:rPr>
-              <a:t>0.398 / 0.421</a:t>
-            </a:r>
-          </a:p>
-        </p:txBody>
-      </p:sp>
-      <p:sp>
-        <p:nvSpPr>
-          <p:cNvPr id="15" name="TextBox 14"/>
-          <p:cNvSpPr txBox="1"/>
-          <p:nvPr/>
-        </p:nvSpPr>
-        <p:spPr>
-          <a:xfrm>
-            <a:off x="8275320" y="4933400"/>
-            <a:ext cx="3047695" cy="320040"/>
-          </a:xfrm>
-          <a:prstGeom prst="rect">
-            <a:avLst/>
-          </a:prstGeom>
-          <a:noFill/>
-        </p:spPr>
-        <p:txBody>
-          <a:bodyPr wrap="square">
-            <a:spAutoFit/>
-          </a:bodyPr>
-          <a:lstStyle/>
-          <a:p>
-            <a:pPr algn="l"/>
-            <a:r>
-              <a:rPr sz="1050" b="0">
-                <a:solidFill>
-                  <a:srgbClr val="475569"/>
-                </a:solidFill>
-                <a:latin typeface="Calibri"/>
-              </a:rPr>
-              <a:t>Generalization gap -- Xception / CNN-ViT</a:t>
-            </a:r>
-          </a:p>
-        </p:txBody>
-      </p:sp>
-      <p:sp>
-        <p:nvSpPr>
-          <p:cNvPr id="16" name="TextBox 15"/>
-          <p:cNvSpPr txBox="1"/>
-          <p:nvPr/>
-        </p:nvSpPr>
-        <p:spPr>
-          <a:xfrm>
-            <a:off x="8275320" y="5497100"/>
-            <a:ext cx="3047695" cy="365760"/>
-          </a:xfrm>
-          <a:prstGeom prst="rect">
-            <a:avLst/>
-          </a:prstGeom>
-          <a:noFill/>
-        </p:spPr>
-        <p:txBody>
-          <a:bodyPr wrap="square">
-            <a:spAutoFit/>
-          </a:bodyPr>
-          <a:lstStyle/>
-          <a:p>
-            <a:pPr algn="l"/>
-            <a:r>
-              <a:rPr sz="2200" b="1">
-                <a:solidFill>
-                  <a:srgbClr val="0F172A"/>
-                </a:solidFill>
-                <a:latin typeface="Calibri"/>
-              </a:rPr>
-              <a:t>7 of 24</a:t>
-            </a:r>
-          </a:p>
-        </p:txBody>
-      </p:sp>
-      <p:sp>
-        <p:nvSpPr>
-          <p:cNvPr id="17" name="TextBox 16"/>
-          <p:cNvSpPr txBox="1"/>
-          <p:nvPr/>
-        </p:nvSpPr>
-        <p:spPr>
-          <a:xfrm>
-            <a:off x="8275320" y="5837100"/>
-            <a:ext cx="3047695" cy="320040"/>
-          </a:xfrm>
-          <a:prstGeom prst="rect">
-            <a:avLst/>
-          </a:prstGeom>
-          <a:noFill/>
-        </p:spPr>
-        <p:txBody>
-          <a:bodyPr wrap="square">
-            <a:spAutoFit/>
-          </a:bodyPr>
-          <a:lstStyle/>
-          <a:p>
-            <a:pPr algn="l"/>
-            <a:r>
-              <a:rPr sz="1050" b="0">
-                <a:solidFill>
-                  <a:srgbClr val="475569"/>
-                </a:solidFill>
-                <a:latin typeface="Calibri"/>
-              </a:rPr>
-              <a:t>off-diagonal cells ≤ chance -- all involve FaceSwap</a:t>
-            </a:r>
-          </a:p>
-        </p:txBody>
-      </p:sp>
-      <p:sp>
-        <p:nvSpPr>
-          <p:cNvPr id="18" name="TextBox 17"/>
-          <p:cNvSpPr txBox="1"/>
-          <p:nvPr/>
-        </p:nvSpPr>
-        <p:spPr>
-          <a:xfrm>
-            <a:off x="640080" y="6510528"/>
-            <a:ext cx="7315200" cy="274320"/>
-          </a:xfrm>
-          <a:prstGeom prst="rect">
-            <a:avLst/>
-          </a:prstGeom>
-          <a:noFill/>
-        </p:spPr>
-        <p:txBody>
-          <a:bodyPr wrap="square">
-            <a:spAutoFit/>
-          </a:bodyPr>
-          <a:lstStyle/>
-          <a:p>
-            <a:pPr algn="l"/>
-            <a:r>
-              <a:rPr sz="1000" b="0">
-                <a:solidFill>
-                  <a:srgbClr val="94A3B8"/>
-                </a:solidFill>
-                <a:latin typeface="Calibri"/>
-              </a:rPr>
-              <a:t>Deepfake Detection — XceptionNet vs. CNN-ViT (23AID205)</a:t>
-            </a:r>
-          </a:p>
-        </p:txBody>
-      </p:sp>
-      <p:sp>
-        <p:nvSpPr>
-          <p:cNvPr id="19" name="TextBox 18"/>
-          <p:cNvSpPr txBox="1"/>
-          <p:nvPr/>
-        </p:nvSpPr>
-        <p:spPr>
-          <a:xfrm>
-            <a:off x="10972800" y="6510528"/>
-            <a:ext cx="822960" cy="274320"/>
-          </a:xfrm>
-          <a:prstGeom prst="rect">
-            <a:avLst/>
-          </a:prstGeom>
-          <a:noFill/>
-        </p:spPr>
-        <p:txBody>
-          <a:bodyPr wrap="square">
-            <a:spAutoFit/>
-          </a:bodyPr>
-          <a:lstStyle/>
-          <a:p>
-            <a:pPr algn="r"/>
-            <a:r>
-              <a:rPr sz="1000" b="0">
-                <a:solidFill>
-                  <a:srgbClr val="94A3B8"/>
-                </a:solidFill>
-                <a:latin typeface="Calibri"/>
-              </a:rPr>
-              <a:t>3/10</a:t>
-            </a:r>
-          </a:p>
-        </p:txBody>
-      </p:sp>
-    </p:spTree>
-  </p:cSld>
-  <p:clrMapOvr>
-    <a:masterClrMapping/>
-  </p:clrMapOvr>
-</p:sld>
-</file>
-
-<file path=ppt/slides/slide4.xml><?xml version="1.0" encoding="utf-8"?>
-<p:sld xmlns:a="http://schemas.openxmlformats.org/drawingml/2006/main" xmlns:p="http://schemas.openxmlformats.org/presentationml/2006/main" xmlns:r="http://schemas.openxmlformats.org/officeDocument/2006/relationships">
-  <p:cSld>
-    <p:spTree>
-      <p:nvGrpSpPr>
-        <p:cNvPr id="1" name=""/>
-        <p:cNvGrpSpPr/>
-        <p:nvPr/>
-      </p:nvGrpSpPr>
-      <p:grpSpPr/>
-      <p:sp>
-        <p:nvSpPr>
-          <p:cNvPr id="2" name="Rectangle 1"/>
-          <p:cNvSpPr/>
-          <p:nvPr/>
-        </p:nvSpPr>
-        <p:spPr>
-          <a:xfrm>
-            <a:off x="0" y="0"/>
-            <a:ext cx="12191695" cy="6858000"/>
-          </a:xfrm>
-          <a:prstGeom prst="rect">
-            <a:avLst/>
-          </a:prstGeom>
-          <a:solidFill>
-            <a:srgbClr val="FFFFFF"/>
-          </a:solidFill>
-          <a:ln>
-            <a:noFill/>
-          </a:ln>
-          <a:effectLst/>
-        </p:spPr>
-        <p:style>
-          <a:lnRef idx="1">
-            <a:schemeClr val="accent1"/>
-          </a:lnRef>
-          <a:fillRef idx="3">
-            <a:schemeClr val="accent1"/>
-          </a:fillRef>
-          <a:effectRef idx="2">
-            <a:schemeClr val="accent1"/>
-          </a:effectRef>
-          <a:fontRef idx="minor">
-            <a:schemeClr val="lt1"/>
-          </a:fontRef>
-        </p:style>
-        <p:txBody>
-          <a:bodyPr rtlCol="0" anchor="ctr"/>
-          <a:lstStyle/>
-          <a:p>
-            <a:pPr algn="ctr"/>
-          </a:p>
-        </p:txBody>
-      </p:sp>
-      <p:sp>
-        <p:nvSpPr>
-          <p:cNvPr id="3" name="TextBox 2"/>
-          <p:cNvSpPr txBox="1"/>
-          <p:nvPr/>
-        </p:nvSpPr>
-        <p:spPr>
-          <a:xfrm>
-            <a:off x="640080" y="384048"/>
-            <a:ext cx="9144000" cy="320040"/>
-          </a:xfrm>
-          <a:prstGeom prst="rect">
-            <a:avLst/>
-          </a:prstGeom>
-          <a:noFill/>
-        </p:spPr>
-        <p:txBody>
-          <a:bodyPr wrap="square">
-            <a:spAutoFit/>
-          </a:bodyPr>
-          <a:lstStyle/>
-          <a:p>
-            <a:pPr algn="l"/>
-            <a:r>
-              <a:rPr sz="1300" b="1">
-                <a:solidFill>
-                  <a:srgbClr val="0E7490"/>
-                </a:solidFill>
-                <a:latin typeface="Calibri"/>
-              </a:rPr>
-              <a:t>RESULTS · EXPERIMENT 3 — COMPLETE</a:t>
-            </a:r>
-          </a:p>
-        </p:txBody>
-      </p:sp>
-      <p:sp>
-        <p:nvSpPr>
-          <p:cNvPr id="4" name="TextBox 3"/>
-          <p:cNvSpPr txBox="1"/>
-          <p:nvPr/>
-        </p:nvSpPr>
-        <p:spPr>
-          <a:xfrm>
-            <a:off x="640080" y="658368"/>
-            <a:ext cx="10852800" cy="731520"/>
-          </a:xfrm>
-          <a:prstGeom prst="rect">
-            <a:avLst/>
-          </a:prstGeom>
-          <a:noFill/>
-        </p:spPr>
-        <p:txBody>
-          <a:bodyPr wrap="square">
-            <a:spAutoFit/>
-          </a:bodyPr>
-          <a:lstStyle/>
-          <a:p>
-            <a:pPr algn="l"/>
-            <a:r>
-              <a:rPr sz="2800" b="1">
-                <a:solidFill>
-                  <a:srgbClr val="1A202C"/>
-                </a:solidFill>
-                <a:latin typeface="Calibri"/>
-              </a:rPr>
-              <a:t>Compression Robustness (c23 → c40, proxy)</a:t>
-            </a:r>
-          </a:p>
-        </p:txBody>
-      </p:sp>
-      <p:sp>
-        <p:nvSpPr>
-          <p:cNvPr id="5" name="Rectangle 4"/>
-          <p:cNvSpPr/>
-          <p:nvPr/>
-        </p:nvSpPr>
-        <p:spPr>
-          <a:xfrm>
-            <a:off x="640080" y="1353312"/>
-            <a:ext cx="502920" cy="41148"/>
-          </a:xfrm>
-          <a:prstGeom prst="rect">
-            <a:avLst/>
-          </a:prstGeom>
-          <a:solidFill>
-            <a:srgbClr val="22B8CF"/>
-          </a:solidFill>
-          <a:ln>
-            <a:noFill/>
-          </a:ln>
-          <a:effectLst/>
-        </p:spPr>
-        <p:style>
-          <a:lnRef idx="1">
-            <a:schemeClr val="accent1"/>
-          </a:lnRef>
-          <a:fillRef idx="3">
-            <a:schemeClr val="accent1"/>
-          </a:fillRef>
-          <a:effectRef idx="2">
-            <a:schemeClr val="accent1"/>
-          </a:effectRef>
-          <a:fontRef idx="minor">
-            <a:schemeClr val="lt1"/>
-          </a:fontRef>
-        </p:style>
-        <p:txBody>
-          <a:bodyPr rtlCol="0" anchor="ctr"/>
-          <a:lstStyle/>
-          <a:p>
-            <a:pPr algn="ctr"/>
-          </a:p>
-        </p:txBody>
-      </p:sp>
-      <p:sp>
-        <p:nvSpPr>
-          <p:cNvPr id="6" name="TextBox 5"/>
-          <p:cNvSpPr txBox="1"/>
-          <p:nvPr/>
-        </p:nvSpPr>
-        <p:spPr>
-          <a:xfrm>
-            <a:off x="640080" y="1691640"/>
-            <a:ext cx="10515600" cy="400000"/>
-          </a:xfrm>
-          <a:prstGeom prst="rect">
-            <a:avLst/>
-          </a:prstGeom>
-          <a:noFill/>
-        </p:spPr>
-        <p:txBody>
-          <a:bodyPr wrap="square">
-            <a:spAutoFit/>
-          </a:bodyPr>
-          <a:lstStyle/>
-          <a:p>
-            <a:pPr algn="l"/>
-            <a:r>
-              <a:rPr sz="1350" b="0">
-                <a:solidFill>
-                  <a:srgbClr val="475569"/>
-                </a:solidFill>
-                <a:latin typeface="Calibri"/>
-              </a:rPr>
-              <a:t>Official c0/c40 access is still pending -- c40 here is a documented proxy (c23 re-compressed), eval-only, caveated throughout the repo.</a:t>
+              <a:t>Original course experiments: XceptionNet vs. a CNN-ViT hybrid on FaceForensics++ (Kaggle mirror, c23, one seed).</a:t>
             </a:r>
           </a:p>
         </p:txBody>
@@ -5255,7 +8019,7 @@
         </p:nvGraphicFramePr>
         <p:xfrm>
           <a:off x="640080" y="2141640"/>
-          <a:ext cx="10800000" cy="1260000"/>
+          <a:ext cx="10881360" cy="1260000"/>
         </p:xfrm>
         <a:graphic>
           <a:graphicData uri="http://schemas.openxmlformats.org/drawingml/2006/table">
@@ -5264,10 +8028,10 @@
                 <a:tableStyleId>{5C22544A-7EE6-4342-B048-85BDC9FD1C3A}</a:tableStyleId>
               </a:tblPr>
               <a:tblGrid>
-                <a:gridCol w="3200000"/>
-                <a:gridCol w="2700000"/>
-                <a:gridCol w="2700000"/>
-                <a:gridCol w="2200000"/>
+                <a:gridCol w="2377440"/>
+                <a:gridCol w="2651760"/>
+                <a:gridCol w="2651760"/>
+                <a:gridCol w="3200400"/>
               </a:tblGrid>
               <a:tr h="420000">
                 <a:tc>
@@ -5304,7 +8068,7 @@
                           </a:solidFill>
                           <a:latin typeface="Calibri"/>
                         </a:rPr>
-                        <a:t>c23 Video AUC</a:t>
+                        <a:t>Same-method AUC</a:t>
                       </a:r>
                     </a:p>
                   </a:txBody>
@@ -5326,7 +8090,7 @@
                           </a:solidFill>
                           <a:latin typeface="Calibri"/>
                         </a:rPr>
-                        <a:t>c40proxy Video AUC</a:t>
+                        <a:t>Cross-method AUC</a:t>
                       </a:r>
                     </a:p>
                   </a:txBody>
@@ -5348,7 +8112,7 @@
                           </a:solidFill>
                           <a:latin typeface="Calibri"/>
                         </a:rPr>
-                        <a:t>AUC Drop</a:t>
+                        <a:t>Compression AUC (c40 proxy)</a:t>
                       </a:r>
                     </a:p>
                   </a:txBody>
@@ -5394,7 +8158,7 @@
                           </a:solidFill>
                           <a:latin typeface="Calibri"/>
                         </a:rPr>
-                        <a:t>0.9958</a:t>
+                        <a:t>0.996</a:t>
                       </a:r>
                     </a:p>
                   </a:txBody>
@@ -5416,7 +8180,7 @@
                           </a:solidFill>
                           <a:latin typeface="Calibri"/>
                         </a:rPr>
-                        <a:t>0.8018</a:t>
+                        <a:t>0.597</a:t>
                       </a:r>
                     </a:p>
                   </a:txBody>
@@ -5438,7 +8202,7 @@
                           </a:solidFill>
                           <a:latin typeface="Calibri"/>
                         </a:rPr>
-                        <a:t>-0.194</a:t>
+                        <a:t>0.802</a:t>
                       </a:r>
                     </a:p>
                   </a:txBody>
@@ -5462,7 +8226,7 @@
                           </a:solidFill>
                           <a:latin typeface="Calibri"/>
                         </a:rPr>
-                        <a:t>CNN-ViT Hybrid</a:t>
+                        <a:t>CNN-ViT hybrid</a:t>
                       </a:r>
                     </a:p>
                   </a:txBody>
@@ -5484,7 +8248,7 @@
                           </a:solidFill>
                           <a:latin typeface="Calibri"/>
                         </a:rPr>
-                        <a:t>0.9836</a:t>
+                        <a:t>0.984</a:t>
                       </a:r>
                     </a:p>
                   </a:txBody>
@@ -5506,7 +8270,7 @@
                           </a:solidFill>
                           <a:latin typeface="Calibri"/>
                         </a:rPr>
-                        <a:t>0.8172</a:t>
+                        <a:t>0.571</a:t>
                       </a:r>
                     </a:p>
                   </a:txBody>
@@ -5528,7 +8292,7 @@
                           </a:solidFill>
                           <a:latin typeface="Calibri"/>
                         </a:rPr>
-                        <a:t>-0.166</a:t>
+                        <a:t>0.817</a:t>
                       </a:r>
                     </a:p>
                   </a:txBody>
@@ -5573,7 +8337,7 @@
                 </a:solidFill>
                 <a:latin typeface="Calibri"/>
               </a:rPr>
-              <a:t>Both models degrade substantially under heavier re-compression; the hybrid's drop is somewhat smaller, but this is on the proxy set, not official c40 -- not being claimed as a general result.</a:t>
+              <a:t>The hybrid did not generalize better (a reported negative result). The surprise was in the cross-method matrix: several cells fell below 0.5, which became the research question for the rest of the project.</a:t>
             </a:r>
           </a:p>
         </p:txBody>
@@ -5608,7 +8372,7 @@
                 </a:solidFill>
                 <a:latin typeface="Calibri"/>
               </a:rPr>
-              <a:t>Deepfake Detection — XceptionNet vs. CNN-ViT (23AID205)</a:t>
+              <a:t>Deepfake Detection — Inverted Transfer (23AID205)</a:t>
             </a:r>
           </a:p>
         </p:txBody>
@@ -5643,7 +8407,671 @@
                 </a:solidFill>
                 <a:latin typeface="Calibri"/>
               </a:rPr>
-              <a:t>4/10</a:t>
+              <a:t>3/14</a:t>
+            </a:r>
+          </a:p>
+        </p:txBody>
+      </p:sp>
+    </p:spTree>
+  </p:cSld>
+  <p:clrMapOvr>
+    <a:masterClrMapping/>
+  </p:clrMapOvr>
+</p:sld>
+</file>
+
+<file path=ppt/slides/slide4.xml><?xml version="1.0" encoding="utf-8"?>
+<p:sld xmlns:a="http://schemas.openxmlformats.org/drawingml/2006/main" xmlns:p="http://schemas.openxmlformats.org/presentationml/2006/main" xmlns:r="http://schemas.openxmlformats.org/officeDocument/2006/relationships">
+  <p:cSld>
+    <p:spTree>
+      <p:nvGrpSpPr>
+        <p:cNvPr id="1" name=""/>
+        <p:cNvGrpSpPr/>
+        <p:nvPr/>
+      </p:nvGrpSpPr>
+      <p:grpSpPr/>
+      <p:sp>
+        <p:nvSpPr>
+          <p:cNvPr id="2" name="Rectangle 1"/>
+          <p:cNvSpPr/>
+          <p:nvPr/>
+        </p:nvSpPr>
+        <p:spPr>
+          <a:xfrm>
+            <a:off x="0" y="0"/>
+            <a:ext cx="12191695" cy="6858000"/>
+          </a:xfrm>
+          <a:prstGeom prst="rect">
+            <a:avLst/>
+          </a:prstGeom>
+          <a:solidFill>
+            <a:srgbClr val="FFFFFF"/>
+          </a:solidFill>
+          <a:ln>
+            <a:noFill/>
+          </a:ln>
+          <a:effectLst/>
+        </p:spPr>
+        <p:style>
+          <a:lnRef idx="1">
+            <a:schemeClr val="accent1"/>
+          </a:lnRef>
+          <a:fillRef idx="3">
+            <a:schemeClr val="accent1"/>
+          </a:fillRef>
+          <a:effectRef idx="2">
+            <a:schemeClr val="accent1"/>
+          </a:effectRef>
+          <a:fontRef idx="minor">
+            <a:schemeClr val="lt1"/>
+          </a:fontRef>
+        </p:style>
+        <p:txBody>
+          <a:bodyPr rtlCol="0" anchor="ctr"/>
+          <a:lstStyle/>
+          <a:p>
+            <a:pPr algn="ctr"/>
+          </a:p>
+        </p:txBody>
+      </p:sp>
+      <p:sp>
+        <p:nvSpPr>
+          <p:cNvPr id="3" name="TextBox 2"/>
+          <p:cNvSpPr txBox="1"/>
+          <p:nvPr/>
+        </p:nvSpPr>
+        <p:spPr>
+          <a:xfrm>
+            <a:off x="640080" y="384048"/>
+            <a:ext cx="9144000" cy="320040"/>
+          </a:xfrm>
+          <a:prstGeom prst="rect">
+            <a:avLst/>
+          </a:prstGeom>
+          <a:noFill/>
+        </p:spPr>
+        <p:txBody>
+          <a:bodyPr wrap="square">
+            <a:spAutoFit/>
+          </a:bodyPr>
+          <a:lstStyle/>
+          <a:p>
+            <a:pPr algn="l"/>
+            <a:r>
+              <a:rPr sz="1300" b="1">
+                <a:solidFill>
+                  <a:srgbClr val="0E7490"/>
+                </a:solidFill>
+                <a:latin typeface="Calibri"/>
+              </a:rPr>
+              <a:t>THE FINDING · PHASE 1</a:t>
+            </a:r>
+          </a:p>
+        </p:txBody>
+      </p:sp>
+      <p:sp>
+        <p:nvSpPr>
+          <p:cNvPr id="4" name="TextBox 3"/>
+          <p:cNvSpPr txBox="1"/>
+          <p:nvPr/>
+        </p:nvSpPr>
+        <p:spPr>
+          <a:xfrm>
+            <a:off x="640080" y="658368"/>
+            <a:ext cx="10852800" cy="731520"/>
+          </a:xfrm>
+          <a:prstGeom prst="rect">
+            <a:avLst/>
+          </a:prstGeom>
+          <a:noFill/>
+        </p:spPr>
+        <p:txBody>
+          <a:bodyPr wrap="square">
+            <a:spAutoFit/>
+          </a:bodyPr>
+          <a:lstStyle/>
+          <a:p>
+            <a:pPr algn="l"/>
+            <a:r>
+              <a:rPr sz="2800" b="1">
+                <a:solidFill>
+                  <a:srgbClr val="1A202C"/>
+                </a:solidFill>
+                <a:latin typeface="Calibri"/>
+              </a:rPr>
+              <a:t>The Inversion Survives a Full Pipeline Rebuild</a:t>
+            </a:r>
+          </a:p>
+        </p:txBody>
+      </p:sp>
+      <p:sp>
+        <p:nvSpPr>
+          <p:cNvPr id="5" name="Rectangle 4"/>
+          <p:cNvSpPr/>
+          <p:nvPr/>
+        </p:nvSpPr>
+        <p:spPr>
+          <a:xfrm>
+            <a:off x="640080" y="1353312"/>
+            <a:ext cx="502920" cy="41148"/>
+          </a:xfrm>
+          <a:prstGeom prst="rect">
+            <a:avLst/>
+          </a:prstGeom>
+          <a:solidFill>
+            <a:srgbClr val="22B8CF"/>
+          </a:solidFill>
+          <a:ln>
+            <a:noFill/>
+          </a:ln>
+          <a:effectLst/>
+        </p:spPr>
+        <p:style>
+          <a:lnRef idx="1">
+            <a:schemeClr val="accent1"/>
+          </a:lnRef>
+          <a:fillRef idx="3">
+            <a:schemeClr val="accent1"/>
+          </a:fillRef>
+          <a:effectRef idx="2">
+            <a:schemeClr val="accent1"/>
+          </a:effectRef>
+          <a:fontRef idx="minor">
+            <a:schemeClr val="lt1"/>
+          </a:fontRef>
+        </p:style>
+        <p:txBody>
+          <a:bodyPr rtlCol="0" anchor="ctr"/>
+          <a:lstStyle/>
+          <a:p>
+            <a:pPr algn="ctr"/>
+          </a:p>
+        </p:txBody>
+      </p:sp>
+      <p:sp>
+        <p:nvSpPr>
+          <p:cNvPr id="6" name="TextBox 5"/>
+          <p:cNvSpPr txBox="1"/>
+          <p:nvPr/>
+        </p:nvSpPr>
+        <p:spPr>
+          <a:xfrm>
+            <a:off x="640080" y="1691640"/>
+            <a:ext cx="10515600" cy="457200"/>
+          </a:xfrm>
+          <a:prstGeom prst="rect">
+            <a:avLst/>
+          </a:prstGeom>
+          <a:noFill/>
+        </p:spPr>
+        <p:txBody>
+          <a:bodyPr wrap="square">
+            <a:spAutoFit/>
+          </a:bodyPr>
+          <a:lstStyle/>
+          <a:p>
+            <a:pPr algn="l"/>
+            <a:r>
+              <a:rPr sz="1350" b="0">
+                <a:solidFill>
+                  <a:srgbClr val="475569"/>
+                </a:solidFill>
+                <a:latin typeface="Calibri"/>
+              </a:rPr>
+              <a:t>Same matrix with a completely different preprocessing pipeline (dlib + alignment, PNG, 256 px, 32 frames). Hatched cells are below chance.</a:t>
+            </a:r>
+          </a:p>
+        </p:txBody>
+      </p:sp>
+      <p:pic>
+        <p:nvPicPr>
+          <p:cNvPr id="7" name="Picture 6" descr="F1_transfer_matrices.png"/>
+          <p:cNvPicPr>
+            <a:picLocks noChangeAspect="1"/>
+          </p:cNvPicPr>
+          <p:nvPr/>
+        </p:nvPicPr>
+        <p:blipFill>
+          <a:blip r:embed="rId2"/>
+          <a:stretch>
+            <a:fillRect/>
+          </a:stretch>
+        </p:blipFill>
+        <p:spPr>
+          <a:xfrm>
+            <a:off x="640080" y="2286000"/>
+            <a:ext cx="7615397" cy="3154680"/>
+          </a:xfrm>
+          <a:prstGeom prst="rect">
+            <a:avLst/>
+          </a:prstGeom>
+        </p:spPr>
+      </p:pic>
+      <p:sp>
+        <p:nvSpPr>
+          <p:cNvPr id="8" name="Rectangle 7"/>
+          <p:cNvSpPr/>
+          <p:nvPr/>
+        </p:nvSpPr>
+        <p:spPr>
+          <a:xfrm>
+            <a:off x="8529797" y="2286000"/>
+            <a:ext cx="3021818" cy="4114800"/>
+          </a:xfrm>
+          <a:prstGeom prst="rect">
+            <a:avLst/>
+          </a:prstGeom>
+          <a:solidFill>
+            <a:srgbClr val="F1F5F9"/>
+          </a:solidFill>
+          <a:ln>
+            <a:noFill/>
+          </a:ln>
+          <a:effectLst/>
+        </p:spPr>
+        <p:style>
+          <a:lnRef idx="1">
+            <a:schemeClr val="accent1"/>
+          </a:lnRef>
+          <a:fillRef idx="3">
+            <a:schemeClr val="accent1"/>
+          </a:fillRef>
+          <a:effectRef idx="2">
+            <a:schemeClr val="accent1"/>
+          </a:effectRef>
+          <a:fontRef idx="minor">
+            <a:schemeClr val="lt1"/>
+          </a:fontRef>
+        </p:style>
+        <p:txBody>
+          <a:bodyPr rtlCol="0" anchor="ctr"/>
+          <a:lstStyle/>
+          <a:p>
+            <a:pPr algn="ctr"/>
+          </a:p>
+        </p:txBody>
+      </p:sp>
+      <p:sp>
+        <p:nvSpPr>
+          <p:cNvPr id="9" name="TextBox 8"/>
+          <p:cNvSpPr txBox="1"/>
+          <p:nvPr/>
+        </p:nvSpPr>
+        <p:spPr>
+          <a:xfrm>
+            <a:off x="8758397" y="2466000"/>
+            <a:ext cx="2564618" cy="320040"/>
+          </a:xfrm>
+          <a:prstGeom prst="rect">
+            <a:avLst/>
+          </a:prstGeom>
+          <a:noFill/>
+        </p:spPr>
+        <p:txBody>
+          <a:bodyPr wrap="square">
+            <a:spAutoFit/>
+          </a:bodyPr>
+          <a:lstStyle/>
+          <a:p>
+            <a:pPr algn="l"/>
+            <a:r>
+              <a:rPr sz="1100" b="1">
+                <a:solidFill>
+                  <a:srgbClr val="0E7490"/>
+                </a:solidFill>
+                <a:latin typeface="Calibri"/>
+              </a:rPr>
+              <a:t>REFERENCE PIPELINE, 3 SEEDS</a:t>
+            </a:r>
+          </a:p>
+        </p:txBody>
+      </p:sp>
+      <p:sp>
+        <p:nvSpPr>
+          <p:cNvPr id="10" name="TextBox 9"/>
+          <p:cNvSpPr txBox="1"/>
+          <p:nvPr/>
+        </p:nvSpPr>
+        <p:spPr>
+          <a:xfrm>
+            <a:off x="8758397" y="2786000"/>
+            <a:ext cx="2564618" cy="365760"/>
+          </a:xfrm>
+          <a:prstGeom prst="rect">
+            <a:avLst/>
+          </a:prstGeom>
+          <a:noFill/>
+        </p:spPr>
+        <p:txBody>
+          <a:bodyPr wrap="square">
+            <a:spAutoFit/>
+          </a:bodyPr>
+          <a:lstStyle/>
+          <a:p>
+            <a:pPr algn="l"/>
+            <a:r>
+              <a:rPr sz="2200" b="1">
+                <a:solidFill>
+                  <a:srgbClr val="0F172A"/>
+                </a:solidFill>
+                <a:latin typeface="Calibri"/>
+              </a:rPr>
+              <a:t>0.26</a:t>
+            </a:r>
+          </a:p>
+        </p:txBody>
+      </p:sp>
+      <p:sp>
+        <p:nvSpPr>
+          <p:cNvPr id="11" name="TextBox 10"/>
+          <p:cNvSpPr txBox="1"/>
+          <p:nvPr/>
+        </p:nvSpPr>
+        <p:spPr>
+          <a:xfrm>
+            <a:off x="8758397" y="3126000"/>
+            <a:ext cx="2564618" cy="320040"/>
+          </a:xfrm>
+          <a:prstGeom prst="rect">
+            <a:avLst/>
+          </a:prstGeom>
+          <a:noFill/>
+        </p:spPr>
+        <p:txBody>
+          <a:bodyPr wrap="square">
+            <a:spAutoFit/>
+          </a:bodyPr>
+          <a:lstStyle/>
+          <a:p>
+            <a:pPr algn="l"/>
+            <a:r>
+              <a:rPr sz="1050" b="0">
+                <a:solidFill>
+                  <a:srgbClr val="475569"/>
+                </a:solidFill>
+                <a:latin typeface="Calibri"/>
+              </a:rPr>
+              <a:t>DF → FS  [0.21, 0.31]</a:t>
+            </a:r>
+          </a:p>
+        </p:txBody>
+      </p:sp>
+      <p:sp>
+        <p:nvSpPr>
+          <p:cNvPr id="12" name="TextBox 11"/>
+          <p:cNvSpPr txBox="1"/>
+          <p:nvPr/>
+        </p:nvSpPr>
+        <p:spPr>
+          <a:xfrm>
+            <a:off x="8758397" y="3689700"/>
+            <a:ext cx="2564618" cy="365760"/>
+          </a:xfrm>
+          <a:prstGeom prst="rect">
+            <a:avLst/>
+          </a:prstGeom>
+          <a:noFill/>
+        </p:spPr>
+        <p:txBody>
+          <a:bodyPr wrap="square">
+            <a:spAutoFit/>
+          </a:bodyPr>
+          <a:lstStyle/>
+          <a:p>
+            <a:pPr algn="l"/>
+            <a:r>
+              <a:rPr sz="2200" b="1">
+                <a:solidFill>
+                  <a:srgbClr val="0F172A"/>
+                </a:solidFill>
+                <a:latin typeface="Calibri"/>
+              </a:rPr>
+              <a:t>0.43</a:t>
+            </a:r>
+          </a:p>
+        </p:txBody>
+      </p:sp>
+      <p:sp>
+        <p:nvSpPr>
+          <p:cNvPr id="13" name="TextBox 12"/>
+          <p:cNvSpPr txBox="1"/>
+          <p:nvPr/>
+        </p:nvSpPr>
+        <p:spPr>
+          <a:xfrm>
+            <a:off x="8758397" y="4029700"/>
+            <a:ext cx="2564618" cy="320040"/>
+          </a:xfrm>
+          <a:prstGeom prst="rect">
+            <a:avLst/>
+          </a:prstGeom>
+          <a:noFill/>
+        </p:spPr>
+        <p:txBody>
+          <a:bodyPr wrap="square">
+            <a:spAutoFit/>
+          </a:bodyPr>
+          <a:lstStyle/>
+          <a:p>
+            <a:pPr algn="l"/>
+            <a:r>
+              <a:rPr sz="1050" b="0">
+                <a:solidFill>
+                  <a:srgbClr val="475569"/>
+                </a:solidFill>
+                <a:latin typeface="Calibri"/>
+              </a:rPr>
+              <a:t>FS → NT  [0.37, 0.49]</a:t>
+            </a:r>
+          </a:p>
+        </p:txBody>
+      </p:sp>
+      <p:sp>
+        <p:nvSpPr>
+          <p:cNvPr id="14" name="TextBox 13"/>
+          <p:cNvSpPr txBox="1"/>
+          <p:nvPr/>
+        </p:nvSpPr>
+        <p:spPr>
+          <a:xfrm>
+            <a:off x="8758397" y="4593400"/>
+            <a:ext cx="2564618" cy="365760"/>
+          </a:xfrm>
+          <a:prstGeom prst="rect">
+            <a:avLst/>
+          </a:prstGeom>
+          <a:noFill/>
+        </p:spPr>
+        <p:txBody>
+          <a:bodyPr wrap="square">
+            <a:spAutoFit/>
+          </a:bodyPr>
+          <a:lstStyle/>
+          <a:p>
+            <a:pPr algn="l"/>
+            <a:r>
+              <a:rPr sz="2200" b="1">
+                <a:solidFill>
+                  <a:srgbClr val="0F172A"/>
+                </a:solidFill>
+                <a:latin typeface="Calibri"/>
+              </a:rPr>
+              <a:t>0.26</a:t>
+            </a:r>
+          </a:p>
+        </p:txBody>
+      </p:sp>
+      <p:sp>
+        <p:nvSpPr>
+          <p:cNvPr id="15" name="TextBox 14"/>
+          <p:cNvSpPr txBox="1"/>
+          <p:nvPr/>
+        </p:nvSpPr>
+        <p:spPr>
+          <a:xfrm>
+            <a:off x="8758397" y="4933400"/>
+            <a:ext cx="2564618" cy="320040"/>
+          </a:xfrm>
+          <a:prstGeom prst="rect">
+            <a:avLst/>
+          </a:prstGeom>
+          <a:noFill/>
+        </p:spPr>
+        <p:txBody>
+          <a:bodyPr wrap="square">
+            <a:spAutoFit/>
+          </a:bodyPr>
+          <a:lstStyle/>
+          <a:p>
+            <a:pPr algn="l"/>
+            <a:r>
+              <a:rPr sz="1050" b="0">
+                <a:solidFill>
+                  <a:srgbClr val="475569"/>
+                </a:solidFill>
+                <a:latin typeface="Calibri"/>
+              </a:rPr>
+              <a:t>DF → FS, original pipeline</a:t>
+            </a:r>
+          </a:p>
+        </p:txBody>
+      </p:sp>
+      <p:sp>
+        <p:nvSpPr>
+          <p:cNvPr id="16" name="TextBox 15"/>
+          <p:cNvSpPr txBox="1"/>
+          <p:nvPr/>
+        </p:nvSpPr>
+        <p:spPr>
+          <a:xfrm>
+            <a:off x="8758397" y="5497100"/>
+            <a:ext cx="2564618" cy="365760"/>
+          </a:xfrm>
+          <a:prstGeom prst="rect">
+            <a:avLst/>
+          </a:prstGeom>
+          <a:noFill/>
+        </p:spPr>
+        <p:txBody>
+          <a:bodyPr wrap="square">
+            <a:spAutoFit/>
+          </a:bodyPr>
+          <a:lstStyle/>
+          <a:p>
+            <a:pPr algn="l"/>
+            <a:r>
+              <a:rPr sz="2200" b="1">
+                <a:solidFill>
+                  <a:srgbClr val="0F172A"/>
+                </a:solidFill>
+                <a:latin typeface="Calibri"/>
+              </a:rPr>
+              <a:t>0.05</a:t>
+            </a:r>
+          </a:p>
+        </p:txBody>
+      </p:sp>
+      <p:sp>
+        <p:nvSpPr>
+          <p:cNvPr id="17" name="TextBox 16"/>
+          <p:cNvSpPr txBox="1"/>
+          <p:nvPr/>
+        </p:nvSpPr>
+        <p:spPr>
+          <a:xfrm>
+            <a:off x="8758397" y="5837100"/>
+            <a:ext cx="2564618" cy="320040"/>
+          </a:xfrm>
+          <a:prstGeom prst="rect">
+            <a:avLst/>
+          </a:prstGeom>
+          <a:noFill/>
+        </p:spPr>
+        <p:txBody>
+          <a:bodyPr wrap="square">
+            <a:spAutoFit/>
+          </a:bodyPr>
+          <a:lstStyle/>
+          <a:p>
+            <a:pPr algn="l"/>
+            <a:r>
+              <a:rPr sz="1050" b="0">
+                <a:solidFill>
+                  <a:srgbClr val="475569"/>
+                </a:solidFill>
+                <a:latin typeface="Calibri"/>
+              </a:rPr>
+              <a:t>largest change in any cell</a:t>
+            </a:r>
+          </a:p>
+        </p:txBody>
+      </p:sp>
+      <p:sp>
+        <p:nvSpPr>
+          <p:cNvPr id="18" name="TextBox 17"/>
+          <p:cNvSpPr txBox="1"/>
+          <p:nvPr/>
+        </p:nvSpPr>
+        <p:spPr>
+          <a:xfrm>
+            <a:off x="640080" y="6510528"/>
+            <a:ext cx="7315200" cy="274320"/>
+          </a:xfrm>
+          <a:prstGeom prst="rect">
+            <a:avLst/>
+          </a:prstGeom>
+          <a:noFill/>
+        </p:spPr>
+        <p:txBody>
+          <a:bodyPr wrap="square">
+            <a:spAutoFit/>
+          </a:bodyPr>
+          <a:lstStyle/>
+          <a:p>
+            <a:pPr algn="l"/>
+            <a:r>
+              <a:rPr sz="1000" b="0">
+                <a:solidFill>
+                  <a:srgbClr val="94A3B8"/>
+                </a:solidFill>
+                <a:latin typeface="Calibri"/>
+              </a:rPr>
+              <a:t>Deepfake Detection — Inverted Transfer (23AID205)</a:t>
+            </a:r>
+          </a:p>
+        </p:txBody>
+      </p:sp>
+      <p:sp>
+        <p:nvSpPr>
+          <p:cNvPr id="19" name="TextBox 18"/>
+          <p:cNvSpPr txBox="1"/>
+          <p:nvPr/>
+        </p:nvSpPr>
+        <p:spPr>
+          <a:xfrm>
+            <a:off x="10972800" y="6510528"/>
+            <a:ext cx="822960" cy="274320"/>
+          </a:xfrm>
+          <a:prstGeom prst="rect">
+            <a:avLst/>
+          </a:prstGeom>
+          <a:noFill/>
+        </p:spPr>
+        <p:txBody>
+          <a:bodyPr wrap="square">
+            <a:spAutoFit/>
+          </a:bodyPr>
+          <a:lstStyle/>
+          <a:p>
+            <a:pPr algn="r"/>
+            <a:r>
+              <a:rPr sz="1000" b="0">
+                <a:solidFill>
+                  <a:srgbClr val="94A3B8"/>
+                </a:solidFill>
+                <a:latin typeface="Calibri"/>
+              </a:rPr>
+              <a:t>4/14</a:t>
             </a:r>
           </a:p>
         </p:txBody>
@@ -5740,7 +9168,7 @@
                 </a:solidFill>
                 <a:latin typeface="Calibri"/>
               </a:rPr>
-              <a:t>THE FINDING</a:t>
+              <a:t>PHASE 0</a:t>
             </a:r>
           </a:p>
         </p:txBody>
@@ -5775,7 +9203,7 @@
                 </a:solidFill>
                 <a:latin typeface="Calibri"/>
               </a:rPr>
-              <a:t>Transfer Failure Tracks the Training Method, Not the Model</a:t>
+              <a:t>Ruling Out a Pipeline Bug First</a:t>
             </a:r>
           </a:p>
         </p:txBody>
@@ -5826,373 +9254,14 @@
       </p:sp>
       <p:sp>
         <p:nvSpPr>
-          <p:cNvPr id="6" name="Rectangle 5"/>
-          <p:cNvSpPr/>
+          <p:cNvPr id="6" name="TextBox 5"/>
+          <p:cNvSpPr txBox="1"/>
           <p:nvPr/>
         </p:nvSpPr>
         <p:spPr>
           <a:xfrm>
             <a:off x="640080" y="1783080"/>
-            <a:ext cx="4200000" cy="4114800"/>
-          </a:xfrm>
-          <a:prstGeom prst="rect">
-            <a:avLst/>
-          </a:prstGeom>
-          <a:solidFill>
-            <a:srgbClr val="F1F5F9"/>
-          </a:solidFill>
-          <a:ln>
-            <a:noFill/>
-          </a:ln>
-          <a:effectLst/>
-        </p:spPr>
-        <p:style>
-          <a:lnRef idx="1">
-            <a:schemeClr val="accent1"/>
-          </a:lnRef>
-          <a:fillRef idx="3">
-            <a:schemeClr val="accent1"/>
-          </a:fillRef>
-          <a:effectRef idx="2">
-            <a:schemeClr val="accent1"/>
-          </a:effectRef>
-          <a:fontRef idx="minor">
-            <a:schemeClr val="lt1"/>
-          </a:fontRef>
-        </p:style>
-        <p:txBody>
-          <a:bodyPr rtlCol="0" anchor="ctr"/>
-          <a:lstStyle/>
-          <a:p>
-            <a:pPr algn="ctr"/>
-          </a:p>
-        </p:txBody>
-      </p:sp>
-      <p:sp>
-        <p:nvSpPr>
-          <p:cNvPr id="7" name="TextBox 6"/>
-          <p:cNvSpPr txBox="1"/>
-          <p:nvPr/>
-        </p:nvSpPr>
-        <p:spPr>
-          <a:xfrm>
-            <a:off x="868680" y="1963080"/>
-            <a:ext cx="3742800" cy="320040"/>
-          </a:xfrm>
-          <a:prstGeom prst="rect">
-            <a:avLst/>
-          </a:prstGeom>
-          <a:noFill/>
-        </p:spPr>
-        <p:txBody>
-          <a:bodyPr wrap="square">
-            <a:spAutoFit/>
-          </a:bodyPr>
-          <a:lstStyle/>
-          <a:p>
-            <a:pPr algn="l"/>
-            <a:r>
-              <a:rPr sz="1100" b="1">
-                <a:solidFill>
-                  <a:srgbClr val="0E7490"/>
-                </a:solidFill>
-                <a:latin typeface="Calibri"/>
-              </a:rPr>
-              <a:t>ARCHITECTURE CORRELATION</a:t>
-            </a:r>
-          </a:p>
-        </p:txBody>
-      </p:sp>
-      <p:sp>
-        <p:nvSpPr>
-          <p:cNvPr id="8" name="TextBox 7"/>
-          <p:cNvSpPr txBox="1"/>
-          <p:nvPr/>
-        </p:nvSpPr>
-        <p:spPr>
-          <a:xfrm>
-            <a:off x="868680" y="2283080"/>
-            <a:ext cx="3742800" cy="365760"/>
-          </a:xfrm>
-          <a:prstGeom prst="rect">
-            <a:avLst/>
-          </a:prstGeom>
-          <a:noFill/>
-        </p:spPr>
-        <p:txBody>
-          <a:bodyPr wrap="square">
-            <a:spAutoFit/>
-          </a:bodyPr>
-          <a:lstStyle/>
-          <a:p>
-            <a:pPr algn="l"/>
-            <a:r>
-              <a:rPr sz="2200" b="1">
-                <a:solidFill>
-                  <a:srgbClr val="0F172A"/>
-                </a:solidFill>
-                <a:latin typeface="Calibri"/>
-              </a:rPr>
-              <a:t>r = 0.938</a:t>
-            </a:r>
-          </a:p>
-        </p:txBody>
-      </p:sp>
-      <p:sp>
-        <p:nvSpPr>
-          <p:cNvPr id="9" name="TextBox 8"/>
-          <p:cNvSpPr txBox="1"/>
-          <p:nvPr/>
-        </p:nvSpPr>
-        <p:spPr>
-          <a:xfrm>
-            <a:off x="868680" y="2623080"/>
-            <a:ext cx="3742800" cy="320040"/>
-          </a:xfrm>
-          <a:prstGeom prst="rect">
-            <a:avLst/>
-          </a:prstGeom>
-          <a:noFill/>
-        </p:spPr>
-        <p:txBody>
-          <a:bodyPr wrap="square">
-            <a:spAutoFit/>
-          </a:bodyPr>
-          <a:lstStyle/>
-          <a:p>
-            <a:pPr algn="l"/>
-            <a:r>
-              <a:rPr sz="1050" b="0">
-                <a:solidFill>
-                  <a:srgbClr val="475569"/>
-                </a:solidFill>
-                <a:latin typeface="Calibri"/>
-              </a:rPr>
-              <a:t>Pearson correlation, off-diagonal AUC cells</a:t>
-            </a:r>
-          </a:p>
-        </p:txBody>
-      </p:sp>
-      <p:sp>
-        <p:nvSpPr>
-          <p:cNvPr id="10" name="TextBox 9"/>
-          <p:cNvSpPr txBox="1"/>
-          <p:nvPr/>
-        </p:nvSpPr>
-        <p:spPr>
-          <a:xfrm>
-            <a:off x="868680" y="3186780"/>
-            <a:ext cx="3742800" cy="365760"/>
-          </a:xfrm>
-          <a:prstGeom prst="rect">
-            <a:avLst/>
-          </a:prstGeom>
-          <a:noFill/>
-        </p:spPr>
-        <p:txBody>
-          <a:bodyPr wrap="square">
-            <a:spAutoFit/>
-          </a:bodyPr>
-          <a:lstStyle/>
-          <a:p>
-            <a:pPr algn="l"/>
-            <a:r>
-              <a:rPr sz="2200" b="1">
-                <a:solidFill>
-                  <a:srgbClr val="0F172A"/>
-                </a:solidFill>
-                <a:latin typeface="Calibri"/>
-              </a:rPr>
-              <a:t>ρ = 0.951</a:t>
-            </a:r>
-          </a:p>
-        </p:txBody>
-      </p:sp>
-      <p:sp>
-        <p:nvSpPr>
-          <p:cNvPr id="11" name="TextBox 10"/>
-          <p:cNvSpPr txBox="1"/>
-          <p:nvPr/>
-        </p:nvSpPr>
-        <p:spPr>
-          <a:xfrm>
-            <a:off x="868680" y="3526780"/>
-            <a:ext cx="3742800" cy="320040"/>
-          </a:xfrm>
-          <a:prstGeom prst="rect">
-            <a:avLst/>
-          </a:prstGeom>
-          <a:noFill/>
-        </p:spPr>
-        <p:txBody>
-          <a:bodyPr wrap="square">
-            <a:spAutoFit/>
-          </a:bodyPr>
-          <a:lstStyle/>
-          <a:p>
-            <a:pPr algn="l"/>
-            <a:r>
-              <a:rPr sz="1050" b="0">
-                <a:solidFill>
-                  <a:srgbClr val="475569"/>
-                </a:solidFill>
-                <a:latin typeface="Calibri"/>
-              </a:rPr>
-              <a:t>Spearman correlation, same cells</a:t>
-            </a:r>
-          </a:p>
-        </p:txBody>
-      </p:sp>
-      <p:sp>
-        <p:nvSpPr>
-          <p:cNvPr id="12" name="TextBox 11"/>
-          <p:cNvSpPr txBox="1"/>
-          <p:nvPr/>
-        </p:nvSpPr>
-        <p:spPr>
-          <a:xfrm>
-            <a:off x="868680" y="4090480"/>
-            <a:ext cx="3742800" cy="365760"/>
-          </a:xfrm>
-          <a:prstGeom prst="rect">
-            <a:avLst/>
-          </a:prstGeom>
-          <a:noFill/>
-        </p:spPr>
-        <p:txBody>
-          <a:bodyPr wrap="square">
-            <a:spAutoFit/>
-          </a:bodyPr>
-          <a:lstStyle/>
-          <a:p>
-            <a:pPr algn="l"/>
-            <a:r>
-              <a:rPr sz="2200" b="1">
-                <a:solidFill>
-                  <a:srgbClr val="0F172A"/>
-                </a:solidFill>
-                <a:latin typeface="Calibri"/>
-              </a:rPr>
-              <a:t>12</a:t>
-            </a:r>
-          </a:p>
-        </p:txBody>
-      </p:sp>
-      <p:sp>
-        <p:nvSpPr>
-          <p:cNvPr id="13" name="TextBox 12"/>
-          <p:cNvSpPr txBox="1"/>
-          <p:nvPr/>
-        </p:nvSpPr>
-        <p:spPr>
-          <a:xfrm>
-            <a:off x="868680" y="4430480"/>
-            <a:ext cx="3742800" cy="320040"/>
-          </a:xfrm>
-          <a:prstGeom prst="rect">
-            <a:avLst/>
-          </a:prstGeom>
-          <a:noFill/>
-        </p:spPr>
-        <p:txBody>
-          <a:bodyPr wrap="square">
-            <a:spAutoFit/>
-          </a:bodyPr>
-          <a:lstStyle/>
-          <a:p>
-            <a:pPr algn="l"/>
-            <a:r>
-              <a:rPr sz="1050" b="0">
-                <a:solidFill>
-                  <a:srgbClr val="475569"/>
-                </a:solidFill>
-                <a:latin typeface="Calibri"/>
-              </a:rPr>
-              <a:t>off-diagonal cells compared per architecture</a:t>
-            </a:r>
-          </a:p>
-        </p:txBody>
-      </p:sp>
-      <p:sp>
-        <p:nvSpPr>
-          <p:cNvPr id="14" name="TextBox 13"/>
-          <p:cNvSpPr txBox="1"/>
-          <p:nvPr/>
-        </p:nvSpPr>
-        <p:spPr>
-          <a:xfrm>
-            <a:off x="868680" y="4994180"/>
-            <a:ext cx="3742800" cy="365760"/>
-          </a:xfrm>
-          <a:prstGeom prst="rect">
-            <a:avLst/>
-          </a:prstGeom>
-          <a:noFill/>
-        </p:spPr>
-        <p:txBody>
-          <a:bodyPr wrap="square">
-            <a:spAutoFit/>
-          </a:bodyPr>
-          <a:lstStyle/>
-          <a:p>
-            <a:pPr algn="l"/>
-            <a:r>
-              <a:rPr sz="2200" b="1">
-                <a:solidFill>
-                  <a:srgbClr val="0F172A"/>
-                </a:solidFill>
-                <a:latin typeface="Calibri"/>
-              </a:rPr>
-              <a:t>p &lt; 0.001</a:t>
-            </a:r>
-          </a:p>
-        </p:txBody>
-      </p:sp>
-      <p:sp>
-        <p:nvSpPr>
-          <p:cNvPr id="15" name="TextBox 14"/>
-          <p:cNvSpPr txBox="1"/>
-          <p:nvPr/>
-        </p:nvSpPr>
-        <p:spPr>
-          <a:xfrm>
-            <a:off x="868680" y="5334180"/>
-            <a:ext cx="3742800" cy="320040"/>
-          </a:xfrm>
-          <a:prstGeom prst="rect">
-            <a:avLst/>
-          </a:prstGeom>
-          <a:noFill/>
-        </p:spPr>
-        <p:txBody>
-          <a:bodyPr wrap="square">
-            <a:spAutoFit/>
-          </a:bodyPr>
-          <a:lstStyle/>
-          <a:p>
-            <a:pPr algn="l"/>
-            <a:r>
-              <a:rPr sz="1050" b="0">
-                <a:solidFill>
-                  <a:srgbClr val="475569"/>
-                </a:solidFill>
-                <a:latin typeface="Calibri"/>
-              </a:rPr>
-              <a:t>both correlations, analysis/architecture_correlation.py</a:t>
-            </a:r>
-          </a:p>
-        </p:txBody>
-      </p:sp>
-      <p:sp>
-        <p:nvSpPr>
-          <p:cNvPr id="16" name="TextBox 15"/>
-          <p:cNvSpPr txBox="1"/>
-          <p:nvPr/>
-        </p:nvSpPr>
-        <p:spPr>
-          <a:xfrm>
-            <a:off x="5040080" y="1783080"/>
-            <a:ext cx="6252800" cy="4114800"/>
+            <a:ext cx="10852800" cy="4374920"/>
           </a:xfrm>
           <a:prstGeom prst="rect">
             <a:avLst/>
@@ -6210,17 +9279,17 @@
                 <a:spcPct val="112000"/>
               </a:lnSpc>
               <a:spcAft>
-                <a:spcPts val="1200"/>
+                <a:spcPts val="1400"/>
               </a:spcAft>
             </a:pPr>
             <a:r>
-              <a:rPr sz="1350" b="0">
+              <a:rPr sz="1500" b="0">
                 <a:solidFill>
                   <a:srgbClr val="1A202C"/>
                 </a:solidFill>
                 <a:latin typeface="Calibri"/>
               </a:rPr>
-              <a:t>▸  XceptionNet (ImageNet-pretrained, purely convolutional) and the CNN-ViT hybrid (trained from scratch, has global self-attention) are architecturally very different -- yet their cross-manipulation failure patterns are nearly identical cell-for-cell.</a:t>
+              <a:t>▸  Labels and splits: 17/17 checks pass. Fakes are labelled 1 everywhere, AUC orientation cannot silently flip, and train/val/test share no videos.</a:t>
             </a:r>
           </a:p>
           <a:p>
@@ -6229,17 +9298,17 @@
                 <a:spcPct val="112000"/>
               </a:lnSpc>
               <a:spcAft>
-                <a:spcPts val="1200"/>
+                <a:spcPts val="1400"/>
               </a:spcAft>
             </a:pPr>
             <a:r>
-              <a:rPr sz="1350" b="0">
+              <a:rPr sz="1500" b="0">
                 <a:solidFill>
                   <a:srgbClr val="1A202C"/>
                 </a:solidFill>
                 <a:latin typeface="Calibri"/>
               </a:rPr>
-              <a:t>▸  That means the below-chance scores aren't an architecture quirk. Both models are picking up something from the training manipulation method itself that doesn't transfer -- and in the FaceSwap cells, actively points the wrong way.</a:t>
+              <a:t>▸  Video encoding: codec, profile, pixel format and compression setting are identical for real and all four manipulation methods.</a:t>
             </a:r>
           </a:p>
           <a:p>
@@ -6248,24 +9317,62 @@
                 <a:spcPct val="112000"/>
               </a:lnSpc>
               <a:spcAft>
-                <a:spcPts val="1200"/>
+                <a:spcPts val="1400"/>
               </a:spcAft>
             </a:pPr>
             <a:r>
-              <a:rPr sz="1350" b="0">
+              <a:rPr sz="1500" b="0">
                 <a:solidFill>
                   <a:srgbClr val="1A202C"/>
                 </a:solidFill>
                 <a:latin typeface="Calibri"/>
               </a:rPr>
-              <a:t>▸  This reframes the project: not "which architecture generalizes better" but "why does detection invert on unseen manipulations, and can it be fixed." The second question is the one worth a paper.</a:t>
-            </a:r>
-          </a:p>
-        </p:txBody>
-      </p:sp>
-      <p:sp>
-        <p:nvSpPr>
-          <p:cNvPr id="17" name="TextBox 16"/>
+              <a:t>▸  Face crops: detection failures are negligible (≤ 0.05%) and JPEG settings are identical across classes.</a:t>
+            </a:r>
+          </a:p>
+          <a:p>
+            <a:pPr>
+              <a:lnSpc>
+                <a:spcPct val="112000"/>
+              </a:lnSpc>
+              <a:spcAft>
+                <a:spcPts val="1400"/>
+              </a:spcAft>
+            </a:pPr>
+            <a:r>
+              <a:rPr sz="1500" b="0">
+                <a:solidFill>
+                  <a:srgbClr val="1A202C"/>
+                </a:solidFill>
+                <a:latin typeface="Calibri"/>
+              </a:rPr>
+              <a:t>▸  Two code bugs fixed on the way: resumed training silently lost its history, and model checkpoints had been committed to git.</a:t>
+            </a:r>
+          </a:p>
+          <a:p>
+            <a:pPr>
+              <a:lnSpc>
+                <a:spcPct val="112000"/>
+              </a:lnSpc>
+              <a:spcAft>
+                <a:spcPts val="1400"/>
+              </a:spcAft>
+            </a:pPr>
+            <a:r>
+              <a:rPr sz="1500" b="0">
+                <a:solidFill>
+                  <a:srgbClr val="1A202C"/>
+                </a:solidFill>
+                <a:latin typeface="Calibri"/>
+              </a:rPr>
+              <a:t>▸  Conclusion: no trivial explanation, so the inversion is worth explaining.</a:t>
+            </a:r>
+          </a:p>
+        </p:txBody>
+      </p:sp>
+      <p:sp>
+        <p:nvSpPr>
+          <p:cNvPr id="7" name="TextBox 6"/>
           <p:cNvSpPr txBox="1"/>
           <p:nvPr/>
         </p:nvSpPr>
@@ -6293,14 +9400,14 @@
                 </a:solidFill>
                 <a:latin typeface="Calibri"/>
               </a:rPr>
-              <a:t>Deepfake Detection — XceptionNet vs. CNN-ViT (23AID205)</a:t>
-            </a:r>
-          </a:p>
-        </p:txBody>
-      </p:sp>
-      <p:sp>
-        <p:nvSpPr>
-          <p:cNvPr id="18" name="TextBox 17"/>
+              <a:t>Deepfake Detection — Inverted Transfer (23AID205)</a:t>
+            </a:r>
+          </a:p>
+        </p:txBody>
+      </p:sp>
+      <p:sp>
+        <p:nvSpPr>
+          <p:cNvPr id="8" name="TextBox 7"/>
           <p:cNvSpPr txBox="1"/>
           <p:nvPr/>
         </p:nvSpPr>
@@ -6328,7 +9435,7 @@
                 </a:solidFill>
                 <a:latin typeface="Calibri"/>
               </a:rPr>
-              <a:t>5/10</a:t>
+              <a:t>5/14</a:t>
             </a:r>
           </a:p>
         </p:txBody>
@@ -6425,7 +9532,7 @@
                 </a:solidFill>
                 <a:latin typeface="Calibri"/>
               </a:rPr>
-              <a:t>INTERPRETABILITY</a:t>
+              <a:t>PHASE 2</a:t>
             </a:r>
           </a:p>
         </p:txBody>
@@ -6460,7 +9567,7 @@
                 </a:solidFill>
                 <a:latin typeface="Calibri"/>
               </a:rPr>
-              <a:t>Grad-CAM: What the Models Actually Attend To</a:t>
+              <a:t>No Preprocessing Change Moves DF → FS</a:t>
             </a:r>
           </a:p>
         </p:txBody>
@@ -6518,7 +9625,7 @@
         <p:spPr>
           <a:xfrm>
             <a:off x="640080" y="1691640"/>
-            <a:ext cx="10515600" cy="457200"/>
+            <a:ext cx="10515600" cy="400000"/>
           </a:xfrm>
           <a:prstGeom prst="rect">
             <a:avLst/>
@@ -6539,38 +9646,750 @@
                 </a:solidFill>
                 <a:latin typeface="Calibri"/>
               </a:rPr>
-              <a:t>Same checkpoint (Deepfakes-trained), same video, different manipulation. In-distribution: both models focus tightly on the face. Cross-manipulation (FaceSwap, never seen): attention collapses off-face or goes diffuse -- neither model falls back to anything sensible.</a:t>
-            </a:r>
-          </a:p>
-        </p:txBody>
-      </p:sp>
-      <p:pic>
-        <p:nvPicPr>
-          <p:cNvPr id="7" name="Picture 6" descr="gradcam_comparison.png"/>
-          <p:cNvPicPr>
-            <a:picLocks noChangeAspect="1"/>
-          </p:cNvPicPr>
-          <p:nvPr/>
-        </p:nvPicPr>
-        <p:blipFill>
-          <a:blip r:embed="rId2"/>
-          <a:stretch>
-            <a:fillRect/>
-          </a:stretch>
-        </p:blipFill>
-        <p:spPr>
-          <a:xfrm>
-            <a:off x="640080" y="2286000"/>
-            <a:ext cx="8686800" cy="4895000"/>
-          </a:xfrm>
-          <a:prstGeom prst="rect">
-            <a:avLst/>
-          </a:prstGeom>
-        </p:spPr>
-      </p:pic>
+              <a:t>One factor changed at a time, 2 seeds each; change = paired difference vs. the reference over the same test videos.</a:t>
+            </a:r>
+          </a:p>
+        </p:txBody>
+      </p:sp>
+      <p:graphicFrame>
+        <p:nvGraphicFramePr>
+          <p:cNvPr id="7" name="Table 6"/>
+          <p:cNvGraphicFramePr>
+            <a:graphicFrameLocks noGrp="1"/>
+          </p:cNvGraphicFramePr>
+          <p:nvPr/>
+        </p:nvGraphicFramePr>
+        <p:xfrm>
+          <a:off x="640080" y="2141640"/>
+          <a:ext cx="10607040" cy="2520000"/>
+        </p:xfrm>
+        <a:graphic>
+          <a:graphicData uri="http://schemas.openxmlformats.org/drawingml/2006/table">
+            <a:tbl>
+              <a:tblPr firstRow="1" bandRow="1">
+                <a:tableStyleId>{5C22544A-7EE6-4342-B048-85BDC9FD1C3A}</a:tableStyleId>
+              </a:tblPr>
+              <a:tblGrid>
+                <a:gridCol w="2926080"/>
+                <a:gridCol w="1828800"/>
+                <a:gridCol w="2011680"/>
+                <a:gridCol w="1828800"/>
+                <a:gridCol w="2011680"/>
+              </a:tblGrid>
+              <a:tr h="420000">
+                <a:tc>
+                  <a:txBody>
+                    <a:bodyPr/>
+                    <a:lstStyle/>
+                    <a:p>
+                      <a:r>
+                        <a:rPr sz="1300" b="1">
+                          <a:solidFill>
+                            <a:srgbClr val="FFFFFF"/>
+                          </a:solidFill>
+                          <a:latin typeface="Calibri"/>
+                        </a:rPr>
+                        <a:t>Variant</a:t>
+                      </a:r>
+                    </a:p>
+                  </a:txBody>
+                  <a:tcPr anchor="ctr">
+                    <a:solidFill>
+                      <a:srgbClr val="0F172A"/>
+                    </a:solidFill>
+                  </a:tcPr>
+                </a:tc>
+                <a:tc>
+                  <a:txBody>
+                    <a:bodyPr/>
+                    <a:lstStyle/>
+                    <a:p>
+                      <a:r>
+                        <a:rPr sz="1300" b="1">
+                          <a:solidFill>
+                            <a:srgbClr val="FFFFFF"/>
+                          </a:solidFill>
+                          <a:latin typeface="Calibri"/>
+                        </a:rPr>
+                        <a:t>DF → FS</a:t>
+                      </a:r>
+                    </a:p>
+                  </a:txBody>
+                  <a:tcPr anchor="ctr">
+                    <a:solidFill>
+                      <a:srgbClr val="0F172A"/>
+                    </a:solidFill>
+                  </a:tcPr>
+                </a:tc>
+                <a:tc>
+                  <a:txBody>
+                    <a:bodyPr/>
+                    <a:lstStyle/>
+                    <a:p>
+                      <a:r>
+                        <a:rPr sz="1300" b="1">
+                          <a:solidFill>
+                            <a:srgbClr val="FFFFFF"/>
+                          </a:solidFill>
+                          <a:latin typeface="Calibri"/>
+                        </a:rPr>
+                        <a:t>change</a:t>
+                      </a:r>
+                    </a:p>
+                  </a:txBody>
+                  <a:tcPr anchor="ctr">
+                    <a:solidFill>
+                      <a:srgbClr val="0F172A"/>
+                    </a:solidFill>
+                  </a:tcPr>
+                </a:tc>
+                <a:tc>
+                  <a:txBody>
+                    <a:bodyPr/>
+                    <a:lstStyle/>
+                    <a:p>
+                      <a:r>
+                        <a:rPr sz="1300" b="1">
+                          <a:solidFill>
+                            <a:srgbClr val="FFFFFF"/>
+                          </a:solidFill>
+                          <a:latin typeface="Calibri"/>
+                        </a:rPr>
+                        <a:t>FS → NT</a:t>
+                      </a:r>
+                    </a:p>
+                  </a:txBody>
+                  <a:tcPr anchor="ctr">
+                    <a:solidFill>
+                      <a:srgbClr val="0F172A"/>
+                    </a:solidFill>
+                  </a:tcPr>
+                </a:tc>
+                <a:tc>
+                  <a:txBody>
+                    <a:bodyPr/>
+                    <a:lstStyle/>
+                    <a:p>
+                      <a:r>
+                        <a:rPr sz="1300" b="1">
+                          <a:solidFill>
+                            <a:srgbClr val="FFFFFF"/>
+                          </a:solidFill>
+                          <a:latin typeface="Calibri"/>
+                        </a:rPr>
+                        <a:t>change</a:t>
+                      </a:r>
+                    </a:p>
+                  </a:txBody>
+                  <a:tcPr anchor="ctr">
+                    <a:solidFill>
+                      <a:srgbClr val="0F172A"/>
+                    </a:solidFill>
+                  </a:tcPr>
+                </a:tc>
+              </a:tr>
+              <a:tr h="420000">
+                <a:tc>
+                  <a:txBody>
+                    <a:bodyPr/>
+                    <a:lstStyle/>
+                    <a:p>
+                      <a:r>
+                        <a:rPr sz="1250" b="1">
+                          <a:solidFill>
+                            <a:srgbClr val="1A202C"/>
+                          </a:solidFill>
+                          <a:latin typeface="Calibri"/>
+                        </a:rPr>
+                        <a:t>Reference (3 seeds)</a:t>
+                      </a:r>
+                    </a:p>
+                  </a:txBody>
+                  <a:tcPr anchor="ctr">
+                    <a:solidFill>
+                      <a:srgbClr val="FFFFFF"/>
+                    </a:solidFill>
+                  </a:tcPr>
+                </a:tc>
+                <a:tc>
+                  <a:txBody>
+                    <a:bodyPr/>
+                    <a:lstStyle/>
+                    <a:p>
+                      <a:r>
+                        <a:rPr sz="1250" b="0">
+                          <a:solidFill>
+                            <a:srgbClr val="1A202C"/>
+                          </a:solidFill>
+                          <a:latin typeface="Calibri"/>
+                        </a:rPr>
+                        <a:t>0.258</a:t>
+                      </a:r>
+                    </a:p>
+                  </a:txBody>
+                  <a:tcPr anchor="ctr">
+                    <a:solidFill>
+                      <a:srgbClr val="FFFFFF"/>
+                    </a:solidFill>
+                  </a:tcPr>
+                </a:tc>
+                <a:tc>
+                  <a:txBody>
+                    <a:bodyPr/>
+                    <a:lstStyle/>
+                    <a:p>
+                      <a:r>
+                        <a:rPr sz="1250" b="0">
+                          <a:solidFill>
+                            <a:srgbClr val="1A202C"/>
+                          </a:solidFill>
+                          <a:latin typeface="Calibri"/>
+                        </a:rPr>
+                        <a:t>—</a:t>
+                      </a:r>
+                    </a:p>
+                  </a:txBody>
+                  <a:tcPr anchor="ctr">
+                    <a:solidFill>
+                      <a:srgbClr val="FFFFFF"/>
+                    </a:solidFill>
+                  </a:tcPr>
+                </a:tc>
+                <a:tc>
+                  <a:txBody>
+                    <a:bodyPr/>
+                    <a:lstStyle/>
+                    <a:p>
+                      <a:r>
+                        <a:rPr sz="1250" b="0">
+                          <a:solidFill>
+                            <a:srgbClr val="1A202C"/>
+                          </a:solidFill>
+                          <a:latin typeface="Calibri"/>
+                        </a:rPr>
+                        <a:t>0.428</a:t>
+                      </a:r>
+                    </a:p>
+                  </a:txBody>
+                  <a:tcPr anchor="ctr">
+                    <a:solidFill>
+                      <a:srgbClr val="FFFFFF"/>
+                    </a:solidFill>
+                  </a:tcPr>
+                </a:tc>
+                <a:tc>
+                  <a:txBody>
+                    <a:bodyPr/>
+                    <a:lstStyle/>
+                    <a:p>
+                      <a:r>
+                        <a:rPr sz="1250" b="0">
+                          <a:solidFill>
+                            <a:srgbClr val="1A202C"/>
+                          </a:solidFill>
+                          <a:latin typeface="Calibri"/>
+                        </a:rPr>
+                        <a:t>—</a:t>
+                      </a:r>
+                    </a:p>
+                  </a:txBody>
+                  <a:tcPr anchor="ctr">
+                    <a:solidFill>
+                      <a:srgbClr val="FFFFFF"/>
+                    </a:solidFill>
+                  </a:tcPr>
+                </a:tc>
+              </a:tr>
+              <a:tr h="420000">
+                <a:tc>
+                  <a:txBody>
+                    <a:bodyPr/>
+                    <a:lstStyle/>
+                    <a:p>
+                      <a:r>
+                        <a:rPr sz="1250" b="1">
+                          <a:solidFill>
+                            <a:srgbClr val="1A202C"/>
+                          </a:solidFill>
+                          <a:latin typeface="Calibri"/>
+                        </a:rPr>
+                        <a:t>JPEG quality 95</a:t>
+                      </a:r>
+                    </a:p>
+                  </a:txBody>
+                  <a:tcPr anchor="ctr">
+                    <a:solidFill>
+                      <a:srgbClr val="F1F5F9"/>
+                    </a:solidFill>
+                  </a:tcPr>
+                </a:tc>
+                <a:tc>
+                  <a:txBody>
+                    <a:bodyPr/>
+                    <a:lstStyle/>
+                    <a:p>
+                      <a:r>
+                        <a:rPr sz="1250" b="0">
+                          <a:solidFill>
+                            <a:srgbClr val="1A202C"/>
+                          </a:solidFill>
+                          <a:latin typeface="Calibri"/>
+                        </a:rPr>
+                        <a:t>0.286</a:t>
+                      </a:r>
+                    </a:p>
+                  </a:txBody>
+                  <a:tcPr anchor="ctr">
+                    <a:solidFill>
+                      <a:srgbClr val="F1F5F9"/>
+                    </a:solidFill>
+                  </a:tcPr>
+                </a:tc>
+                <a:tc>
+                  <a:txBody>
+                    <a:bodyPr/>
+                    <a:lstStyle/>
+                    <a:p>
+                      <a:r>
+                        <a:rPr sz="1250" b="0">
+                          <a:solidFill>
+                            <a:srgbClr val="1A202C"/>
+                          </a:solidFill>
+                          <a:latin typeface="Calibri"/>
+                        </a:rPr>
+                        <a:t>+0.028</a:t>
+                      </a:r>
+                    </a:p>
+                  </a:txBody>
+                  <a:tcPr anchor="ctr">
+                    <a:solidFill>
+                      <a:srgbClr val="F1F5F9"/>
+                    </a:solidFill>
+                  </a:tcPr>
+                </a:tc>
+                <a:tc>
+                  <a:txBody>
+                    <a:bodyPr/>
+                    <a:lstStyle/>
+                    <a:p>
+                      <a:r>
+                        <a:rPr sz="1250" b="0">
+                          <a:solidFill>
+                            <a:srgbClr val="1A202C"/>
+                          </a:solidFill>
+                          <a:latin typeface="Calibri"/>
+                        </a:rPr>
+                        <a:t>0.442</a:t>
+                      </a:r>
+                    </a:p>
+                  </a:txBody>
+                  <a:tcPr anchor="ctr">
+                    <a:solidFill>
+                      <a:srgbClr val="F1F5F9"/>
+                    </a:solidFill>
+                  </a:tcPr>
+                </a:tc>
+                <a:tc>
+                  <a:txBody>
+                    <a:bodyPr/>
+                    <a:lstStyle/>
+                    <a:p>
+                      <a:r>
+                        <a:rPr sz="1250" b="0">
+                          <a:solidFill>
+                            <a:srgbClr val="1A202C"/>
+                          </a:solidFill>
+                          <a:latin typeface="Calibri"/>
+                        </a:rPr>
+                        <a:t>+0.013</a:t>
+                      </a:r>
+                    </a:p>
+                  </a:txBody>
+                  <a:tcPr anchor="ctr">
+                    <a:solidFill>
+                      <a:srgbClr val="F1F5F9"/>
+                    </a:solidFill>
+                  </a:tcPr>
+                </a:tc>
+              </a:tr>
+              <a:tr h="420000">
+                <a:tc>
+                  <a:txBody>
+                    <a:bodyPr/>
+                    <a:lstStyle/>
+                    <a:p>
+                      <a:r>
+                        <a:rPr sz="1250" b="1">
+                          <a:solidFill>
+                            <a:srgbClr val="1A202C"/>
+                          </a:solidFill>
+                          <a:latin typeface="Calibri"/>
+                        </a:rPr>
+                        <a:t>JPEG quality 75</a:t>
+                      </a:r>
+                    </a:p>
+                  </a:txBody>
+                  <a:tcPr anchor="ctr">
+                    <a:solidFill>
+                      <a:srgbClr val="FFFFFF"/>
+                    </a:solidFill>
+                  </a:tcPr>
+                </a:tc>
+                <a:tc>
+                  <a:txBody>
+                    <a:bodyPr/>
+                    <a:lstStyle/>
+                    <a:p>
+                      <a:r>
+                        <a:rPr sz="1250" b="0">
+                          <a:solidFill>
+                            <a:srgbClr val="1A202C"/>
+                          </a:solidFill>
+                          <a:latin typeface="Calibri"/>
+                        </a:rPr>
+                        <a:t>0.290</a:t>
+                      </a:r>
+                    </a:p>
+                  </a:txBody>
+                  <a:tcPr anchor="ctr">
+                    <a:solidFill>
+                      <a:srgbClr val="FFFFFF"/>
+                    </a:solidFill>
+                  </a:tcPr>
+                </a:tc>
+                <a:tc>
+                  <a:txBody>
+                    <a:bodyPr/>
+                    <a:lstStyle/>
+                    <a:p>
+                      <a:r>
+                        <a:rPr sz="1250" b="0">
+                          <a:solidFill>
+                            <a:srgbClr val="1A202C"/>
+                          </a:solidFill>
+                          <a:latin typeface="Calibri"/>
+                        </a:rPr>
+                        <a:t>+0.032</a:t>
+                      </a:r>
+                    </a:p>
+                  </a:txBody>
+                  <a:tcPr anchor="ctr">
+                    <a:solidFill>
+                      <a:srgbClr val="FFFFFF"/>
+                    </a:solidFill>
+                  </a:tcPr>
+                </a:tc>
+                <a:tc>
+                  <a:txBody>
+                    <a:bodyPr/>
+                    <a:lstStyle/>
+                    <a:p>
+                      <a:r>
+                        <a:rPr sz="1250" b="0">
+                          <a:solidFill>
+                            <a:srgbClr val="1A202C"/>
+                          </a:solidFill>
+                          <a:latin typeface="Calibri"/>
+                        </a:rPr>
+                        <a:t>0.472</a:t>
+                      </a:r>
+                    </a:p>
+                  </a:txBody>
+                  <a:tcPr anchor="ctr">
+                    <a:solidFill>
+                      <a:srgbClr val="FFFFFF"/>
+                    </a:solidFill>
+                  </a:tcPr>
+                </a:tc>
+                <a:tc>
+                  <a:txBody>
+                    <a:bodyPr/>
+                    <a:lstStyle/>
+                    <a:p>
+                      <a:r>
+                        <a:rPr sz="1250" b="0">
+                          <a:solidFill>
+                            <a:srgbClr val="1A202C"/>
+                          </a:solidFill>
+                          <a:latin typeface="Calibri"/>
+                        </a:rPr>
+                        <a:t>+0.044</a:t>
+                      </a:r>
+                    </a:p>
+                  </a:txBody>
+                  <a:tcPr anchor="ctr">
+                    <a:solidFill>
+                      <a:srgbClr val="FFFFFF"/>
+                    </a:solidFill>
+                  </a:tcPr>
+                </a:tc>
+              </a:tr>
+              <a:tr h="420000">
+                <a:tc>
+                  <a:txBody>
+                    <a:bodyPr/>
+                    <a:lstStyle/>
+                    <a:p>
+                      <a:r>
+                        <a:rPr sz="1250" b="1">
+                          <a:solidFill>
+                            <a:srgbClr val="1A202C"/>
+                          </a:solidFill>
+                          <a:latin typeface="Calibri"/>
+                        </a:rPr>
+                        <a:t>10 frames per video</a:t>
+                      </a:r>
+                    </a:p>
+                  </a:txBody>
+                  <a:tcPr anchor="ctr">
+                    <a:solidFill>
+                      <a:srgbClr val="F1F5F9"/>
+                    </a:solidFill>
+                  </a:tcPr>
+                </a:tc>
+                <a:tc>
+                  <a:txBody>
+                    <a:bodyPr/>
+                    <a:lstStyle/>
+                    <a:p>
+                      <a:r>
+                        <a:rPr sz="1250" b="0">
+                          <a:solidFill>
+                            <a:srgbClr val="1A202C"/>
+                          </a:solidFill>
+                          <a:latin typeface="Calibri"/>
+                        </a:rPr>
+                        <a:t>0.271</a:t>
+                      </a:r>
+                    </a:p>
+                  </a:txBody>
+                  <a:tcPr anchor="ctr">
+                    <a:solidFill>
+                      <a:srgbClr val="F1F5F9"/>
+                    </a:solidFill>
+                  </a:tcPr>
+                </a:tc>
+                <a:tc>
+                  <a:txBody>
+                    <a:bodyPr/>
+                    <a:lstStyle/>
+                    <a:p>
+                      <a:r>
+                        <a:rPr sz="1250" b="0">
+                          <a:solidFill>
+                            <a:srgbClr val="1A202C"/>
+                          </a:solidFill>
+                          <a:latin typeface="Calibri"/>
+                        </a:rPr>
+                        <a:t>+0.013</a:t>
+                      </a:r>
+                    </a:p>
+                  </a:txBody>
+                  <a:tcPr anchor="ctr">
+                    <a:solidFill>
+                      <a:srgbClr val="F1F5F9"/>
+                    </a:solidFill>
+                  </a:tcPr>
+                </a:tc>
+                <a:tc>
+                  <a:txBody>
+                    <a:bodyPr/>
+                    <a:lstStyle/>
+                    <a:p>
+                      <a:r>
+                        <a:rPr sz="1250" b="0">
+                          <a:solidFill>
+                            <a:srgbClr val="1A202C"/>
+                          </a:solidFill>
+                          <a:latin typeface="Calibri"/>
+                        </a:rPr>
+                        <a:t>0.422</a:t>
+                      </a:r>
+                    </a:p>
+                  </a:txBody>
+                  <a:tcPr anchor="ctr">
+                    <a:solidFill>
+                      <a:srgbClr val="F1F5F9"/>
+                    </a:solidFill>
+                  </a:tcPr>
+                </a:tc>
+                <a:tc>
+                  <a:txBody>
+                    <a:bodyPr/>
+                    <a:lstStyle/>
+                    <a:p>
+                      <a:r>
+                        <a:rPr sz="1250" b="0">
+                          <a:solidFill>
+                            <a:srgbClr val="1A202C"/>
+                          </a:solidFill>
+                          <a:latin typeface="Calibri"/>
+                        </a:rPr>
+                        <a:t>-0.006</a:t>
+                      </a:r>
+                    </a:p>
+                  </a:txBody>
+                  <a:tcPr anchor="ctr">
+                    <a:solidFill>
+                      <a:srgbClr val="F1F5F9"/>
+                    </a:solidFill>
+                  </a:tcPr>
+                </a:tc>
+              </a:tr>
+              <a:tr h="420000">
+                <a:tc>
+                  <a:txBody>
+                    <a:bodyPr/>
+                    <a:lstStyle/>
+                    <a:p>
+                      <a:r>
+                        <a:rPr sz="1250" b="1">
+                          <a:solidFill>
+                            <a:srgbClr val="1A202C"/>
+                          </a:solidFill>
+                          <a:latin typeface="Calibri"/>
+                        </a:rPr>
+                        <a:t>Tight 1.0× crop</a:t>
+                      </a:r>
+                    </a:p>
+                  </a:txBody>
+                  <a:tcPr anchor="ctr">
+                    <a:solidFill>
+                      <a:srgbClr val="FFFFFF"/>
+                    </a:solidFill>
+                  </a:tcPr>
+                </a:tc>
+                <a:tc>
+                  <a:txBody>
+                    <a:bodyPr/>
+                    <a:lstStyle/>
+                    <a:p>
+                      <a:r>
+                        <a:rPr sz="1250" b="0">
+                          <a:solidFill>
+                            <a:srgbClr val="1A202C"/>
+                          </a:solidFill>
+                          <a:latin typeface="Calibri"/>
+                        </a:rPr>
+                        <a:t>0.259</a:t>
+                      </a:r>
+                    </a:p>
+                  </a:txBody>
+                  <a:tcPr anchor="ctr">
+                    <a:solidFill>
+                      <a:srgbClr val="FFFFFF"/>
+                    </a:solidFill>
+                  </a:tcPr>
+                </a:tc>
+                <a:tc>
+                  <a:txBody>
+                    <a:bodyPr/>
+                    <a:lstStyle/>
+                    <a:p>
+                      <a:r>
+                        <a:rPr sz="1250" b="0">
+                          <a:solidFill>
+                            <a:srgbClr val="1A202C"/>
+                          </a:solidFill>
+                          <a:latin typeface="Calibri"/>
+                        </a:rPr>
+                        <a:t>+0.001</a:t>
+                      </a:r>
+                    </a:p>
+                  </a:txBody>
+                  <a:tcPr anchor="ctr">
+                    <a:solidFill>
+                      <a:srgbClr val="FFFFFF"/>
+                    </a:solidFill>
+                  </a:tcPr>
+                </a:tc>
+                <a:tc>
+                  <a:txBody>
+                    <a:bodyPr/>
+                    <a:lstStyle/>
+                    <a:p>
+                      <a:r>
+                        <a:rPr sz="1250" b="0">
+                          <a:solidFill>
+                            <a:srgbClr val="1A202C"/>
+                          </a:solidFill>
+                          <a:latin typeface="Calibri"/>
+                        </a:rPr>
+                        <a:t>0.470</a:t>
+                      </a:r>
+                    </a:p>
+                  </a:txBody>
+                  <a:tcPr anchor="ctr">
+                    <a:solidFill>
+                      <a:srgbClr val="FFFFFF"/>
+                    </a:solidFill>
+                  </a:tcPr>
+                </a:tc>
+                <a:tc>
+                  <a:txBody>
+                    <a:bodyPr/>
+                    <a:lstStyle/>
+                    <a:p>
+                      <a:r>
+                        <a:rPr sz="1250" b="0">
+                          <a:solidFill>
+                            <a:srgbClr val="1A202C"/>
+                          </a:solidFill>
+                          <a:latin typeface="Calibri"/>
+                        </a:rPr>
+                        <a:t>+0.042</a:t>
+                      </a:r>
+                    </a:p>
+                  </a:txBody>
+                  <a:tcPr anchor="ctr">
+                    <a:solidFill>
+                      <a:srgbClr val="FFFFFF"/>
+                    </a:solidFill>
+                  </a:tcPr>
+                </a:tc>
+              </a:tr>
+            </a:tbl>
+          </a:graphicData>
+        </a:graphic>
+      </p:graphicFrame>
       <p:sp>
         <p:nvSpPr>
           <p:cNvPr id="8" name="TextBox 7"/>
+          <p:cNvSpPr txBox="1"/>
+          <p:nvPr/>
+        </p:nvSpPr>
+        <p:spPr>
+          <a:xfrm>
+            <a:off x="640080" y="4841640"/>
+            <a:ext cx="10852800" cy="600000"/>
+          </a:xfrm>
+          <a:prstGeom prst="rect">
+            <a:avLst/>
+          </a:prstGeom>
+          <a:noFill/>
+        </p:spPr>
+        <p:txBody>
+          <a:bodyPr wrap="square">
+            <a:spAutoFit/>
+          </a:bodyPr>
+          <a:lstStyle/>
+          <a:p>
+            <a:pPr algn="l"/>
+            <a:r>
+              <a:rPr sz="1200" b="0">
+                <a:solidFill>
+                  <a:srgbClr val="475569"/>
+                </a:solidFill>
+                <a:latin typeface="Calibri"/>
+              </a:rPr>
+              <a:t>DF → FS stays at ~0.26 under every variant. Predictions recorded beforehand: held for JPEG 95 and 10 frames, partly missed for JPEG 75, failed for the tight crop.</a:t>
+            </a:r>
+          </a:p>
+        </p:txBody>
+      </p:sp>
+      <p:sp>
+        <p:nvSpPr>
+          <p:cNvPr id="9" name="TextBox 8"/>
           <p:cNvSpPr txBox="1"/>
           <p:nvPr/>
         </p:nvSpPr>
@@ -6598,14 +10417,14 @@
                 </a:solidFill>
                 <a:latin typeface="Calibri"/>
               </a:rPr>
-              <a:t>Deepfake Detection — XceptionNet vs. CNN-ViT (23AID205)</a:t>
-            </a:r>
-          </a:p>
-        </p:txBody>
-      </p:sp>
-      <p:sp>
-        <p:nvSpPr>
-          <p:cNvPr id="9" name="TextBox 8"/>
+              <a:t>Deepfake Detection — Inverted Transfer (23AID205)</a:t>
+            </a:r>
+          </a:p>
+        </p:txBody>
+      </p:sp>
+      <p:sp>
+        <p:nvSpPr>
+          <p:cNvPr id="10" name="TextBox 9"/>
           <p:cNvSpPr txBox="1"/>
           <p:nvPr/>
         </p:nvSpPr>
@@ -6633,7 +10452,7 @@
                 </a:solidFill>
                 <a:latin typeface="Calibri"/>
               </a:rPr>
-              <a:t>6/10</a:t>
+              <a:t>6/14</a:t>
             </a:r>
           </a:p>
         </p:txBody>
@@ -6730,7 +10549,7 @@
                 </a:solidFill>
                 <a:latin typeface="Calibri"/>
               </a:rPr>
-              <a:t>RULING OUT THE BORING EXPLANATION</a:t>
+              <a:t>PHASE 3 · MECHANISM</a:t>
             </a:r>
           </a:p>
         </p:txBody>
@@ -6765,7 +10584,7 @@
                 </a:solidFill>
                 <a:latin typeface="Calibri"/>
               </a:rPr>
-              <a:t>Phase 0: Hygiene Fixes + Confound Audit</a:t>
+              <a:t>Fakes Differ from Real Faces in Sharpness</a:t>
             </a:r>
           </a:p>
         </p:txBody>
@@ -6822,119 +10641,419 @@
         </p:nvSpPr>
         <p:spPr>
           <a:xfrm>
-            <a:off x="640080" y="1783080"/>
-            <a:ext cx="10852800" cy="4374920"/>
-          </a:xfrm>
-          <a:prstGeom prst="rect">
-            <a:avLst/>
-          </a:prstGeom>
-          <a:noFill/>
-        </p:spPr>
-        <p:txBody>
-          <a:bodyPr wrap="square">
-            <a:spAutoFit/>
-          </a:bodyPr>
-          <a:lstStyle/>
-          <a:p>
-            <a:pPr>
-              <a:lnSpc>
-                <a:spcPct val="112000"/>
-              </a:lnSpc>
-              <a:spcAft>
-                <a:spcPts val="1400"/>
-              </a:spcAft>
-            </a:pPr>
-            <a:r>
-              <a:rPr sz="1450" b="0">
-                <a:solidFill>
-                  <a:srgbClr val="1A202C"/>
-                </a:solidFill>
-                <a:latin typeface="Calibri"/>
-              </a:rPr>
-              <a:t>▸  Before treating the below-chance scores as a real finding, fixed two code issues (a training-resume bug that was silently discarding run history; checkpoint files that had been accidentally committed to version control) and audited the pipeline for anything that could trivially cause this.</a:t>
-            </a:r>
-          </a:p>
-          <a:p>
-            <a:pPr>
-              <a:lnSpc>
-                <a:spcPct val="112000"/>
-              </a:lnSpc>
-              <a:spcAft>
-                <a:spcPts val="1400"/>
-              </a:spcAft>
-            </a:pPr>
-            <a:r>
-              <a:rPr sz="1450" b="0">
-                <a:solidFill>
-                  <a:srgbClr val="1A202C"/>
-                </a:solidFill>
-                <a:latin typeface="Calibri"/>
-              </a:rPr>
-              <a:t>▸  Label/split integrity -- 17/17 checks pass: AUC orientation is correct and not silently invertible; train/val/test are cleanly video-disjoint.</a:t>
-            </a:r>
-          </a:p>
-          <a:p>
-            <a:pPr>
-              <a:lnSpc>
-                <a:spcPct val="112000"/>
-              </a:lnSpc>
-              <a:spcAft>
-                <a:spcPts val="1400"/>
-              </a:spcAft>
-            </a:pPr>
-            <a:r>
-              <a:rPr sz="1450" b="0">
-                <a:solidFill>
-                  <a:srgbClr val="1A202C"/>
-                </a:solidFill>
-                <a:latin typeface="Calibri"/>
-              </a:rPr>
-              <a:t>▸  Encoding audit (60 videos/class via ffprobe) -- codec, profile, pixel format, and compression setting (crf=23.0) are bit-exact identical across real and all 4 manipulation methods. No confound.</a:t>
-            </a:r>
-          </a:p>
-          <a:p>
-            <a:pPr>
-              <a:lnSpc>
-                <a:spcPct val="112000"/>
-              </a:lnSpc>
-              <a:spcAft>
-                <a:spcPts val="1400"/>
-              </a:spcAft>
-            </a:pPr>
-            <a:r>
-              <a:rPr sz="1450" b="0">
-                <a:solidFill>
-                  <a:srgbClr val="1A202C"/>
-                </a:solidFill>
-                <a:latin typeface="Calibri"/>
-              </a:rPr>
-              <a:t>▸  Crop audit -- face-detection failure rate negligible (≤0.05%) everywhere; JPEG re-compression is bit-identical across classes. No confound.</a:t>
-            </a:r>
-          </a:p>
-          <a:p>
-            <a:pPr>
-              <a:lnSpc>
-                <a:spcPct val="112000"/>
-              </a:lnSpc>
-              <a:spcAft>
-                <a:spcPts val="1400"/>
-              </a:spcAft>
-            </a:pPr>
-            <a:r>
-              <a:rPr sz="1450" b="0">
-                <a:solidFill>
-                  <a:srgbClr val="1A202C"/>
-                </a:solidFill>
-                <a:latin typeface="Calibri"/>
-              </a:rPr>
-              <a:t>▸  GATE 0 conclusion: no confirmed pipeline artifact explains the below-chance scores. This is very likely a real effect, not a bug -- worth explaining and fixing, not dismissing.</a:t>
-            </a:r>
-          </a:p>
-        </p:txBody>
-      </p:sp>
-      <p:sp>
-        <p:nvSpPr>
-          <p:cNvPr id="7" name="TextBox 6"/>
+            <a:off x="640080" y="1691640"/>
+            <a:ext cx="10515600" cy="457200"/>
+          </a:xfrm>
+          <a:prstGeom prst="rect">
+            <a:avLst/>
+          </a:prstGeom>
+          <a:noFill/>
+        </p:spPr>
+        <p:txBody>
+          <a:bodyPr wrap="square">
+            <a:spAutoFit/>
+          </a:bodyPr>
+          <a:lstStyle/>
+          <a:p>
+            <a:pPr algn="l"/>
+            <a:r>
+              <a:rPr sz="1350" b="0">
+                <a:solidFill>
+                  <a:srgbClr val="475569"/>
+                </a:solidFill>
+                <a:latin typeface="Calibri"/>
+              </a:rPr>
+              <a:t>High-frequency image energy, each method vs. real faces (Cohen's d, 95% CI), measured on two independent crop sets.</a:t>
+            </a:r>
+          </a:p>
+        </p:txBody>
+      </p:sp>
+      <p:pic>
+        <p:nvPicPr>
+          <p:cNvPr id="7" name="Picture 6" descr="F3_hf_effect_sizes.png"/>
+          <p:cNvPicPr>
+            <a:picLocks noChangeAspect="1"/>
+          </p:cNvPicPr>
+          <p:nvPr/>
+        </p:nvPicPr>
+        <p:blipFill>
+          <a:blip r:embed="rId2"/>
+          <a:stretch>
+            <a:fillRect/>
+          </a:stretch>
+        </p:blipFill>
+        <p:spPr>
+          <a:xfrm>
+            <a:off x="640080" y="2286000"/>
+            <a:ext cx="5430438" cy="3840480"/>
+          </a:xfrm>
+          <a:prstGeom prst="rect">
+            <a:avLst/>
+          </a:prstGeom>
+        </p:spPr>
+      </p:pic>
+      <p:sp>
+        <p:nvSpPr>
+          <p:cNvPr id="8" name="Rectangle 7"/>
+          <p:cNvSpPr/>
+          <p:nvPr/>
+        </p:nvSpPr>
+        <p:spPr>
+          <a:xfrm>
+            <a:off x="6344838" y="2286000"/>
+            <a:ext cx="5206777" cy="4114800"/>
+          </a:xfrm>
+          <a:prstGeom prst="rect">
+            <a:avLst/>
+          </a:prstGeom>
+          <a:solidFill>
+            <a:srgbClr val="F1F5F9"/>
+          </a:solidFill>
+          <a:ln>
+            <a:noFill/>
+          </a:ln>
+          <a:effectLst/>
+        </p:spPr>
+        <p:style>
+          <a:lnRef idx="1">
+            <a:schemeClr val="accent1"/>
+          </a:lnRef>
+          <a:fillRef idx="3">
+            <a:schemeClr val="accent1"/>
+          </a:fillRef>
+          <a:effectRef idx="2">
+            <a:schemeClr val="accent1"/>
+          </a:effectRef>
+          <a:fontRef idx="minor">
+            <a:schemeClr val="lt1"/>
+          </a:fontRef>
+        </p:style>
+        <p:txBody>
+          <a:bodyPr rtlCol="0" anchor="ctr"/>
+          <a:lstStyle/>
+          <a:p>
+            <a:pPr algn="ctr"/>
+          </a:p>
+        </p:txBody>
+      </p:sp>
+      <p:sp>
+        <p:nvSpPr>
+          <p:cNvPr id="9" name="TextBox 8"/>
+          <p:cNvSpPr txBox="1"/>
+          <p:nvPr/>
+        </p:nvSpPr>
+        <p:spPr>
+          <a:xfrm>
+            <a:off x="6573438" y="2466000"/>
+            <a:ext cx="4749577" cy="320040"/>
+          </a:xfrm>
+          <a:prstGeom prst="rect">
+            <a:avLst/>
+          </a:prstGeom>
+          <a:noFill/>
+        </p:spPr>
+        <p:txBody>
+          <a:bodyPr wrap="square">
+            <a:spAutoFit/>
+          </a:bodyPr>
+          <a:lstStyle/>
+          <a:p>
+            <a:pPr algn="l"/>
+            <a:r>
+              <a:rPr sz="1100" b="1">
+                <a:solidFill>
+                  <a:srgbClr val="0E7490"/>
+                </a:solidFill>
+                <a:latin typeface="Calibri"/>
+              </a:rPr>
+              <a:t>EFFECT SIZE (ORIGINAL CROPS)</a:t>
+            </a:r>
+          </a:p>
+        </p:txBody>
+      </p:sp>
+      <p:sp>
+        <p:nvSpPr>
+          <p:cNvPr id="10" name="TextBox 9"/>
+          <p:cNvSpPr txBox="1"/>
+          <p:nvPr/>
+        </p:nvSpPr>
+        <p:spPr>
+          <a:xfrm>
+            <a:off x="6573438" y="2786000"/>
+            <a:ext cx="4749577" cy="365760"/>
+          </a:xfrm>
+          <a:prstGeom prst="rect">
+            <a:avLst/>
+          </a:prstGeom>
+          <a:noFill/>
+        </p:spPr>
+        <p:txBody>
+          <a:bodyPr wrap="square">
+            <a:spAutoFit/>
+          </a:bodyPr>
+          <a:lstStyle/>
+          <a:p>
+            <a:pPr algn="l"/>
+            <a:r>
+              <a:rPr sz="2200" b="1">
+                <a:solidFill>
+                  <a:srgbClr val="0F172A"/>
+                </a:solidFill>
+                <a:latin typeface="Calibri"/>
+              </a:rPr>
+              <a:t>-0.48</a:t>
+            </a:r>
+          </a:p>
+        </p:txBody>
+      </p:sp>
+      <p:sp>
+        <p:nvSpPr>
+          <p:cNvPr id="11" name="TextBox 10"/>
+          <p:cNvSpPr txBox="1"/>
+          <p:nvPr/>
+        </p:nvSpPr>
+        <p:spPr>
+          <a:xfrm>
+            <a:off x="6573438" y="3126000"/>
+            <a:ext cx="4749577" cy="320040"/>
+          </a:xfrm>
+          <a:prstGeom prst="rect">
+            <a:avLst/>
+          </a:prstGeom>
+          <a:noFill/>
+        </p:spPr>
+        <p:txBody>
+          <a:bodyPr wrap="square">
+            <a:spAutoFit/>
+          </a:bodyPr>
+          <a:lstStyle/>
+          <a:p>
+            <a:pPr algn="l"/>
+            <a:r>
+              <a:rPr sz="1050" b="0">
+                <a:solidFill>
+                  <a:srgbClr val="475569"/>
+                </a:solidFill>
+                <a:latin typeface="Calibri"/>
+              </a:rPr>
+              <a:t>Deepfakes: blurrier than real</a:t>
+            </a:r>
+          </a:p>
+        </p:txBody>
+      </p:sp>
+      <p:sp>
+        <p:nvSpPr>
+          <p:cNvPr id="12" name="TextBox 11"/>
+          <p:cNvSpPr txBox="1"/>
+          <p:nvPr/>
+        </p:nvSpPr>
+        <p:spPr>
+          <a:xfrm>
+            <a:off x="6573438" y="3689700"/>
+            <a:ext cx="4749577" cy="365760"/>
+          </a:xfrm>
+          <a:prstGeom prst="rect">
+            <a:avLst/>
+          </a:prstGeom>
+          <a:noFill/>
+        </p:spPr>
+        <p:txBody>
+          <a:bodyPr wrap="square">
+            <a:spAutoFit/>
+          </a:bodyPr>
+          <a:lstStyle/>
+          <a:p>
+            <a:pPr algn="l"/>
+            <a:r>
+              <a:rPr sz="2200" b="1">
+                <a:solidFill>
+                  <a:srgbClr val="0F172A"/>
+                </a:solidFill>
+                <a:latin typeface="Calibri"/>
+              </a:rPr>
+              <a:t>-0.39</a:t>
+            </a:r>
+          </a:p>
+        </p:txBody>
+      </p:sp>
+      <p:sp>
+        <p:nvSpPr>
+          <p:cNvPr id="13" name="TextBox 12"/>
+          <p:cNvSpPr txBox="1"/>
+          <p:nvPr/>
+        </p:nvSpPr>
+        <p:spPr>
+          <a:xfrm>
+            <a:off x="6573438" y="4029700"/>
+            <a:ext cx="4749577" cy="320040"/>
+          </a:xfrm>
+          <a:prstGeom prst="rect">
+            <a:avLst/>
+          </a:prstGeom>
+          <a:noFill/>
+        </p:spPr>
+        <p:txBody>
+          <a:bodyPr wrap="square">
+            <a:spAutoFit/>
+          </a:bodyPr>
+          <a:lstStyle/>
+          <a:p>
+            <a:pPr algn="l"/>
+            <a:r>
+              <a:rPr sz="1050" b="0">
+                <a:solidFill>
+                  <a:srgbClr val="475569"/>
+                </a:solidFill>
+                <a:latin typeface="Calibri"/>
+              </a:rPr>
+              <a:t>NeuralTextures: blurrier than real</a:t>
+            </a:r>
+          </a:p>
+        </p:txBody>
+      </p:sp>
+      <p:sp>
+        <p:nvSpPr>
+          <p:cNvPr id="14" name="TextBox 13"/>
+          <p:cNvSpPr txBox="1"/>
+          <p:nvPr/>
+        </p:nvSpPr>
+        <p:spPr>
+          <a:xfrm>
+            <a:off x="6573438" y="4593400"/>
+            <a:ext cx="4749577" cy="365760"/>
+          </a:xfrm>
+          <a:prstGeom prst="rect">
+            <a:avLst/>
+          </a:prstGeom>
+          <a:noFill/>
+        </p:spPr>
+        <p:txBody>
+          <a:bodyPr wrap="square">
+            <a:spAutoFit/>
+          </a:bodyPr>
+          <a:lstStyle/>
+          <a:p>
+            <a:pPr algn="l"/>
+            <a:r>
+              <a:rPr sz="2200" b="1">
+                <a:solidFill>
+                  <a:srgbClr val="0F172A"/>
+                </a:solidFill>
+                <a:latin typeface="Calibri"/>
+              </a:rPr>
+              <a:t>+0.37</a:t>
+            </a:r>
+          </a:p>
+        </p:txBody>
+      </p:sp>
+      <p:sp>
+        <p:nvSpPr>
+          <p:cNvPr id="15" name="TextBox 14"/>
+          <p:cNvSpPr txBox="1"/>
+          <p:nvPr/>
+        </p:nvSpPr>
+        <p:spPr>
+          <a:xfrm>
+            <a:off x="6573438" y="4933400"/>
+            <a:ext cx="4749577" cy="320040"/>
+          </a:xfrm>
+          <a:prstGeom prst="rect">
+            <a:avLst/>
+          </a:prstGeom>
+          <a:noFill/>
+        </p:spPr>
+        <p:txBody>
+          <a:bodyPr wrap="square">
+            <a:spAutoFit/>
+          </a:bodyPr>
+          <a:lstStyle/>
+          <a:p>
+            <a:pPr algn="l"/>
+            <a:r>
+              <a:rPr sz="1050" b="0">
+                <a:solidFill>
+                  <a:srgbClr val="475569"/>
+                </a:solidFill>
+                <a:latin typeface="Calibri"/>
+              </a:rPr>
+              <a:t>FaceSwap: sharper than real</a:t>
+            </a:r>
+          </a:p>
+        </p:txBody>
+      </p:sp>
+      <p:sp>
+        <p:nvSpPr>
+          <p:cNvPr id="16" name="TextBox 15"/>
+          <p:cNvSpPr txBox="1"/>
+          <p:nvPr/>
+        </p:nvSpPr>
+        <p:spPr>
+          <a:xfrm>
+            <a:off x="6573438" y="5497100"/>
+            <a:ext cx="4749577" cy="365760"/>
+          </a:xfrm>
+          <a:prstGeom prst="rect">
+            <a:avLst/>
+          </a:prstGeom>
+          <a:noFill/>
+        </p:spPr>
+        <p:txBody>
+          <a:bodyPr wrap="square">
+            <a:spAutoFit/>
+          </a:bodyPr>
+          <a:lstStyle/>
+          <a:p>
+            <a:pPr algn="l"/>
+            <a:r>
+              <a:rPr sz="2200" b="1">
+                <a:solidFill>
+                  <a:srgbClr val="0F172A"/>
+                </a:solidFill>
+                <a:latin typeface="Calibri"/>
+              </a:rPr>
+              <a:t>-0.01</a:t>
+            </a:r>
+          </a:p>
+        </p:txBody>
+      </p:sp>
+      <p:sp>
+        <p:nvSpPr>
+          <p:cNvPr id="17" name="TextBox 16"/>
+          <p:cNvSpPr txBox="1"/>
+          <p:nvPr/>
+        </p:nvSpPr>
+        <p:spPr>
+          <a:xfrm>
+            <a:off x="6573438" y="5837100"/>
+            <a:ext cx="4749577" cy="320040"/>
+          </a:xfrm>
+          <a:prstGeom prst="rect">
+            <a:avLst/>
+          </a:prstGeom>
+          <a:noFill/>
+        </p:spPr>
+        <p:txBody>
+          <a:bodyPr wrap="square">
+            <a:spAutoFit/>
+          </a:bodyPr>
+          <a:lstStyle/>
+          <a:p>
+            <a:pPr algn="l"/>
+            <a:r>
+              <a:rPr sz="1050" b="0">
+                <a:solidFill>
+                  <a:srgbClr val="475569"/>
+                </a:solidFill>
+                <a:latin typeface="Calibri"/>
+              </a:rPr>
+              <a:t>Face2Face: no difference</a:t>
+            </a:r>
+          </a:p>
+        </p:txBody>
+      </p:sp>
+      <p:sp>
+        <p:nvSpPr>
+          <p:cNvPr id="18" name="TextBox 17"/>
           <p:cNvSpPr txBox="1"/>
           <p:nvPr/>
         </p:nvSpPr>
@@ -6962,14 +11081,14 @@
                 </a:solidFill>
                 <a:latin typeface="Calibri"/>
               </a:rPr>
-              <a:t>Deepfake Detection — XceptionNet vs. CNN-ViT (23AID205)</a:t>
-            </a:r>
-          </a:p>
-        </p:txBody>
-      </p:sp>
-      <p:sp>
-        <p:nvSpPr>
-          <p:cNvPr id="8" name="TextBox 7"/>
+              <a:t>Deepfake Detection — Inverted Transfer (23AID205)</a:t>
+            </a:r>
+          </a:p>
+        </p:txBody>
+      </p:sp>
+      <p:sp>
+        <p:nvSpPr>
+          <p:cNvPr id="19" name="TextBox 18"/>
           <p:cNvSpPr txBox="1"/>
           <p:nvPr/>
         </p:nvSpPr>
@@ -6997,7 +11116,7 @@
                 </a:solidFill>
                 <a:latin typeface="Calibri"/>
               </a:rPr>
-              <a:t>7/10</a:t>
+              <a:t>7/14</a:t>
             </a:r>
           </a:p>
         </p:txBody>
@@ -7094,7 +11213,7 @@
                 </a:solidFill>
                 <a:latin typeface="Calibri"/>
               </a:rPr>
-              <a:t>NEW DIRECTION</a:t>
+              <a:t>PHASE 3 · MECHANISM</a:t>
             </a:r>
           </a:p>
         </p:txBody>
@@ -7129,7 +11248,7 @@
                 </a:solidFill>
                 <a:latin typeface="Calibri"/>
               </a:rPr>
-              <a:t>Research Plan: Why Transfer Inverts, and How to Fix It</a:t>
+              <a:t>The Sharpness Sign Predicts Which Cells Invert</a:t>
             </a:r>
           </a:p>
         </p:txBody>
@@ -7186,138 +11305,419 @@
         </p:nvSpPr>
         <p:spPr>
           <a:xfrm>
-            <a:off x="640080" y="1783080"/>
-            <a:ext cx="10852800" cy="4374920"/>
-          </a:xfrm>
-          <a:prstGeom prst="rect">
-            <a:avLst/>
-          </a:prstGeom>
-          <a:noFill/>
-        </p:spPr>
-        <p:txBody>
-          <a:bodyPr wrap="square">
-            <a:spAutoFit/>
-          </a:bodyPr>
-          <a:lstStyle/>
-          <a:p>
-            <a:pPr>
-              <a:lnSpc>
-                <a:spcPct val="112000"/>
-              </a:lnSpc>
-              <a:spcAft>
-                <a:spcPts val="1400"/>
-              </a:spcAft>
-            </a:pPr>
-            <a:r>
-              <a:rPr sz="1400" b="0">
-                <a:solidFill>
-                  <a:srgbClr val="1A202C"/>
-                </a:solidFill>
-                <a:latin typeface="Calibri"/>
-              </a:rPr>
-              <a:t>▸  Working title: "Inverted Transfer" -- why deepfake detectors score unseen manipulations below chance, and how preprocessing toggles it.</a:t>
-            </a:r>
-          </a:p>
-          <a:p>
-            <a:pPr>
-              <a:lnSpc>
-                <a:spcPct val="112000"/>
-              </a:lnSpc>
-              <a:spcAft>
-                <a:spcPts val="1400"/>
-              </a:spcAft>
-            </a:pPr>
-            <a:r>
-              <a:rPr sz="1400" b="0">
-                <a:solidFill>
-                  <a:srgbClr val="1A202C"/>
-                </a:solidFill>
-                <a:latin typeface="Calibri"/>
-              </a:rPr>
-              <a:t>▸  C1 -- Preprocessing sensitivity: does the below-chance pattern shift, possibly across the 0.5 line, under different face-detector/margin/format/alignment choices alone?</a:t>
-            </a:r>
-          </a:p>
-          <a:p>
-            <a:pPr>
-              <a:lnSpc>
-                <a:spcPct val="112000"/>
-              </a:lnSpc>
-              <a:spcAft>
-                <a:spcPts val="1400"/>
-              </a:spcAft>
-            </a:pPr>
-            <a:r>
-              <a:rPr sz="1400" b="0">
-                <a:solidFill>
-                  <a:srgbClr val="1A202C"/>
-                </a:solidFill>
-                <a:latin typeface="Calibri"/>
-              </a:rPr>
-              <a:t>▸  C2 -- Mechanism: is there a measurable low-level image statistic (sharpness, boundary contrast, JPEG artifacts) whose sign predicts which transfer cells invert?</a:t>
-            </a:r>
-          </a:p>
-          <a:p>
-            <a:pPr>
-              <a:lnSpc>
-                <a:spcPct val="112000"/>
-              </a:lnSpc>
-              <a:spcAft>
-                <a:spcPts val="1400"/>
-              </a:spcAft>
-            </a:pPr>
-            <a:r>
-              <a:rPr sz="1400" b="0">
-                <a:solidFill>
-                  <a:srgbClr val="1A202C"/>
-                </a:solidFill>
-                <a:latin typeface="Calibri"/>
-              </a:rPr>
-              <a:t>▸  C3 -- Intervention: can neutralizing that statistic during training raise the below-chance cells back toward/above 0.5 without a large in-domain accuracy drop?</a:t>
-            </a:r>
-          </a:p>
-          <a:p>
-            <a:pPr>
-              <a:lnSpc>
-                <a:spcPct val="112000"/>
-              </a:lnSpc>
-              <a:spcAft>
-                <a:spcPts val="1400"/>
-              </a:spcAft>
-            </a:pPr>
-            <a:r>
-              <a:rPr sz="1400" b="0">
-                <a:solidFill>
-                  <a:srgbClr val="1A202C"/>
-                </a:solidFill>
-                <a:latin typeface="Calibri"/>
-              </a:rPr>
-              <a:t>▸  C4 -- Architecture independence: the r≈0.94 correlation above is the first evidence for this; testing it across more architectures next.</a:t>
-            </a:r>
-          </a:p>
-          <a:p>
-            <a:pPr>
-              <a:lnSpc>
-                <a:spcPct val="112000"/>
-              </a:lnSpc>
-              <a:spcAft>
-                <a:spcPts val="1400"/>
-              </a:spcAft>
-            </a:pPr>
-            <a:r>
-              <a:rPr sz="1400" b="0">
-                <a:solidFill>
-                  <a:srgbClr val="1A202C"/>
-                </a:solidFill>
-                <a:latin typeface="Calibri"/>
-              </a:rPr>
-              <a:t>▸  Target: a 4-6 page paper, IEEE WIFS/ICASSP-style format.</a:t>
-            </a:r>
-          </a:p>
-        </p:txBody>
-      </p:sp>
-      <p:sp>
-        <p:nvSpPr>
-          <p:cNvPr id="7" name="TextBox 6"/>
+            <a:off x="640080" y="1691640"/>
+            <a:ext cx="10515600" cy="457200"/>
+          </a:xfrm>
+          <a:prstGeom prst="rect">
+            <a:avLst/>
+          </a:prstGeom>
+          <a:noFill/>
+        </p:spPr>
+        <p:txBody>
+          <a:bodyPr wrap="square">
+            <a:spAutoFit/>
+          </a:bodyPr>
+          <a:lstStyle/>
+          <a:p>
+            <a:pPr algn="l"/>
+            <a:r>
+              <a:rPr sz="1350" b="0">
+                <a:solidFill>
+                  <a:srgbClr val="475569"/>
+                </a:solidFill>
+                <a:latin typeface="Calibri"/>
+              </a:rPr>
+              <a:t>Opposite sharpness shifts in the training and test methods predict an inverted (below-chance) transfer.</a:t>
+            </a:r>
+          </a:p>
+        </p:txBody>
+      </p:sp>
+      <p:pic>
+        <p:nvPicPr>
+          <p:cNvPr id="7" name="Picture 6" descr="F4_sign_prediction.png"/>
+          <p:cNvPicPr>
+            <a:picLocks noChangeAspect="1"/>
+          </p:cNvPicPr>
+          <p:nvPr/>
+        </p:nvPicPr>
+        <p:blipFill>
+          <a:blip r:embed="rId2"/>
+          <a:stretch>
+            <a:fillRect/>
+          </a:stretch>
+        </p:blipFill>
+        <p:spPr>
+          <a:xfrm>
+            <a:off x="640080" y="2286000"/>
+            <a:ext cx="4677704" cy="3840480"/>
+          </a:xfrm>
+          <a:prstGeom prst="rect">
+            <a:avLst/>
+          </a:prstGeom>
+        </p:spPr>
+      </p:pic>
+      <p:sp>
+        <p:nvSpPr>
+          <p:cNvPr id="8" name="Rectangle 7"/>
+          <p:cNvSpPr/>
+          <p:nvPr/>
+        </p:nvSpPr>
+        <p:spPr>
+          <a:xfrm>
+            <a:off x="5592104" y="2286000"/>
+            <a:ext cx="5959511" cy="4114800"/>
+          </a:xfrm>
+          <a:prstGeom prst="rect">
+            <a:avLst/>
+          </a:prstGeom>
+          <a:solidFill>
+            <a:srgbClr val="F1F5F9"/>
+          </a:solidFill>
+          <a:ln>
+            <a:noFill/>
+          </a:ln>
+          <a:effectLst/>
+        </p:spPr>
+        <p:style>
+          <a:lnRef idx="1">
+            <a:schemeClr val="accent1"/>
+          </a:lnRef>
+          <a:fillRef idx="3">
+            <a:schemeClr val="accent1"/>
+          </a:fillRef>
+          <a:effectRef idx="2">
+            <a:schemeClr val="accent1"/>
+          </a:effectRef>
+          <a:fontRef idx="minor">
+            <a:schemeClr val="lt1"/>
+          </a:fontRef>
+        </p:style>
+        <p:txBody>
+          <a:bodyPr rtlCol="0" anchor="ctr"/>
+          <a:lstStyle/>
+          <a:p>
+            <a:pPr algn="ctr"/>
+          </a:p>
+        </p:txBody>
+      </p:sp>
+      <p:sp>
+        <p:nvSpPr>
+          <p:cNvPr id="9" name="TextBox 8"/>
+          <p:cNvSpPr txBox="1"/>
+          <p:nvPr/>
+        </p:nvSpPr>
+        <p:spPr>
+          <a:xfrm>
+            <a:off x="5820704" y="2466000"/>
+            <a:ext cx="5502311" cy="320040"/>
+          </a:xfrm>
+          <a:prstGeom prst="rect">
+            <a:avLst/>
+          </a:prstGeom>
+          <a:noFill/>
+        </p:spPr>
+        <p:txBody>
+          <a:bodyPr wrap="square">
+            <a:spAutoFit/>
+          </a:bodyPr>
+          <a:lstStyle/>
+          <a:p>
+            <a:pPr algn="l"/>
+            <a:r>
+              <a:rPr sz="1100" b="1">
+                <a:solidFill>
+                  <a:srgbClr val="0E7490"/>
+                </a:solidFill>
+                <a:latin typeface="Calibri"/>
+              </a:rPr>
+              <a:t>PREDICTION VS. OBSERVED</a:t>
+            </a:r>
+          </a:p>
+        </p:txBody>
+      </p:sp>
+      <p:sp>
+        <p:nvSpPr>
+          <p:cNvPr id="10" name="TextBox 9"/>
+          <p:cNvSpPr txBox="1"/>
+          <p:nvPr/>
+        </p:nvSpPr>
+        <p:spPr>
+          <a:xfrm>
+            <a:off x="5820704" y="2786000"/>
+            <a:ext cx="5502311" cy="365760"/>
+          </a:xfrm>
+          <a:prstGeom prst="rect">
+            <a:avLst/>
+          </a:prstGeom>
+          <a:noFill/>
+        </p:spPr>
+        <p:txBody>
+          <a:bodyPr wrap="square">
+            <a:spAutoFit/>
+          </a:bodyPr>
+          <a:lstStyle/>
+          <a:p>
+            <a:pPr algn="l"/>
+            <a:r>
+              <a:rPr sz="2200" b="1">
+                <a:solidFill>
+                  <a:srgbClr val="0F172A"/>
+                </a:solidFill>
+                <a:latin typeface="Calibri"/>
+              </a:rPr>
+              <a:t>ρ = 0.92</a:t>
+            </a:r>
+          </a:p>
+        </p:txBody>
+      </p:sp>
+      <p:sp>
+        <p:nvSpPr>
+          <p:cNvPr id="11" name="TextBox 10"/>
+          <p:cNvSpPr txBox="1"/>
+          <p:nvPr/>
+        </p:nvSpPr>
+        <p:spPr>
+          <a:xfrm>
+            <a:off x="5820704" y="3126000"/>
+            <a:ext cx="5502311" cy="320040"/>
+          </a:xfrm>
+          <a:prstGeom prst="rect">
+            <a:avLst/>
+          </a:prstGeom>
+          <a:noFill/>
+        </p:spPr>
+        <p:txBody>
+          <a:bodyPr wrap="square">
+            <a:spAutoFit/>
+          </a:bodyPr>
+          <a:lstStyle/>
+          <a:p>
+            <a:pPr algn="l"/>
+            <a:r>
+              <a:rPr sz="1050" b="0">
+                <a:solidFill>
+                  <a:srgbClr val="475569"/>
+                </a:solidFill>
+                <a:latin typeface="Calibri"/>
+              </a:rPr>
+              <a:t>Xception (best of 24 relabelings)</a:t>
+            </a:r>
+          </a:p>
+        </p:txBody>
+      </p:sp>
+      <p:sp>
+        <p:nvSpPr>
+          <p:cNvPr id="12" name="TextBox 11"/>
+          <p:cNvSpPr txBox="1"/>
+          <p:nvPr/>
+        </p:nvSpPr>
+        <p:spPr>
+          <a:xfrm>
+            <a:off x="5820704" y="3689700"/>
+            <a:ext cx="5502311" cy="365760"/>
+          </a:xfrm>
+          <a:prstGeom prst="rect">
+            <a:avLst/>
+          </a:prstGeom>
+          <a:noFill/>
+        </p:spPr>
+        <p:txBody>
+          <a:bodyPr wrap="square">
+            <a:spAutoFit/>
+          </a:bodyPr>
+          <a:lstStyle/>
+          <a:p>
+            <a:pPr algn="l"/>
+            <a:r>
+              <a:rPr sz="2200" b="1">
+                <a:solidFill>
+                  <a:srgbClr val="0F172A"/>
+                </a:solidFill>
+                <a:latin typeface="Calibri"/>
+              </a:rPr>
+              <a:t>ρ = 0.92</a:t>
+            </a:r>
+          </a:p>
+        </p:txBody>
+      </p:sp>
+      <p:sp>
+        <p:nvSpPr>
+          <p:cNvPr id="13" name="TextBox 12"/>
+          <p:cNvSpPr txBox="1"/>
+          <p:nvPr/>
+        </p:nvSpPr>
+        <p:spPr>
+          <a:xfrm>
+            <a:off x="5820704" y="4029700"/>
+            <a:ext cx="5502311" cy="320040"/>
+          </a:xfrm>
+          <a:prstGeom prst="rect">
+            <a:avLst/>
+          </a:prstGeom>
+          <a:noFill/>
+        </p:spPr>
+        <p:txBody>
+          <a:bodyPr wrap="square">
+            <a:spAutoFit/>
+          </a:bodyPr>
+          <a:lstStyle/>
+          <a:p>
+            <a:pPr algn="l"/>
+            <a:r>
+              <a:rPr sz="1050" b="0">
+                <a:solidFill>
+                  <a:srgbClr val="475569"/>
+                </a:solidFill>
+                <a:latin typeface="Calibri"/>
+              </a:rPr>
+              <a:t>CNN-ViT hybrid</a:t>
+            </a:r>
+          </a:p>
+        </p:txBody>
+      </p:sp>
+      <p:sp>
+        <p:nvSpPr>
+          <p:cNvPr id="14" name="TextBox 13"/>
+          <p:cNvSpPr txBox="1"/>
+          <p:nvPr/>
+        </p:nvSpPr>
+        <p:spPr>
+          <a:xfrm>
+            <a:off x="5820704" y="4593400"/>
+            <a:ext cx="5502311" cy="365760"/>
+          </a:xfrm>
+          <a:prstGeom prst="rect">
+            <a:avLst/>
+          </a:prstGeom>
+          <a:noFill/>
+        </p:spPr>
+        <p:txBody>
+          <a:bodyPr wrap="square">
+            <a:spAutoFit/>
+          </a:bodyPr>
+          <a:lstStyle/>
+          <a:p>
+            <a:pPr algn="l"/>
+            <a:r>
+              <a:rPr sz="2200" b="1">
+                <a:solidFill>
+                  <a:srgbClr val="0F172A"/>
+                </a:solidFill>
+                <a:latin typeface="Calibri"/>
+              </a:rPr>
+              <a:t>ρ = 0.73</a:t>
+            </a:r>
+          </a:p>
+        </p:txBody>
+      </p:sp>
+      <p:sp>
+        <p:nvSpPr>
+          <p:cNvPr id="15" name="TextBox 14"/>
+          <p:cNvSpPr txBox="1"/>
+          <p:nvPr/>
+        </p:nvSpPr>
+        <p:spPr>
+          <a:xfrm>
+            <a:off x="5820704" y="4933400"/>
+            <a:ext cx="5502311" cy="320040"/>
+          </a:xfrm>
+          <a:prstGeom prst="rect">
+            <a:avLst/>
+          </a:prstGeom>
+          <a:noFill/>
+        </p:spPr>
+        <p:txBody>
+          <a:bodyPr wrap="square">
+            <a:spAutoFit/>
+          </a:bodyPr>
+          <a:lstStyle/>
+          <a:p>
+            <a:pPr algn="l"/>
+            <a:r>
+              <a:rPr sz="1050" b="0">
+                <a:solidFill>
+                  <a:srgbClr val="475569"/>
+                </a:solidFill>
+                <a:latin typeface="Calibri"/>
+              </a:rPr>
+              <a:t>published official-data matrix</a:t>
+            </a:r>
+          </a:p>
+        </p:txBody>
+      </p:sp>
+      <p:sp>
+        <p:nvSpPr>
+          <p:cNvPr id="16" name="TextBox 15"/>
+          <p:cNvSpPr txBox="1"/>
+          <p:nvPr/>
+        </p:nvSpPr>
+        <p:spPr>
+          <a:xfrm>
+            <a:off x="5820704" y="5497100"/>
+            <a:ext cx="5502311" cy="365760"/>
+          </a:xfrm>
+          <a:prstGeom prst="rect">
+            <a:avLst/>
+          </a:prstGeom>
+          <a:noFill/>
+        </p:spPr>
+        <p:txBody>
+          <a:bodyPr wrap="square">
+            <a:spAutoFit/>
+          </a:bodyPr>
+          <a:lstStyle/>
+          <a:p>
+            <a:pPr algn="l"/>
+            <a:r>
+              <a:rPr sz="2200" b="1">
+                <a:solidFill>
+                  <a:srgbClr val="0F172A"/>
+                </a:solidFill>
+                <a:latin typeface="Calibri"/>
+              </a:rPr>
+              <a:t>ρ = -0.27</a:t>
+            </a:r>
+          </a:p>
+        </p:txBody>
+      </p:sp>
+      <p:sp>
+        <p:nvSpPr>
+          <p:cNvPr id="17" name="TextBox 16"/>
+          <p:cNvSpPr txBox="1"/>
+          <p:nvPr/>
+        </p:nvSpPr>
+        <p:spPr>
+          <a:xfrm>
+            <a:off x="5820704" y="5837100"/>
+            <a:ext cx="5502311" cy="320040"/>
+          </a:xfrm>
+          <a:prstGeom prst="rect">
+            <a:avLst/>
+          </a:prstGeom>
+          <a:noFill/>
+        </p:spPr>
+        <p:txBody>
+          <a:bodyPr wrap="square">
+            <a:spAutoFit/>
+          </a:bodyPr>
+          <a:lstStyle/>
+          <a:p>
+            <a:pPr algn="l"/>
+            <a:r>
+              <a:rPr sz="1050" b="0">
+                <a:solidFill>
+                  <a:srgbClr val="475569"/>
+                </a:solidFill>
+                <a:latin typeface="Calibri"/>
+              </a:rPr>
+              <a:t>DF model: blurrier real faces look fake</a:t>
+            </a:r>
+          </a:p>
+        </p:txBody>
+      </p:sp>
+      <p:sp>
+        <p:nvSpPr>
+          <p:cNvPr id="18" name="TextBox 17"/>
           <p:cNvSpPr txBox="1"/>
           <p:nvPr/>
         </p:nvSpPr>
@@ -7345,14 +11745,14 @@
                 </a:solidFill>
                 <a:latin typeface="Calibri"/>
               </a:rPr>
-              <a:t>Deepfake Detection — XceptionNet vs. CNN-ViT (23AID205)</a:t>
-            </a:r>
-          </a:p>
-        </p:txBody>
-      </p:sp>
-      <p:sp>
-        <p:nvSpPr>
-          <p:cNvPr id="8" name="TextBox 7"/>
+              <a:t>Deepfake Detection — Inverted Transfer (23AID205)</a:t>
+            </a:r>
+          </a:p>
+        </p:txBody>
+      </p:sp>
+      <p:sp>
+        <p:nvSpPr>
+          <p:cNvPr id="19" name="TextBox 18"/>
           <p:cNvSpPr txBox="1"/>
           <p:nvPr/>
         </p:nvSpPr>
@@ -7380,7 +11780,7 @@
                 </a:solidFill>
                 <a:latin typeface="Calibri"/>
               </a:rPr>
-              <a:t>8/10</a:t>
+              <a:t>8/14</a:t>
             </a:r>
           </a:p>
         </p:txBody>
@@ -7477,7 +11877,7 @@
                 </a:solidFill>
                 <a:latin typeface="Calibri"/>
               </a:rPr>
-              <a:t>STATUS</a:t>
+              <a:t>PHASE 4 · INTERVENTION</a:t>
             </a:r>
           </a:p>
         </p:txBody>
@@ -7512,7 +11912,7 @@
                 </a:solidFill>
                 <a:latin typeface="Calibri"/>
               </a:rPr>
-              <a:t>What's Done, What's Next</a:t>
+              <a:t>Randomizing Sharpness Partly Fixes It</a:t>
             </a:r>
           </a:p>
         </p:txBody>
@@ -7563,14 +11963,73 @@
       </p:sp>
       <p:sp>
         <p:nvSpPr>
-          <p:cNvPr id="6" name="Rectangle 5"/>
+          <p:cNvPr id="6" name="TextBox 5"/>
+          <p:cNvSpPr txBox="1"/>
+          <p:nvPr/>
+        </p:nvSpPr>
+        <p:spPr>
+          <a:xfrm>
+            <a:off x="640080" y="1691640"/>
+            <a:ext cx="10515600" cy="457200"/>
+          </a:xfrm>
+          <a:prstGeom prst="rect">
+            <a:avLst/>
+          </a:prstGeom>
+          <a:noFill/>
+        </p:spPr>
+        <p:txBody>
+          <a:bodyPr wrap="square">
+            <a:spAutoFit/>
+          </a:bodyPr>
+          <a:lstStyle/>
+          <a:p>
+            <a:pPr algn="l"/>
+            <a:r>
+              <a:rPr sz="1350" b="0">
+                <a:solidFill>
+                  <a:srgbClr val="475569"/>
+                </a:solidFill>
+                <a:latin typeface="Calibri"/>
+              </a:rPr>
+              <a:t>Training with random blur/sharpen (label-independent). Paired change vs. Phase 1, 3 seeds each.</a:t>
+            </a:r>
+          </a:p>
+        </p:txBody>
+      </p:sp>
+      <p:pic>
+        <p:nvPicPr>
+          <p:cNvPr id="7" name="Picture 6" descr="F5_intervention.png"/>
+          <p:cNvPicPr>
+            <a:picLocks noChangeAspect="1"/>
+          </p:cNvPicPr>
+          <p:nvPr/>
+        </p:nvPicPr>
+        <p:blipFill>
+          <a:blip r:embed="rId2"/>
+          <a:stretch>
+            <a:fillRect/>
+          </a:stretch>
+        </p:blipFill>
+        <p:spPr>
+          <a:xfrm>
+            <a:off x="640080" y="2286000"/>
+            <a:ext cx="5080955" cy="3840480"/>
+          </a:xfrm>
+          <a:prstGeom prst="rect">
+            <a:avLst/>
+          </a:prstGeom>
+        </p:spPr>
+      </p:pic>
+      <p:sp>
+        <p:nvSpPr>
+          <p:cNvPr id="8" name="Rectangle 7"/>
           <p:cNvSpPr/>
           <p:nvPr/>
         </p:nvSpPr>
         <p:spPr>
           <a:xfrm>
-            <a:off x="640080" y="1783080"/>
-            <a:ext cx="5195000" cy="4114800"/>
+            <a:off x="5995355" y="2286000"/>
+            <a:ext cx="5556260" cy="4114800"/>
           </a:xfrm>
           <a:prstGeom prst="rect">
             <a:avLst/>
@@ -7607,58 +12066,14 @@
       </p:sp>
       <p:sp>
         <p:nvSpPr>
-          <p:cNvPr id="7" name="Rectangle 6"/>
-          <p:cNvSpPr/>
-          <p:nvPr/>
-        </p:nvSpPr>
-        <p:spPr>
-          <a:xfrm>
-            <a:off x="640080" y="1783080"/>
-            <a:ext cx="5195000" cy="502920"/>
-          </a:xfrm>
-          <a:prstGeom prst="rect">
-            <a:avLst/>
-          </a:prstGeom>
-          <a:solidFill>
-            <a:srgbClr val="16A34A"/>
-          </a:solidFill>
-          <a:ln>
-            <a:noFill/>
-          </a:ln>
-          <a:effectLst/>
-        </p:spPr>
-        <p:style>
-          <a:lnRef idx="1">
-            <a:schemeClr val="accent1"/>
-          </a:lnRef>
-          <a:fillRef idx="3">
-            <a:schemeClr val="accent1"/>
-          </a:fillRef>
-          <a:effectRef idx="2">
-            <a:schemeClr val="accent1"/>
-          </a:effectRef>
-          <a:fontRef idx="minor">
-            <a:schemeClr val="lt1"/>
-          </a:fontRef>
-        </p:style>
-        <p:txBody>
-          <a:bodyPr rtlCol="0" anchor="ctr"/>
-          <a:lstStyle/>
-          <a:p>
-            <a:pPr algn="ctr"/>
-          </a:p>
-        </p:txBody>
-      </p:sp>
-      <p:sp>
-        <p:nvSpPr>
-          <p:cNvPr id="8" name="TextBox 7"/>
-          <p:cNvSpPr txBox="1"/>
-          <p:nvPr/>
-        </p:nvSpPr>
-        <p:spPr>
-          <a:xfrm>
-            <a:off x="914400" y="1901952"/>
-            <a:ext cx="4646360" cy="320040"/>
+          <p:cNvPr id="9" name="TextBox 8"/>
+          <p:cNvSpPr txBox="1"/>
+          <p:nvPr/>
+        </p:nvSpPr>
+        <p:spPr>
+          <a:xfrm>
+            <a:off x="6223955" y="2466000"/>
+            <a:ext cx="5099060" cy="320040"/>
           </a:xfrm>
           <a:prstGeom prst="rect">
             <a:avLst/>
@@ -7673,201 +12088,84 @@
           <a:p>
             <a:pPr algn="l"/>
             <a:r>
-              <a:rPr sz="1400" b="1">
-                <a:solidFill>
-                  <a:srgbClr val="FFFFFF"/>
-                </a:solidFill>
-                <a:latin typeface="Calibri"/>
-              </a:rPr>
-              <a:t>DONE</a:t>
-            </a:r>
-          </a:p>
-        </p:txBody>
-      </p:sp>
-      <p:sp>
-        <p:nvSpPr>
-          <p:cNvPr id="9" name="TextBox 8"/>
-          <p:cNvSpPr txBox="1"/>
-          <p:nvPr/>
-        </p:nvSpPr>
-        <p:spPr>
-          <a:xfrm>
-            <a:off x="914400" y="2514600"/>
-            <a:ext cx="4646360" cy="3314800"/>
-          </a:xfrm>
-          <a:prstGeom prst="rect">
-            <a:avLst/>
-          </a:prstGeom>
-          <a:noFill/>
-        </p:spPr>
-        <p:txBody>
-          <a:bodyPr wrap="square">
-            <a:spAutoFit/>
-          </a:bodyPr>
-          <a:lstStyle/>
-          <a:p>
-            <a:pPr>
-              <a:lnSpc>
-                <a:spcPct val="112000"/>
-              </a:lnSpc>
-              <a:spcAft>
-                <a:spcPts val="800"/>
-              </a:spcAft>
-            </a:pPr>
-            <a:r>
-              <a:rPr sz="1250" b="1">
-                <a:solidFill>
-                  <a:srgbClr val="16A34A"/>
-                </a:solidFill>
-                <a:latin typeface="Calibri"/>
-              </a:rPr>
-              <a:t>▸  Experiments 1-3 complete: baseline, full 4×4 cross-manipulation matrix, compression robustness</a:t>
-            </a:r>
-          </a:p>
-          <a:p>
-            <a:pPr>
-              <a:lnSpc>
-                <a:spcPct val="112000"/>
-              </a:lnSpc>
-              <a:spcAft>
-                <a:spcPts val="800"/>
-              </a:spcAft>
-            </a:pPr>
-            <a:r>
-              <a:rPr sz="1250" b="1">
-                <a:solidFill>
-                  <a:srgbClr val="16A34A"/>
-                </a:solidFill>
-                <a:latin typeface="Calibri"/>
-              </a:rPr>
-              <a:t>▸  Grad-CAM interpretability analysis and live demo verified end-to-end</a:t>
-            </a:r>
-          </a:p>
-          <a:p>
-            <a:pPr>
-              <a:lnSpc>
-                <a:spcPct val="112000"/>
-              </a:lnSpc>
-              <a:spcAft>
-                <a:spcPts val="800"/>
-              </a:spcAft>
-            </a:pPr>
-            <a:r>
-              <a:rPr sz="1250" b="1">
-                <a:solidFill>
-                  <a:srgbClr val="16A34A"/>
-                </a:solidFill>
-                <a:latin typeface="Calibri"/>
-              </a:rPr>
-              <a:t>▸  Phase 0 (hygiene + audit) complete -- ruled out a pipeline artifact as the explanation for the below-chance scores</a:t>
-            </a:r>
-          </a:p>
-          <a:p>
-            <a:pPr>
-              <a:lnSpc>
-                <a:spcPct val="112000"/>
-              </a:lnSpc>
-              <a:spcAft>
-                <a:spcPts val="800"/>
-              </a:spcAft>
-            </a:pPr>
-            <a:r>
-              <a:rPr sz="1250" b="1">
-                <a:solidFill>
-                  <a:srgbClr val="16A34A"/>
-                </a:solidFill>
-                <a:latin typeface="Calibri"/>
-              </a:rPr>
-              <a:t>▸  Architecture-independence of the transfer-failure pattern confirmed (r≈0.94 across both models' off-diagonal cells)</a:t>
-            </a:r>
-          </a:p>
-        </p:txBody>
-      </p:sp>
-      <p:sp>
-        <p:nvSpPr>
-          <p:cNvPr id="10" name="Rectangle 9"/>
-          <p:cNvSpPr/>
-          <p:nvPr/>
-        </p:nvSpPr>
-        <p:spPr>
-          <a:xfrm>
-            <a:off x="6063680" y="1783080"/>
-            <a:ext cx="5195000" cy="4114800"/>
-          </a:xfrm>
-          <a:prstGeom prst="rect">
-            <a:avLst/>
-          </a:prstGeom>
-          <a:solidFill>
-            <a:srgbClr val="F1F5F9"/>
-          </a:solidFill>
-          <a:ln>
-            <a:noFill/>
-          </a:ln>
-          <a:effectLst/>
-        </p:spPr>
-        <p:style>
-          <a:lnRef idx="1">
-            <a:schemeClr val="accent1"/>
-          </a:lnRef>
-          <a:fillRef idx="3">
-            <a:schemeClr val="accent1"/>
-          </a:fillRef>
-          <a:effectRef idx="2">
-            <a:schemeClr val="accent1"/>
-          </a:effectRef>
-          <a:fontRef idx="minor">
-            <a:schemeClr val="lt1"/>
-          </a:fontRef>
-        </p:style>
-        <p:txBody>
-          <a:bodyPr rtlCol="0" anchor="ctr"/>
-          <a:lstStyle/>
-          <a:p>
-            <a:pPr algn="ctr"/>
-          </a:p>
-        </p:txBody>
-      </p:sp>
-      <p:sp>
-        <p:nvSpPr>
-          <p:cNvPr id="11" name="Rectangle 10"/>
-          <p:cNvSpPr/>
-          <p:nvPr/>
-        </p:nvSpPr>
-        <p:spPr>
-          <a:xfrm>
-            <a:off x="6063680" y="1783080"/>
-            <a:ext cx="5195000" cy="502920"/>
-          </a:xfrm>
-          <a:prstGeom prst="rect">
-            <a:avLst/>
-          </a:prstGeom>
-          <a:solidFill>
-            <a:srgbClr val="F59E0B"/>
-          </a:solidFill>
-          <a:ln>
-            <a:noFill/>
-          </a:ln>
-          <a:effectLst/>
-        </p:spPr>
-        <p:style>
-          <a:lnRef idx="1">
-            <a:schemeClr val="accent1"/>
-          </a:lnRef>
-          <a:fillRef idx="3">
-            <a:schemeClr val="accent1"/>
-          </a:fillRef>
-          <a:effectRef idx="2">
-            <a:schemeClr val="accent1"/>
-          </a:effectRef>
-          <a:fontRef idx="minor">
-            <a:schemeClr val="lt1"/>
-          </a:fontRef>
-        </p:style>
-        <p:txBody>
-          <a:bodyPr rtlCol="0" anchor="ctr"/>
-          <a:lstStyle/>
-          <a:p>
-            <a:pPr algn="ctr"/>
+              <a:rPr sz="1100" b="1">
+                <a:solidFill>
+                  <a:srgbClr val="0E7490"/>
+                </a:solidFill>
+                <a:latin typeface="Calibri"/>
+              </a:rPr>
+              <a:t>CHANGE IN AUC</a:t>
+            </a:r>
+          </a:p>
+        </p:txBody>
+      </p:sp>
+      <p:sp>
+        <p:nvSpPr>
+          <p:cNvPr id="10" name="TextBox 9"/>
+          <p:cNvSpPr txBox="1"/>
+          <p:nvPr/>
+        </p:nvSpPr>
+        <p:spPr>
+          <a:xfrm>
+            <a:off x="6223955" y="2786000"/>
+            <a:ext cx="5099060" cy="365760"/>
+          </a:xfrm>
+          <a:prstGeom prst="rect">
+            <a:avLst/>
+          </a:prstGeom>
+          <a:noFill/>
+        </p:spPr>
+        <p:txBody>
+          <a:bodyPr wrap="square">
+            <a:spAutoFit/>
+          </a:bodyPr>
+          <a:lstStyle/>
+          <a:p>
+            <a:pPr algn="l"/>
+            <a:r>
+              <a:rPr sz="2200" b="1">
+                <a:solidFill>
+                  <a:srgbClr val="0F172A"/>
+                </a:solidFill>
+                <a:latin typeface="Calibri"/>
+              </a:rPr>
+              <a:t>+0.098</a:t>
+            </a:r>
+          </a:p>
+        </p:txBody>
+      </p:sp>
+      <p:sp>
+        <p:nvSpPr>
+          <p:cNvPr id="11" name="TextBox 10"/>
+          <p:cNvSpPr txBox="1"/>
+          <p:nvPr/>
+        </p:nvSpPr>
+        <p:spPr>
+          <a:xfrm>
+            <a:off x="6223955" y="3126000"/>
+            <a:ext cx="5099060" cy="320040"/>
+          </a:xfrm>
+          <a:prstGeom prst="rect">
+            <a:avLst/>
+          </a:prstGeom>
+          <a:noFill/>
+        </p:spPr>
+        <p:txBody>
+          <a:bodyPr wrap="square">
+            <a:spAutoFit/>
+          </a:bodyPr>
+          <a:lstStyle/>
+          <a:p>
+            <a:pPr algn="l"/>
+            <a:r>
+              <a:rPr sz="1050" b="0">
+                <a:solidFill>
+                  <a:srgbClr val="475569"/>
+                </a:solidFill>
+                <a:latin typeface="Calibri"/>
+              </a:rPr>
+              <a:t>DF → FS, now 0.36 (still below)</a:t>
+            </a:r>
           </a:p>
         </p:txBody>
       </p:sp>
@@ -7879,8 +12177,8 @@
         </p:nvSpPr>
         <p:spPr>
           <a:xfrm>
-            <a:off x="6338000" y="1901952"/>
-            <a:ext cx="4646360" cy="320040"/>
+            <a:off x="6223955" y="3689700"/>
+            <a:ext cx="5099060" cy="365760"/>
           </a:xfrm>
           <a:prstGeom prst="rect">
             <a:avLst/>
@@ -7895,13 +12193,13 @@
           <a:p>
             <a:pPr algn="l"/>
             <a:r>
-              <a:rPr sz="1400" b="1">
-                <a:solidFill>
-                  <a:srgbClr val="FFFFFF"/>
-                </a:solidFill>
-                <a:latin typeface="Calibri"/>
-              </a:rPr>
-              <a:t>NEXT</a:t>
+              <a:rPr sz="2200" b="1">
+                <a:solidFill>
+                  <a:srgbClr val="0F172A"/>
+                </a:solidFill>
+                <a:latin typeface="Calibri"/>
+              </a:rPr>
+              <a:t>+0.093</a:t>
             </a:r>
           </a:p>
         </p:txBody>
@@ -7914,93 +12212,29 @@
         </p:nvSpPr>
         <p:spPr>
           <a:xfrm>
-            <a:off x="6338000" y="2514600"/>
-            <a:ext cx="4646360" cy="3314800"/>
-          </a:xfrm>
-          <a:prstGeom prst="rect">
-            <a:avLst/>
-          </a:prstGeom>
-          <a:noFill/>
-        </p:spPr>
-        <p:txBody>
-          <a:bodyPr wrap="square">
-            <a:spAutoFit/>
-          </a:bodyPr>
-          <a:lstStyle/>
-          <a:p>
-            <a:pPr>
-              <a:lnSpc>
-                <a:spcPct val="112000"/>
-              </a:lnSpc>
-              <a:spcAft>
-                <a:spcPts val="800"/>
-              </a:spcAft>
-            </a:pPr>
-            <a:r>
-              <a:rPr sz="1250" b="1">
-                <a:solidFill>
-                  <a:srgbClr val="F59E0B"/>
-                </a:solidFill>
-                <a:latin typeface="Calibri"/>
-              </a:rPr>
-              <a:t>▸  Phase 1: rebuild preprocessing with a different, standard face-alignment pipeline and retrain -- tests whether the below-chance pattern disappears (preprocessing-driven) or persists (a real inversion mechanism)</a:t>
-            </a:r>
-          </a:p>
-          <a:p>
-            <a:pPr>
-              <a:lnSpc>
-                <a:spcPct val="112000"/>
-              </a:lnSpc>
-              <a:spcAft>
-                <a:spcPts val="800"/>
-              </a:spcAft>
-            </a:pPr>
-            <a:r>
-              <a:rPr sz="1250" b="1">
-                <a:solidFill>
-                  <a:srgbClr val="F59E0B"/>
-                </a:solidFill>
-                <a:latin typeface="Calibri"/>
-              </a:rPr>
-              <a:t>▸  Phase 2-3: systematic preprocessing sweep, then pin down the low-level statistic that predicts which cells invert</a:t>
-            </a:r>
-          </a:p>
-          <a:p>
-            <a:pPr>
-              <a:lnSpc>
-                <a:spcPct val="112000"/>
-              </a:lnSpc>
-              <a:spcAft>
-                <a:spcPts val="800"/>
-              </a:spcAft>
-            </a:pPr>
-            <a:r>
-              <a:rPr sz="1250" b="1">
-                <a:solidFill>
-                  <a:srgbClr val="F59E0B"/>
-                </a:solidFill>
-                <a:latin typeface="Calibri"/>
-              </a:rPr>
-              <a:t>▸  Phase 4-5: test interventions that fix it, check generalization across more architectures</a:t>
-            </a:r>
-          </a:p>
-          <a:p>
-            <a:pPr>
-              <a:lnSpc>
-                <a:spcPct val="112000"/>
-              </a:lnSpc>
-              <a:spcAft>
-                <a:spcPts val="800"/>
-              </a:spcAft>
-            </a:pPr>
-            <a:r>
-              <a:rPr sz="1250" b="1">
-                <a:solidFill>
-                  <a:srgbClr val="F59E0B"/>
-                </a:solidFill>
-                <a:latin typeface="Calibri"/>
-              </a:rPr>
-              <a:t>▸  ~4-week total budget for this phase of work, currently early -- paper write-up targeted by the end</a:t>
+            <a:off x="6223955" y="4029700"/>
+            <a:ext cx="5099060" cy="320040"/>
+          </a:xfrm>
+          <a:prstGeom prst="rect">
+            <a:avLst/>
+          </a:prstGeom>
+          <a:noFill/>
+        </p:spPr>
+        <p:txBody>
+          <a:bodyPr wrap="square">
+            <a:spAutoFit/>
+          </a:bodyPr>
+          <a:lstStyle/>
+          <a:p>
+            <a:pPr algn="l"/>
+            <a:r>
+              <a:rPr sz="1050" b="0">
+                <a:solidFill>
+                  <a:srgbClr val="475569"/>
+                </a:solidFill>
+                <a:latin typeface="Calibri"/>
+              </a:rPr>
+              <a:t>FS → NT, now 0.52 (at chance)</a:t>
             </a:r>
           </a:p>
         </p:txBody>
@@ -8008,6 +12242,146 @@
       <p:sp>
         <p:nvSpPr>
           <p:cNvPr id="14" name="TextBox 13"/>
+          <p:cNvSpPr txBox="1"/>
+          <p:nvPr/>
+        </p:nvSpPr>
+        <p:spPr>
+          <a:xfrm>
+            <a:off x="6223955" y="4593400"/>
+            <a:ext cx="5099060" cy="365760"/>
+          </a:xfrm>
+          <a:prstGeom prst="rect">
+            <a:avLst/>
+          </a:prstGeom>
+          <a:noFill/>
+        </p:spPr>
+        <p:txBody>
+          <a:bodyPr wrap="square">
+            <a:spAutoFit/>
+          </a:bodyPr>
+          <a:lstStyle/>
+          <a:p>
+            <a:pPr algn="l"/>
+            <a:r>
+              <a:rPr sz="2200" b="1">
+                <a:solidFill>
+                  <a:srgbClr val="0F172A"/>
+                </a:solidFill>
+                <a:latin typeface="Calibri"/>
+              </a:rPr>
+              <a:t>-0.048</a:t>
+            </a:r>
+          </a:p>
+        </p:txBody>
+      </p:sp>
+      <p:sp>
+        <p:nvSpPr>
+          <p:cNvPr id="15" name="TextBox 14"/>
+          <p:cNvSpPr txBox="1"/>
+          <p:nvPr/>
+        </p:nvSpPr>
+        <p:spPr>
+          <a:xfrm>
+            <a:off x="6223955" y="4933400"/>
+            <a:ext cx="5099060" cy="320040"/>
+          </a:xfrm>
+          <a:prstGeom prst="rect">
+            <a:avLst/>
+          </a:prstGeom>
+          <a:noFill/>
+        </p:spPr>
+        <p:txBody>
+          <a:bodyPr wrap="square">
+            <a:spAutoFit/>
+          </a:bodyPr>
+          <a:lstStyle/>
+          <a:p>
+            <a:pPr algn="l"/>
+            <a:r>
+              <a:rPr sz="1050" b="0">
+                <a:solidFill>
+                  <a:srgbClr val="475569"/>
+                </a:solidFill>
+                <a:latin typeface="Calibri"/>
+              </a:rPr>
+              <a:t>FS → F2F, a small cost</a:t>
+            </a:r>
+          </a:p>
+        </p:txBody>
+      </p:sp>
+      <p:sp>
+        <p:nvSpPr>
+          <p:cNvPr id="16" name="TextBox 15"/>
+          <p:cNvSpPr txBox="1"/>
+          <p:nvPr/>
+        </p:nvSpPr>
+        <p:spPr>
+          <a:xfrm>
+            <a:off x="6223955" y="5497100"/>
+            <a:ext cx="5099060" cy="365760"/>
+          </a:xfrm>
+          <a:prstGeom prst="rect">
+            <a:avLst/>
+          </a:prstGeom>
+          <a:noFill/>
+        </p:spPr>
+        <p:txBody>
+          <a:bodyPr wrap="square">
+            <a:spAutoFit/>
+          </a:bodyPr>
+          <a:lstStyle/>
+          <a:p>
+            <a:pPr algn="l"/>
+            <a:r>
+              <a:rPr sz="2200" b="1">
+                <a:solidFill>
+                  <a:srgbClr val="0F172A"/>
+                </a:solidFill>
+                <a:latin typeface="Calibri"/>
+              </a:rPr>
+              <a:t>-0.000</a:t>
+            </a:r>
+          </a:p>
+        </p:txBody>
+      </p:sp>
+      <p:sp>
+        <p:nvSpPr>
+          <p:cNvPr id="17" name="TextBox 16"/>
+          <p:cNvSpPr txBox="1"/>
+          <p:nvPr/>
+        </p:nvSpPr>
+        <p:spPr>
+          <a:xfrm>
+            <a:off x="6223955" y="5837100"/>
+            <a:ext cx="5099060" cy="320040"/>
+          </a:xfrm>
+          <a:prstGeom prst="rect">
+            <a:avLst/>
+          </a:prstGeom>
+          <a:noFill/>
+        </p:spPr>
+        <p:txBody>
+          <a:bodyPr wrap="square">
+            <a:spAutoFit/>
+          </a:bodyPr>
+          <a:lstStyle/>
+          <a:p>
+            <a:pPr algn="l"/>
+            <a:r>
+              <a:rPr sz="1050" b="0">
+                <a:solidFill>
+                  <a:srgbClr val="475569"/>
+                </a:solidFill>
+                <a:latin typeface="Calibri"/>
+              </a:rPr>
+              <a:t>in-domain accuracy unchanged</a:t>
+            </a:r>
+          </a:p>
+        </p:txBody>
+      </p:sp>
+      <p:sp>
+        <p:nvSpPr>
+          <p:cNvPr id="18" name="TextBox 17"/>
           <p:cNvSpPr txBox="1"/>
           <p:nvPr/>
         </p:nvSpPr>
@@ -8035,14 +12409,14 @@
                 </a:solidFill>
                 <a:latin typeface="Calibri"/>
               </a:rPr>
-              <a:t>Deepfake Detection — XceptionNet vs. CNN-ViT (23AID205)</a:t>
-            </a:r>
-          </a:p>
-        </p:txBody>
-      </p:sp>
-      <p:sp>
-        <p:nvSpPr>
-          <p:cNvPr id="15" name="TextBox 14"/>
+              <a:t>Deepfake Detection — Inverted Transfer (23AID205)</a:t>
+            </a:r>
+          </a:p>
+        </p:txBody>
+      </p:sp>
+      <p:sp>
+        <p:nvSpPr>
+          <p:cNvPr id="19" name="TextBox 18"/>
           <p:cNvSpPr txBox="1"/>
           <p:nvPr/>
         </p:nvSpPr>
@@ -8070,7 +12444,7 @@
                 </a:solidFill>
                 <a:latin typeface="Calibri"/>
               </a:rPr>
-              <a:t>9/10</a:t>
+              <a:t>9/14</a:t>
             </a:r>
           </a:p>
         </p:txBody>
